--- a/RPA Project Review 2.pptx
+++ b/RPA Project Review 2.pptx
@@ -2900,7 +2900,7 @@
                 <a:ea typeface="Calibri" pitchFamily="34" charset="-122"/>
                 <a:cs typeface="Calibri" pitchFamily="34" charset="-120"/>
               </a:rPr>
-              <a:t>Robotic Process Automation  ·  12 September 2026</a:t>
+              <a:t>Robotic Process Automation  ·  15 September 2026</a:t>
             </a:r>
             <a:endParaRPr lang="en-US" sz="1150" dirty="0"/>
           </a:p>

--- a/RPA Project Review 2.pptx
+++ b/RPA Project Review 2.pptx
@@ -4,6 +4,9 @@
   <p:sldMasterIdLst>
     <p:sldMasterId id="2147483648" r:id="rId1"/>
   </p:sldMasterIdLst>
+  <p:notesMasterIdLst>
+    <p:notesMasterId r:id="rId16"/>
+  </p:notesMasterIdLst>
   <p:sldIdLst>
     <p:sldId id="256" r:id="rId2"/>
     <p:sldId id="257" r:id="rId3"/>
@@ -20,9 +23,6 @@
     <p:sldId id="268" r:id="rId14"/>
     <p:sldId id="269" r:id="rId15"/>
   </p:sldIdLst>
-  <p:notesMasterIdLst>
-    <p:notesMasterId r:id="rId16"/>
-  </p:notesMasterIdLst>
   <p:sldSz cx="12192000" cy="6858000"/>
   <p:notesSz cx="6858000" cy="12192000"/>
   <p:defaultTextStyle>
@@ -117,13 +117,20 @@
       </a:defRPr>
     </a:lvl9pPr>
   </p:defaultTextStyle>
+  <p:extLst>
+    <p:ext uri="{EFAFB233-063F-42B5-8137-9DF3F51BA10A}">
+      <p15:sldGuideLst xmlns:p15="http://schemas.microsoft.com/office/powerpoint/2012/main"/>
+    </p:ext>
+  </p:extLst>
 </p:presentation>
 </file>
 
 <file path=ppt/charts/chart1.xml><?xml version="1.0" encoding="utf-8"?>
-<c:chartSpace xmlns:c="http://schemas.openxmlformats.org/drawingml/2006/chart" xmlns:a="http://schemas.openxmlformats.org/drawingml/2006/main" xmlns:r="http://schemas.openxmlformats.org/officeDocument/2006/relationships">
+<c:chartSpace xmlns:c="http://schemas.openxmlformats.org/drawingml/2006/chart" xmlns:a="http://schemas.openxmlformats.org/drawingml/2006/main" xmlns:r="http://schemas.openxmlformats.org/officeDocument/2006/relationships" xmlns:c16r2="http://schemas.microsoft.com/office/drawing/2015/06/chart">
   <c:date1904 val="0"/>
+  <c:lang val="en-GB"/>
   <c:roundedCorners val="1"/>
+  <c:style val="2"/>
   <c:chart>
     <c:title>
       <c:tx>
@@ -140,7 +147,7 @@
               </a:defRPr>
             </a:pPr>
             <a:r>
-              <a:rPr sz="1300" b="0" i="0" u="none" strike="noStrike">
+              <a:rPr lang="en-US" sz="1300" b="0" i="0" u="none" strike="noStrike">
                 <a:solidFill>
                   <a:srgbClr val="2F1D63"/>
                 </a:solidFill>
@@ -151,7 +158,6 @@
           </a:p>
         </c:rich>
       </c:tx>
-      <c:layout/>
       <c:overlay val="0"/>
     </c:title>
     <c:autoTitleDeleted val="0"/>
@@ -202,6 +208,11 @@
               </a:ln>
               <a:effectLst/>
             </c:spPr>
+            <c:extLst>
+              <c:ext xmlns:c16="http://schemas.microsoft.com/office/drawing/2014/chart" uri="{C3380CC4-5D6E-409C-BE32-E72D297353CC}">
+                <c16:uniqueId val="{00000001-1D08-4B34-9D0E-BB3161C03806}"/>
+              </c:ext>
+            </c:extLst>
           </c:dPt>
           <c:dPt>
             <c:idx val="1"/>
@@ -219,6 +230,11 @@
               </a:ln>
               <a:effectLst/>
             </c:spPr>
+            <c:extLst>
+              <c:ext xmlns:c16="http://schemas.microsoft.com/office/drawing/2014/chart" uri="{C3380CC4-5D6E-409C-BE32-E72D297353CC}">
+                <c16:uniqueId val="{00000003-1D08-4B34-9D0E-BB3161C03806}"/>
+              </c:ext>
+            </c:extLst>
           </c:dPt>
           <c:dPt>
             <c:idx val="2"/>
@@ -236,6 +252,11 @@
               </a:ln>
               <a:effectLst/>
             </c:spPr>
+            <c:extLst>
+              <c:ext xmlns:c16="http://schemas.microsoft.com/office/drawing/2014/chart" uri="{C3380CC4-5D6E-409C-BE32-E72D297353CC}">
+                <c16:uniqueId val="{00000005-1D08-4B34-9D0E-BB3161C03806}"/>
+              </c:ext>
+            </c:extLst>
           </c:dPt>
           <c:dLbls>
             <c:dLbl>
@@ -254,6 +275,7 @@
                       <a:latin typeface="Arial"/>
                     </a:defRPr>
                   </a:pPr>
+                  <a:endParaRPr lang="en-US"/>
                 </a:p>
               </c:txPr>
               <c:showLegendKey val="0"/>
@@ -262,6 +284,12 @@
               <c:showSerName val="0"/>
               <c:showPercent val="0"/>
               <c:showBubbleSize val="0"/>
+              <c:extLst>
+                <c:ext xmlns:c15="http://schemas.microsoft.com/office/drawing/2012/chart" uri="{CE6537A1-D6FC-4f65-9D91-7224C49458BB}"/>
+                <c:ext xmlns:c16="http://schemas.microsoft.com/office/drawing/2014/chart" uri="{C3380CC4-5D6E-409C-BE32-E72D297353CC}">
+                  <c16:uniqueId val="{00000001-1D08-4B34-9D0E-BB3161C03806}"/>
+                </c:ext>
+              </c:extLst>
             </c:dLbl>
             <c:dLbl>
               <c:idx val="1"/>
@@ -279,6 +307,7 @@
                       <a:latin typeface="Arial"/>
                     </a:defRPr>
                   </a:pPr>
+                  <a:endParaRPr lang="en-US"/>
                 </a:p>
               </c:txPr>
               <c:showLegendKey val="0"/>
@@ -287,6 +316,12 @@
               <c:showSerName val="0"/>
               <c:showPercent val="0"/>
               <c:showBubbleSize val="0"/>
+              <c:extLst>
+                <c:ext xmlns:c15="http://schemas.microsoft.com/office/drawing/2012/chart" uri="{CE6537A1-D6FC-4f65-9D91-7224C49458BB}"/>
+                <c:ext xmlns:c16="http://schemas.microsoft.com/office/drawing/2014/chart" uri="{C3380CC4-5D6E-409C-BE32-E72D297353CC}">
+                  <c16:uniqueId val="{00000003-1D08-4B34-9D0E-BB3161C03806}"/>
+                </c:ext>
+              </c:extLst>
             </c:dLbl>
             <c:dLbl>
               <c:idx val="2"/>
@@ -304,6 +339,7 @@
                       <a:latin typeface="Arial"/>
                     </a:defRPr>
                   </a:pPr>
+                  <a:endParaRPr lang="en-US"/>
                 </a:p>
               </c:txPr>
               <c:showLegendKey val="0"/>
@@ -312,8 +348,21 @@
               <c:showSerName val="0"/>
               <c:showPercent val="0"/>
               <c:showBubbleSize val="0"/>
+              <c:extLst>
+                <c:ext xmlns:c15="http://schemas.microsoft.com/office/drawing/2012/chart" uri="{CE6537A1-D6FC-4f65-9D91-7224C49458BB}"/>
+                <c:ext xmlns:c16="http://schemas.microsoft.com/office/drawing/2014/chart" uri="{C3380CC4-5D6E-409C-BE32-E72D297353CC}">
+                  <c16:uniqueId val="{00000005-1D08-4B34-9D0E-BB3161C03806}"/>
+                </c:ext>
+              </c:extLst>
             </c:dLbl>
             <c:numFmt formatCode="General" sourceLinked="0"/>
+            <c:spPr>
+              <a:noFill/>
+              <a:ln>
+                <a:noFill/>
+              </a:ln>
+              <a:effectLst/>
+            </c:spPr>
             <c:txPr>
               <a:bodyPr/>
               <a:lstStyle/>
@@ -326,6 +375,7 @@
                     <a:latin typeface="Arial"/>
                   </a:defRPr>
                 </a:pPr>
+                <a:endParaRPr lang="en-US"/>
               </a:p>
             </c:txPr>
             <c:showLegendKey val="0"/>
@@ -335,6 +385,9 @@
             <c:showPercent val="1"/>
             <c:showBubbleSize val="0"/>
             <c:showLeaderLines val="0"/>
+            <c:extLst>
+              <c:ext xmlns:c15="http://schemas.microsoft.com/office/drawing/2012/chart" uri="{CE6537A1-D6FC-4f65-9D91-7224C49458BB}"/>
+            </c:extLst>
           </c:dLbls>
           <c:cat>
             <c:strRef>
@@ -357,6 +410,7 @@
             <c:numRef>
               <c:f>Sheet1!$B$2:$B$4</c:f>
               <c:numCache>
+                <c:formatCode>General</c:formatCode>
                 <c:ptCount val="3"/>
                 <c:pt idx="0">
                   <c:v>40</c:v>
@@ -370,7 +424,21 @@
               </c:numCache>
             </c:numRef>
           </c:val>
+          <c:extLst>
+            <c:ext xmlns:c16="http://schemas.microsoft.com/office/drawing/2014/chart" uri="{C3380CC4-5D6E-409C-BE32-E72D297353CC}">
+              <c16:uniqueId val="{00000006-1D08-4B34-9D0E-BB3161C03806}"/>
+            </c:ext>
+          </c:extLst>
         </c:ser>
+        <c:dLbls>
+          <c:showLegendKey val="0"/>
+          <c:showVal val="0"/>
+          <c:showCatName val="0"/>
+          <c:showSerName val="0"/>
+          <c:showPercent val="0"/>
+          <c:showBubbleSize val="0"/>
+          <c:showLeaderLines val="0"/>
+        </c:dLbls>
         <c:firstSliceAng val="0"/>
         <c:holeSize val="56"/>
       </c:doughnutChart>
@@ -402,6 +470,7 @@
     </c:legend>
     <c:plotVisOnly val="1"/>
     <c:dispBlanksAs val="span"/>
+    <c:showDLblsOverMax val="1"/>
   </c:chart>
   <c:spPr>
     <a:noFill/>
@@ -417,9 +486,11 @@
 </file>
 
 <file path=ppt/charts/chart2.xml><?xml version="1.0" encoding="utf-8"?>
-<c:chartSpace xmlns:c="http://schemas.openxmlformats.org/drawingml/2006/chart" xmlns:a="http://schemas.openxmlformats.org/drawingml/2006/main" xmlns:r="http://schemas.openxmlformats.org/officeDocument/2006/relationships">
+<c:chartSpace xmlns:c="http://schemas.openxmlformats.org/drawingml/2006/chart" xmlns:a="http://schemas.openxmlformats.org/drawingml/2006/main" xmlns:r="http://schemas.openxmlformats.org/officeDocument/2006/relationships" xmlns:c16r2="http://schemas.microsoft.com/office/drawing/2015/06/chart">
   <c:date1904 val="0"/>
+  <c:lang val="en-GB"/>
   <c:roundedCorners val="1"/>
+  <c:style val="2"/>
   <c:chart>
     <c:autoTitleDeleted val="1"/>
     <c:plotArea>
@@ -451,18 +522,26 @@
           <c:invertIfNegative val="0"/>
           <c:dLbls>
             <c:numFmt formatCode="#,##0" sourceLinked="0"/>
+            <c:spPr>
+              <a:noFill/>
+              <a:ln>
+                <a:noFill/>
+              </a:ln>
+              <a:effectLst/>
+            </c:spPr>
             <c:txPr>
               <a:bodyPr/>
               <a:lstStyle/>
               <a:p>
                 <a:pPr>
-                  <a:defRPr b="1" i="0" strike="noStrike" sz="1200" u="none">
+                  <a:defRPr sz="1200" b="1" i="0" u="none" strike="noStrike">
                     <a:solidFill>
                       <a:srgbClr val="2F1D63"/>
                     </a:solidFill>
                     <a:latin typeface="Arial"/>
                   </a:defRPr>
                 </a:pPr>
+                <a:endParaRPr lang="en-US"/>
               </a:p>
             </c:txPr>
             <c:showLegendKey val="0"/>
@@ -472,34 +551,37 @@
             <c:showPercent val="0"/>
             <c:showBubbleSize val="0"/>
             <c:showLeaderLines val="0"/>
+            <c:extLst>
+              <c:ext xmlns:c15="http://schemas.microsoft.com/office/drawing/2012/chart" uri="{CE6537A1-D6FC-4f65-9D91-7224C49458BB}">
+                <c15:showLeaderLines val="0"/>
+              </c:ext>
+            </c:extLst>
           </c:dLbls>
           <c:cat>
-            <c:multiLvlStrRef>
+            <c:strRef>
               <c:f>Sheet1!$A$2:$A$7</c:f>
-              <c:multiLvlStrCache>
+              <c:strCache>
                 <c:ptCount val="6"/>
-                <c:lvl>
-                  <c:pt idx="0">
-                    <c:v>R1 Timestamp</c:v>
-                  </c:pt>
-                  <c:pt idx="1">
-                    <c:v>R2 Quantity</c:v>
-                  </c:pt>
-                  <c:pt idx="2">
-                    <c:v>R3 Whitelist</c:v>
-                  </c:pt>
-                  <c:pt idx="3">
-                    <c:v>R4 Duplicate</c:v>
-                  </c:pt>
-                  <c:pt idx="4">
-                    <c:v>R5 Sequence</c:v>
-                  </c:pt>
-                  <c:pt idx="5">
-                    <c:v>R6 Contract event</c:v>
-                  </c:pt>
-                </c:lvl>
-              </c:multiLvlStrCache>
-            </c:multiLvlStrRef>
+                <c:pt idx="0">
+                  <c:v>R1 Timestamp</c:v>
+                </c:pt>
+                <c:pt idx="1">
+                  <c:v>R2 Quantity</c:v>
+                </c:pt>
+                <c:pt idx="2">
+                  <c:v>R3 Whitelist</c:v>
+                </c:pt>
+                <c:pt idx="3">
+                  <c:v>R4 Duplicate</c:v>
+                </c:pt>
+                <c:pt idx="4">
+                  <c:v>R5 Sequence</c:v>
+                </c:pt>
+                <c:pt idx="5">
+                  <c:v>R6 Contract event</c:v>
+                </c:pt>
+              </c:strCache>
+            </c:strRef>
           </c:cat>
           <c:val>
             <c:numRef>
@@ -528,36 +610,23 @@
               </c:numCache>
             </c:numRef>
           </c:val>
+          <c:extLst>
+            <c:ext xmlns:c16="http://schemas.microsoft.com/office/drawing/2014/chart" uri="{C3380CC4-5D6E-409C-BE32-E72D297353CC}">
+              <c16:uniqueId val="{00000000-E008-4477-8B66-9E69AC9D49D4}"/>
+            </c:ext>
+          </c:extLst>
         </c:ser>
         <c:dLbls>
-          <c:numFmt formatCode="#,##0" sourceLinked="0"/>
-          <c:txPr>
-            <a:bodyPr/>
-            <a:lstStyle/>
-            <a:p>
-              <a:pPr>
-                <a:defRPr b="1" i="0" strike="noStrike" sz="1200" u="none">
-                  <a:solidFill>
-                    <a:srgbClr val="2F1D63"/>
-                  </a:solidFill>
-                  <a:latin typeface="Arial"/>
-                </a:defRPr>
-              </a:pPr>
-            </a:p>
-          </c:txPr>
           <c:showLegendKey val="0"/>
           <c:showVal val="1"/>
           <c:showCatName val="0"/>
           <c:showSerName val="0"/>
           <c:showPercent val="0"/>
           <c:showBubbleSize val="0"/>
-          <c:showLeaderLines val="0"/>
         </c:dLbls>
         <c:gapWidth val="55"/>
-        <c:overlap val="0"/>
         <c:axId val="2094734554"/>
         <c:axId val="2094734552"/>
-        <c:axId val="2094734556"/>
       </c:barChart>
       <c:catAx>
         <c:axId val="2094734554"/>
@@ -598,6 +667,7 @@
         <c:crosses val="autoZero"/>
         <c:auto val="1"/>
         <c:lblAlgn val="ctr"/>
+        <c:lblOffset val="100"/>
         <c:noMultiLvlLbl val="1"/>
       </c:catAx>
       <c:valAx>
@@ -662,6 +732,7 @@
     </c:plotArea>
     <c:plotVisOnly val="1"/>
     <c:dispBlanksAs val="span"/>
+    <c:showDLblsOverMax val="1"/>
   </c:chart>
   <c:spPr>
     <a:noFill/>
@@ -698,234 +769,10 @@
           <a:chExt cx="0" cy="0"/>
         </a:xfrm>
       </p:grpSpPr>
-      <p:sp>
-        <p:nvSpPr>
-          <p:cNvPr id="2" name="Header Placeholder 1"/>
-          <p:cNvSpPr>
-            <a:spLocks noGrp="1"/>
-          </p:cNvSpPr>
-          <p:nvPr>
-            <p:ph type="hdr" sz="quarter"/>
-          </p:nvPr>
-        </p:nvSpPr>
-        <p:spPr>
-          <a:xfrm>
-            <a:off x="0" y="0"/>
-            <a:ext cx="2971800" cy="458788"/>
-          </a:xfrm>
-          <a:prstGeom prst="rect">
-            <a:avLst/>
-          </a:prstGeom>
-        </p:spPr>
-        <p:txBody>
-          <a:bodyPr vert="horz" lIns="91440" tIns="45720" rIns="91440" bIns="45720" rtlCol="0"/>
-          <a:lstStyle>
-            <a:lvl1pPr algn="l">
-              <a:defRPr sz="1200"/>
-            </a:lvl1pPr>
-          </a:lstStyle>
-          <a:p>
-            <a:endParaRPr lang="en-US"/>
-          </a:p>
-        </p:txBody>
-      </p:sp>
-      <p:sp>
-        <p:nvSpPr>
-          <p:cNvPr id="3" name="Date Placeholder 2"/>
-          <p:cNvSpPr>
-            <a:spLocks noGrp="1"/>
-          </p:cNvSpPr>
-          <p:nvPr>
-            <p:ph type="dt" idx="1"/>
-          </p:nvPr>
-        </p:nvSpPr>
-        <p:spPr>
-          <a:xfrm>
-            <a:off x="3884613" y="0"/>
-            <a:ext cx="2971800" cy="458788"/>
-          </a:xfrm>
-          <a:prstGeom prst="rect">
-            <a:avLst/>
-          </a:prstGeom>
-        </p:spPr>
-        <p:txBody>
-          <a:bodyPr vert="horz" lIns="91440" tIns="45720" rIns="91440" bIns="45720" rtlCol="0"/>
-          <a:lstStyle>
-            <a:lvl1pPr algn="r">
-              <a:defRPr sz="1200"/>
-            </a:lvl1pPr>
-          </a:lstStyle>
-          <a:p>
-            <a:fld id="{5282F153-3F37-0F45-9E97-73ACFA13230C}" type="datetimeFigureOut">
-              <a:rPr lang="en-US"/>
-              <a:t>7/23/19</a:t>
-            </a:fld>
-            <a:endParaRPr lang="en-US"/>
-          </a:p>
-        </p:txBody>
-      </p:sp>
-      <p:sp>
-        <p:nvSpPr>
-          <p:cNvPr id="4" name="Slide Image Placeholder 3"/>
-          <p:cNvSpPr>
-            <a:spLocks noGrp="1" noRot="1" noChangeAspect="1"/>
-          </p:cNvSpPr>
-          <p:nvPr>
-            <p:ph type="sldImg" idx="2"/>
-          </p:nvPr>
-        </p:nvSpPr>
-        <p:spPr>
-          <a:xfrm>
-            <a:off x="685800" y="1143000"/>
-            <a:ext cx="5486400" cy="3086100"/>
-          </a:xfrm>
-          <a:prstGeom prst="rect">
-            <a:avLst/>
-          </a:prstGeom>
-          <a:noFill/>
-          <a:ln w="12700">
-            <a:solidFill>
-              <a:prstClr val="black"/>
-            </a:solidFill>
-          </a:ln>
-        </p:spPr>
-        <p:txBody>
-          <a:bodyPr vert="horz" lIns="91440" tIns="45720" rIns="91440" bIns="45720" rtlCol="0" anchor="ctr"/>
-          <a:lstStyle/>
-          <a:p>
-            <a:endParaRPr lang="en-US"/>
-          </a:p>
-        </p:txBody>
-      </p:sp>
-      <p:sp>
-        <p:nvSpPr>
-          <p:cNvPr id="5" name="Notes Placeholder 4"/>
-          <p:cNvSpPr>
-            <a:spLocks noGrp="1"/>
-          </p:cNvSpPr>
-          <p:nvPr>
-            <p:ph type="body" sz="quarter" idx="3"/>
-          </p:nvPr>
-        </p:nvSpPr>
-        <p:spPr>
-          <a:xfrm>
-            <a:off x="685800" y="4400550"/>
-            <a:ext cx="5486400" cy="3600450"/>
-          </a:xfrm>
-          <a:prstGeom prst="rect">
-            <a:avLst/>
-          </a:prstGeom>
-        </p:spPr>
-        <p:txBody>
-          <a:bodyPr vert="horz" lIns="91440" tIns="45720" rIns="91440" bIns="45720" rtlCol="0"/>
-          <a:lstStyle/>
-          <a:p>
-            <a:pPr lvl="0"/>
-            <a:r>
-              <a:rPr lang="en-US"/>
-              <a:t>Click to edit Master text styles</a:t>
-            </a:r>
-          </a:p>
-          <a:p>
-            <a:pPr lvl="1"/>
-            <a:r>
-              <a:rPr lang="en-US"/>
-              <a:t>Second level</a:t>
-            </a:r>
-          </a:p>
-          <a:p>
-            <a:pPr lvl="2"/>
-            <a:r>
-              <a:rPr lang="en-US"/>
-              <a:t>Third level</a:t>
-            </a:r>
-          </a:p>
-          <a:p>
-            <a:pPr lvl="3"/>
-            <a:r>
-              <a:rPr lang="en-US"/>
-              <a:t>Fourth level</a:t>
-            </a:r>
-          </a:p>
-          <a:p>
-            <a:pPr lvl="4"/>
-            <a:r>
-              <a:rPr lang="en-US"/>
-              <a:t>Fifth level</a:t>
-            </a:r>
-          </a:p>
-        </p:txBody>
-      </p:sp>
-      <p:sp>
-        <p:nvSpPr>
-          <p:cNvPr id="6" name="Footer Placeholder 5"/>
-          <p:cNvSpPr>
-            <a:spLocks noGrp="1"/>
-          </p:cNvSpPr>
-          <p:nvPr>
-            <p:ph type="ftr" sz="quarter" idx="4"/>
-          </p:nvPr>
-        </p:nvSpPr>
-        <p:spPr>
-          <a:xfrm>
-            <a:off x="0" y="8685213"/>
-            <a:ext cx="2971800" cy="458787"/>
-          </a:xfrm>
-          <a:prstGeom prst="rect">
-            <a:avLst/>
-          </a:prstGeom>
-        </p:spPr>
-        <p:txBody>
-          <a:bodyPr vert="horz" lIns="91440" tIns="45720" rIns="91440" bIns="45720" rtlCol="0" anchor="b"/>
-          <a:lstStyle>
-            <a:lvl1pPr algn="l">
-              <a:defRPr sz="1200"/>
-            </a:lvl1pPr>
-          </a:lstStyle>
-          <a:p>
-            <a:endParaRPr lang="en-US"/>
-          </a:p>
-        </p:txBody>
-      </p:sp>
-      <p:sp>
-        <p:nvSpPr>
-          <p:cNvPr id="7" name="Slide Number Placeholder 6"/>
-          <p:cNvSpPr>
-            <a:spLocks noGrp="1"/>
-          </p:cNvSpPr>
-          <p:nvPr>
-            <p:ph type="sldNum" sz="quarter" idx="5"/>
-          </p:nvPr>
-        </p:nvSpPr>
-        <p:spPr>
-          <a:xfrm>
-            <a:off x="3884613" y="8685213"/>
-            <a:ext cx="2971800" cy="458787"/>
-          </a:xfrm>
-          <a:prstGeom prst="rect">
-            <a:avLst/>
-          </a:prstGeom>
-        </p:spPr>
-        <p:txBody>
-          <a:bodyPr vert="horz" lIns="91440" tIns="45720" rIns="91440" bIns="45720" rtlCol="0" anchor="b"/>
-          <a:lstStyle>
-            <a:lvl1pPr algn="r">
-              <a:defRPr sz="1200"/>
-            </a:lvl1pPr>
-          </a:lstStyle>
-          <a:p>
-            <a:fld id="{CE5E9CC1-C706-0F49-92D6-E571CC5EEA8F}" type="slidenum">
-              <a:rPr lang="en-US"/>
-              <a:t>‹#›</a:t>
-            </a:fld>
-            <a:endParaRPr lang="en-US"/>
-          </a:p>
-        </p:txBody>
-      </p:sp>
     </p:spTree>
     <p:extLst>
       <p:ext uri="{BB962C8B-B14F-4D97-AF65-F5344CB8AC3E}">
-        <p14:creationId xmlns:p14="http://schemas.microsoft.com/office/powerpoint/2010/main" val="1024086991"/>
+        <p14:creationId xmlns:p14="http://schemas.microsoft.com/office/powerpoint/2010/main" val="1929832899"/>
       </p:ext>
     </p:extLst>
   </p:cSld>
@@ -1073,7 +920,6 @@
               <a:rPr lang="en-US" dirty="0"/>
               <a:t>Nitin opens. One line: blockchain makes a record immutable, it does not make it correct — that is the gap this project fills.</a:t>
             </a:r>
-            <a:endParaRPr lang="en-US" dirty="0"/>
           </a:p>
         </p:txBody>
       </p:sp>
@@ -1161,7 +1007,6 @@
               <a:rPr lang="en-US" dirty="0"/>
               <a:t>This is the 90 seconds that separate the project from a data-comparison script. Open the CSV, show the three hash columns, then run tamper_test.ps1 live. It flips one verdict, detects it at the exact line, and restores the file.</a:t>
             </a:r>
-            <a:endParaRPr lang="en-US" dirty="0"/>
           </a:p>
         </p:txBody>
       </p:sp>
@@ -1249,7 +1094,6 @@
               <a:rPr lang="en-US" dirty="0"/>
               <a:t>Volunteer the bug story even if not asked — it is the most credible sentence available, because it is what actually happens when you test properly.</a:t>
             </a:r>
-            <a:endParaRPr lang="en-US" dirty="0"/>
           </a:p>
         </p:txBody>
       </p:sp>
@@ -1337,7 +1181,6 @@
               <a:rPr lang="en-US" dirty="0"/>
               <a:t>Adithya leads. Note that Etherscan retired its V1 endpoints, so the project uses the V2 multichain endpoint — which is also why switching to Polygon is a single config cell.</a:t>
             </a:r>
-            <a:endParaRPr lang="en-US" dirty="0"/>
           </a:p>
         </p:txBody>
       </p:sp>
@@ -1425,7 +1268,6 @@
               <a:rPr lang="en-US" dirty="0"/>
               <a:t>Do not skip this slide. Answer plainly if asked — waffling reads as not knowing. The three gaps are queues, browser automation and the dialog.</a:t>
             </a:r>
-            <a:endParaRPr lang="en-US" dirty="0"/>
           </a:p>
         </p:txBody>
       </p:sp>
@@ -1513,7 +1355,6 @@
               <a:rPr lang="en-US" dirty="0"/>
               <a:t>Close by returning to the opening line: immutable is not the same as verified, and this is the bot that does the verifying. Then invite questions.</a:t>
             </a:r>
-            <a:endParaRPr lang="en-US" dirty="0"/>
           </a:p>
         </p:txBody>
       </p:sp>
@@ -1601,7 +1442,6 @@
               <a:rPr lang="en-US" dirty="0"/>
               <a:t>Everything proposed at Review 1 is built. Phase 5 is deliberately marked partial — the package is published to Orchestrator, but the queue activities have not been executed against a live queue. Say that plainly.</a:t>
             </a:r>
-            <a:endParaRPr lang="en-US" dirty="0"/>
           </a:p>
         </p:txBody>
       </p:sp>
@@ -1689,7 +1529,6 @@
               <a:rPr lang="en-US" dirty="0"/>
               <a:t>This is the intellectual core of the project and the question most likely to be probed. Land the distinction between immutable and verified before showing any code.</a:t>
             </a:r>
-            <a:endParaRPr lang="en-US" dirty="0"/>
           </a:p>
         </p:txBody>
       </p:sp>
@@ -1777,7 +1616,6 @@
               <a:rPr lang="en-US" dirty="0"/>
               <a:t>Adithya leads here. Emphasise the normalisation point — it is the design decision that earns the chain-agnostic claim, and it is provable with the chain-swap demo later.</a:t>
             </a:r>
-            <a:endParaRPr lang="en-US" dirty="0"/>
           </a:p>
         </p:txBody>
       </p:sp>
@@ -1865,7 +1703,6 @@
               <a:rPr lang="en-US" dirty="0"/>
               <a:t>Each seeded failure is a real, valid on-chain transaction. Point out that the demo data contains exactly one anomaly per rule so the run exercises all six.</a:t>
             </a:r>
-            <a:endParaRPr lang="en-US" dirty="0"/>
           </a:p>
         </p:txBody>
       </p:sp>
@@ -1953,7 +1790,6 @@
               <a:rPr lang="en-US" dirty="0"/>
               <a:t>21 seconds of workflow execution. Roughly 12 of those are Excel starting up; the validation engine itself is about 4 seconds. Against a manual baseline of 2-3 minutes per transaction this supports the 90% reduction claim from Review 1 — present it as an estimate, not a measured comparison.</a:t>
             </a:r>
-            <a:endParaRPr lang="en-US" dirty="0"/>
           </a:p>
         </p:txBody>
       </p:sp>
@@ -2041,7 +1877,6 @@
               <a:rPr lang="en-US" dirty="0"/>
               <a:t>The oracle is the point worth making here: we did not just assert our own output was right, we verified it against an independent implementation.</a:t>
             </a:r>
-            <a:endParaRPr lang="en-US" dirty="0"/>
           </a:p>
         </p:txBody>
       </p:sp>
@@ -2129,7 +1964,6 @@
               <a:rPr lang="en-US" dirty="0"/>
               <a:t>Demo moment: toggle R4 off live. Adithya leads. The point is that change control sits with the people who own the domain knowledge, not with developers.</a:t>
             </a:r>
-            <a:endParaRPr lang="en-US" dirty="0"/>
           </a:p>
         </p:txBody>
       </p:sp>
@@ -2217,7 +2051,6 @@
               <a:rPr lang="en-US" dirty="0"/>
               <a:t>Nitin leads. Demo the dialog live if the projector allows — set AttendedMode True and EscalationMode PROMPT beforehand. Choose REJECTED so the decision shows in the dashboard afterwards.</a:t>
             </a:r>
-            <a:endParaRPr lang="en-US" dirty="0"/>
           </a:p>
         </p:txBody>
       </p:sp>
@@ -2290,6 +2123,11 @@
 <file path=ppt/slideMasters/slideMaster1.xml><?xml version="1.0" encoding="utf-8"?>
 <p:sldMaster xmlns:a="http://schemas.openxmlformats.org/drawingml/2006/main" xmlns:r="http://schemas.openxmlformats.org/officeDocument/2006/relationships" xmlns:p="http://schemas.openxmlformats.org/presentationml/2006/main">
   <p:cSld>
+    <p:bg>
+      <p:bgRef idx="1001">
+        <a:schemeClr val="bg1"/>
+      </p:bgRef>
+    </p:bg>
     <p:spTree>
       <p:nvGrpSpPr>
         <p:cNvPr id="1" name=""/>
@@ -2572,6 +2410,7 @@
         <a:solidFill>
           <a:srgbClr val="0C0625"/>
         </a:solidFill>
+        <a:effectLst/>
       </p:bgPr>
     </p:bg>
     <p:spTree>
@@ -2659,11 +2498,11 @@
           <a:bodyPr wrap="square" lIns="0" tIns="0" rIns="0" bIns="0" rtlCol="0" anchor="ctr"/>
           <a:lstStyle/>
           <a:p>
-            <a:pPr indent="0" marL="0">
-              <a:buNone/>
-            </a:pPr>
-            <a:r>
-              <a:rPr lang="en-US" sz="1250" b="1" spc="220" kern="0" dirty="0">
+            <a:pPr marL="0" indent="0">
+              <a:buNone/>
+            </a:pPr>
+            <a:r>
+              <a:rPr lang="en-US" sz="1250" b="1" kern="0" spc="220" dirty="0">
                 <a:solidFill>
                   <a:srgbClr val="FF8AAF"/>
                 </a:solidFill>
@@ -2698,7 +2537,7 @@
           <a:bodyPr wrap="square" lIns="0" tIns="0" rIns="0" bIns="0" rtlCol="0" anchor="ctr"/>
           <a:lstStyle/>
           <a:p>
-            <a:pPr indent="0" marL="0">
+            <a:pPr marL="0" indent="0">
               <a:lnSpc>
                 <a:spcPts val="4200"/>
               </a:lnSpc>
@@ -2740,7 +2579,7 @@
           <a:bodyPr wrap="square" lIns="0" tIns="0" rIns="0" bIns="0" rtlCol="0" anchor="ctr"/>
           <a:lstStyle/>
           <a:p>
-            <a:pPr indent="0" marL="0">
+            <a:pPr marL="0" indent="0">
               <a:lnSpc>
                 <a:spcPts val="2000"/>
               </a:lnSpc>
@@ -2782,7 +2621,7 @@
           <a:bodyPr wrap="square" lIns="0" tIns="0" rIns="0" bIns="0" rtlCol="0" anchor="ctr"/>
           <a:lstStyle/>
           <a:p>
-            <a:pPr indent="0" marL="0">
+            <a:pPr marL="0" indent="0">
               <a:buNone/>
             </a:pPr>
             <a:r>
@@ -2796,9 +2635,6 @@
               </a:rPr>
               <a:t>Adithya Sankar Menon</a:t>
             </a:r>
-            <a:pPr indent="0" marL="0">
-              <a:buNone/>
-            </a:pPr>
             <a:r>
               <a:rPr lang="en-US" sz="1300" dirty="0">
                 <a:solidFill>
@@ -2835,7 +2671,7 @@
           <a:bodyPr wrap="square" lIns="0" tIns="0" rIns="0" bIns="0" rtlCol="0" anchor="ctr"/>
           <a:lstStyle/>
           <a:p>
-            <a:pPr indent="0" marL="0">
+            <a:pPr marL="0" indent="0">
               <a:buNone/>
             </a:pPr>
             <a:r>
@@ -2849,9 +2685,6 @@
               </a:rPr>
               <a:t>Nitin Nandakumar</a:t>
             </a:r>
-            <a:pPr indent="0" marL="0">
-              <a:buNone/>
-            </a:pPr>
             <a:r>
               <a:rPr lang="en-US" sz="1300" dirty="0">
                 <a:solidFill>
@@ -2888,7 +2721,7 @@
           <a:bodyPr wrap="square" lIns="0" tIns="0" rIns="0" bIns="0" rtlCol="0" anchor="ctr"/>
           <a:lstStyle/>
           <a:p>
-            <a:pPr indent="0" marL="0">
+            <a:pPr marL="0" indent="0">
               <a:buNone/>
             </a:pPr>
             <a:r>
@@ -2922,6 +2755,7 @@
         <a:solidFill>
           <a:srgbClr val="0C0625"/>
         </a:solidFill>
+        <a:effectLst/>
       </p:bgPr>
     </p:bg>
     <p:spTree>
@@ -2959,11 +2793,11 @@
           <a:bodyPr wrap="square" lIns="0" tIns="0" rIns="0" bIns="0" rtlCol="0" anchor="ctr"/>
           <a:lstStyle/>
           <a:p>
-            <a:pPr indent="0" marL="0">
-              <a:buNone/>
-            </a:pPr>
-            <a:r>
-              <a:rPr lang="en-US" sz="1150" b="1" spc="160" kern="0" dirty="0">
+            <a:pPr marL="0" indent="0">
+              <a:buNone/>
+            </a:pPr>
+            <a:r>
+              <a:rPr lang="en-US" sz="1150" b="1" kern="0" spc="160" dirty="0">
                 <a:solidFill>
                   <a:srgbClr val="FF8AAF"/>
                 </a:solidFill>
@@ -2998,7 +2832,7 @@
           <a:bodyPr wrap="square" lIns="0" tIns="0" rIns="0" bIns="0" rtlCol="0" anchor="ctr"/>
           <a:lstStyle/>
           <a:p>
-            <a:pPr indent="0" marL="0">
+            <a:pPr marL="0" indent="0">
               <a:buNone/>
             </a:pPr>
             <a:r>
@@ -3037,7 +2871,7 @@
           <a:bodyPr wrap="square" lIns="0" tIns="0" rIns="0" bIns="0" rtlCol="0" anchor="ctr"/>
           <a:lstStyle/>
           <a:p>
-            <a:pPr indent="0" marL="0">
+            <a:pPr marL="0" indent="0">
               <a:lnSpc>
                 <a:spcPts val="2000"/>
               </a:lnSpc>
@@ -3106,7 +2940,7 @@
           <a:bodyPr wrap="square" lIns="0" tIns="0" rIns="0" bIns="0" rtlCol="0" anchor="ctr"/>
           <a:lstStyle/>
           <a:p>
-            <a:pPr indent="0" marL="0">
+            <a:pPr marL="0" indent="0">
               <a:buNone/>
             </a:pPr>
             <a:r>
@@ -3145,7 +2979,7 @@
           <a:bodyPr wrap="square" lIns="0" tIns="0" rIns="0" bIns="0" rtlCol="0" anchor="ctr"/>
           <a:lstStyle/>
           <a:p>
-            <a:pPr indent="0" marL="0">
+            <a:pPr marL="0" indent="0">
               <a:buNone/>
             </a:pPr>
             <a:r>
@@ -3184,7 +3018,7 @@
           <a:bodyPr wrap="square" lIns="0" tIns="0" rIns="0" bIns="0" rtlCol="0" anchor="ctr"/>
           <a:lstStyle/>
           <a:p>
-            <a:pPr algn="ctr" indent="0" marL="0">
+            <a:pPr marL="0" indent="0" algn="ctr">
               <a:buNone/>
             </a:pPr>
             <a:r>
@@ -3250,7 +3084,7 @@
           <a:bodyPr wrap="square" lIns="0" tIns="0" rIns="0" bIns="0" rtlCol="0" anchor="ctr"/>
           <a:lstStyle/>
           <a:p>
-            <a:pPr indent="0" marL="0">
+            <a:pPr marL="0" indent="0">
               <a:buNone/>
             </a:pPr>
             <a:r>
@@ -3289,7 +3123,7 @@
           <a:bodyPr wrap="square" lIns="0" tIns="0" rIns="0" bIns="0" rtlCol="0" anchor="ctr"/>
           <a:lstStyle/>
           <a:p>
-            <a:pPr indent="0" marL="0">
+            <a:pPr marL="0" indent="0">
               <a:buNone/>
             </a:pPr>
             <a:r>
@@ -3328,7 +3162,7 @@
           <a:bodyPr wrap="square" lIns="0" tIns="0" rIns="0" bIns="0" rtlCol="0" anchor="ctr"/>
           <a:lstStyle/>
           <a:p>
-            <a:pPr algn="ctr" indent="0" marL="0">
+            <a:pPr marL="0" indent="0" algn="ctr">
               <a:buNone/>
             </a:pPr>
             <a:r>
@@ -3394,7 +3228,7 @@
           <a:bodyPr wrap="square" lIns="0" tIns="0" rIns="0" bIns="0" rtlCol="0" anchor="ctr"/>
           <a:lstStyle/>
           <a:p>
-            <a:pPr indent="0" marL="0">
+            <a:pPr marL="0" indent="0">
               <a:buNone/>
             </a:pPr>
             <a:r>
@@ -3433,7 +3267,7 @@
           <a:bodyPr wrap="square" lIns="0" tIns="0" rIns="0" bIns="0" rtlCol="0" anchor="ctr"/>
           <a:lstStyle/>
           <a:p>
-            <a:pPr indent="0" marL="0">
+            <a:pPr marL="0" indent="0">
               <a:buNone/>
             </a:pPr>
             <a:r>
@@ -3472,11 +3306,11 @@
           <a:bodyPr wrap="square" lIns="0" tIns="0" rIns="0" bIns="0" rtlCol="0" anchor="ctr"/>
           <a:lstStyle/>
           <a:p>
-            <a:pPr indent="0" marL="0">
-              <a:buNone/>
-            </a:pPr>
-            <a:r>
-              <a:rPr lang="en-US" sz="1150" b="1" spc="160" kern="0" dirty="0">
+            <a:pPr marL="0" indent="0">
+              <a:buNone/>
+            </a:pPr>
+            <a:r>
+              <a:rPr lang="en-US" sz="1150" b="1" kern="0" spc="160" dirty="0">
                 <a:solidFill>
                   <a:srgbClr val="FF8AAF"/>
                 </a:solidFill>
@@ -3538,7 +3372,7 @@
           <a:bodyPr wrap="square" lIns="0" tIns="0" rIns="0" bIns="0" rtlCol="0" anchor="ctr"/>
           <a:lstStyle/>
           <a:p>
-            <a:pPr indent="0" marL="0">
+            <a:pPr marL="0" indent="0">
               <a:lnSpc>
                 <a:spcPts val="1900"/>
               </a:lnSpc>
@@ -3558,7 +3392,7 @@
             <a:endParaRPr lang="en-US" sz="1150" dirty="0"/>
           </a:p>
           <a:p>
-            <a:pPr indent="0" marL="0">
+            <a:pPr marL="0" indent="0">
               <a:lnSpc>
                 <a:spcPts val="1900"/>
               </a:lnSpc>
@@ -3578,7 +3412,7 @@
             <a:endParaRPr lang="en-US" sz="1150" dirty="0"/>
           </a:p>
           <a:p>
-            <a:pPr indent="0" marL="0">
+            <a:pPr marL="0" indent="0">
               <a:lnSpc>
                 <a:spcPts val="1900"/>
               </a:lnSpc>
@@ -3620,7 +3454,7 @@
           <a:bodyPr wrap="square" lIns="0" tIns="0" rIns="0" bIns="0" rtlCol="0" anchor="ctr"/>
           <a:lstStyle/>
           <a:p>
-            <a:pPr indent="0" marL="0">
+            <a:pPr marL="0" indent="0">
               <a:buNone/>
             </a:pPr>
             <a:r>
@@ -3659,7 +3493,7 @@
           <a:bodyPr wrap="square" lIns="0" tIns="0" rIns="0" bIns="0" rtlCol="0" anchor="ctr"/>
           <a:lstStyle/>
           <a:p>
-            <a:pPr indent="0" marL="0">
+            <a:pPr marL="0" indent="0">
               <a:buNone/>
             </a:pPr>
             <a:r>
@@ -3698,7 +3532,7 @@
           <a:bodyPr wrap="square" lIns="0" tIns="0" rIns="0" bIns="0" rtlCol="0" anchor="ctr"/>
           <a:lstStyle/>
           <a:p>
-            <a:pPr indent="0" marL="0">
+            <a:pPr marL="0" indent="0">
               <a:buNone/>
             </a:pPr>
             <a:r>
@@ -3737,7 +3571,7 @@
           <a:bodyPr wrap="square" lIns="0" tIns="0" rIns="0" bIns="0" rtlCol="0" anchor="ctr"/>
           <a:lstStyle/>
           <a:p>
-            <a:pPr indent="0" marL="0">
+            <a:pPr marL="0" indent="0">
               <a:buNone/>
             </a:pPr>
             <a:r>
@@ -3776,7 +3610,7 @@
           <a:bodyPr wrap="square" lIns="0" tIns="0" rIns="0" bIns="0" rtlCol="0" anchor="ctr"/>
           <a:lstStyle/>
           <a:p>
-            <a:pPr indent="0" marL="0">
+            <a:pPr marL="0" indent="0">
               <a:buNone/>
             </a:pPr>
             <a:r>
@@ -3815,7 +3649,7 @@
           <a:bodyPr wrap="square" lIns="0" tIns="0" rIns="0" bIns="0" rtlCol="0" anchor="ctr"/>
           <a:lstStyle/>
           <a:p>
-            <a:pPr indent="0" marL="0">
+            <a:pPr marL="0" indent="0">
               <a:buNone/>
             </a:pPr>
             <a:r>
@@ -3854,7 +3688,7 @@
           <a:bodyPr wrap="square" lIns="0" tIns="0" rIns="0" bIns="0" rtlCol="0" anchor="ctr"/>
           <a:lstStyle/>
           <a:p>
-            <a:pPr indent="0" marL="0">
+            <a:pPr marL="0" indent="0">
               <a:buNone/>
             </a:pPr>
             <a:r>
@@ -3888,6 +3722,7 @@
         <a:solidFill>
           <a:srgbClr val="F6F4FA"/>
         </a:solidFill>
+        <a:effectLst/>
       </p:bgPr>
     </p:bg>
     <p:spTree>
@@ -3925,11 +3760,11 @@
           <a:bodyPr wrap="square" lIns="0" tIns="0" rIns="0" bIns="0" rtlCol="0" anchor="ctr"/>
           <a:lstStyle/>
           <a:p>
-            <a:pPr indent="0" marL="0">
-              <a:buNone/>
-            </a:pPr>
-            <a:r>
-              <a:rPr lang="en-US" sz="1150" b="1" spc="160" kern="0" dirty="0">
+            <a:pPr marL="0" indent="0">
+              <a:buNone/>
+            </a:pPr>
+            <a:r>
+              <a:rPr lang="en-US" sz="1150" b="1" kern="0" spc="160" dirty="0">
                 <a:solidFill>
                   <a:srgbClr val="9A81DF"/>
                 </a:solidFill>
@@ -3964,7 +3799,7 @@
           <a:bodyPr wrap="square" lIns="0" tIns="0" rIns="0" bIns="0" rtlCol="0" anchor="ctr"/>
           <a:lstStyle/>
           <a:p>
-            <a:pPr indent="0" marL="0">
+            <a:pPr marL="0" indent="0">
               <a:buNone/>
             </a:pPr>
             <a:r>
@@ -4008,7 +3843,7 @@
             <a:prstDash val="solid"/>
           </a:ln>
           <a:effectLst>
-            <a:outerShdw sx="100000" sy="100000" kx="0" ky="0" algn="bl" rotWithShape="0" blurRad="76200" dist="12700" dir="5400000">
+            <a:outerShdw blurRad="76200" dist="12700" dir="5400000" algn="bl" rotWithShape="0">
               <a:srgbClr val="8C7FB0">
                 <a:alpha val="16000"/>
               </a:srgbClr>
@@ -4037,7 +3872,7 @@
           <a:bodyPr wrap="square" lIns="0" tIns="0" rIns="0" bIns="0" rtlCol="0" anchor="ctr"/>
           <a:lstStyle/>
           <a:p>
-            <a:pPr indent="0" marL="0">
+            <a:pPr marL="0" indent="0">
               <a:buNone/>
             </a:pPr>
             <a:r>
@@ -4076,7 +3911,7 @@
           <a:bodyPr wrap="square" lIns="0" tIns="0" rIns="0" bIns="0" rtlCol="0" anchor="ctr"/>
           <a:lstStyle/>
           <a:p>
-            <a:pPr indent="0" marL="0">
+            <a:pPr marL="0" indent="0">
               <a:buNone/>
             </a:pPr>
             <a:r>
@@ -4120,7 +3955,7 @@
             <a:prstDash val="solid"/>
           </a:ln>
           <a:effectLst>
-            <a:outerShdw sx="100000" sy="100000" kx="0" ky="0" algn="bl" rotWithShape="0" blurRad="76200" dist="12700" dir="5400000">
+            <a:outerShdw blurRad="76200" dist="12700" dir="5400000" algn="bl" rotWithShape="0">
               <a:srgbClr val="8C7FB0">
                 <a:alpha val="16000"/>
               </a:srgbClr>
@@ -4149,7 +3984,7 @@
           <a:bodyPr wrap="square" lIns="0" tIns="0" rIns="0" bIns="0" rtlCol="0" anchor="ctr"/>
           <a:lstStyle/>
           <a:p>
-            <a:pPr indent="0" marL="0">
+            <a:pPr marL="0" indent="0">
               <a:buNone/>
             </a:pPr>
             <a:r>
@@ -4188,7 +4023,7 @@
           <a:bodyPr wrap="square" lIns="0" tIns="0" rIns="0" bIns="0" rtlCol="0" anchor="ctr"/>
           <a:lstStyle/>
           <a:p>
-            <a:pPr indent="0" marL="0">
+            <a:pPr marL="0" indent="0">
               <a:buNone/>
             </a:pPr>
             <a:r>
@@ -4232,7 +4067,7 @@
             <a:prstDash val="solid"/>
           </a:ln>
           <a:effectLst>
-            <a:outerShdw sx="100000" sy="100000" kx="0" ky="0" algn="bl" rotWithShape="0" blurRad="76200" dist="12700" dir="5400000">
+            <a:outerShdw blurRad="76200" dist="12700" dir="5400000" algn="bl" rotWithShape="0">
               <a:srgbClr val="8C7FB0">
                 <a:alpha val="16000"/>
               </a:srgbClr>
@@ -4261,7 +4096,7 @@
           <a:bodyPr wrap="square" lIns="0" tIns="0" rIns="0" bIns="0" rtlCol="0" anchor="ctr"/>
           <a:lstStyle/>
           <a:p>
-            <a:pPr indent="0" marL="0">
+            <a:pPr marL="0" indent="0">
               <a:buNone/>
             </a:pPr>
             <a:r>
@@ -4300,7 +4135,7 @@
           <a:bodyPr wrap="square" lIns="0" tIns="0" rIns="0" bIns="0" rtlCol="0" anchor="ctr"/>
           <a:lstStyle/>
           <a:p>
-            <a:pPr indent="0" marL="0">
+            <a:pPr marL="0" indent="0">
               <a:buNone/>
             </a:pPr>
             <a:r>
@@ -4344,7 +4179,7 @@
             <a:prstDash val="solid"/>
           </a:ln>
           <a:effectLst>
-            <a:outerShdw sx="100000" sy="100000" kx="0" ky="0" algn="bl" rotWithShape="0" blurRad="76200" dist="12700" dir="5400000">
+            <a:outerShdw blurRad="76200" dist="12700" dir="5400000" algn="bl" rotWithShape="0">
               <a:srgbClr val="8C7FB0">
                 <a:alpha val="16000"/>
               </a:srgbClr>
@@ -4373,7 +4208,7 @@
           <a:bodyPr wrap="square" lIns="0" tIns="0" rIns="0" bIns="0" rtlCol="0" anchor="ctr"/>
           <a:lstStyle/>
           <a:p>
-            <a:pPr indent="0" marL="0">
+            <a:pPr marL="0" indent="0">
               <a:buNone/>
             </a:pPr>
             <a:r>
@@ -4631,7 +4466,7 @@
             <a:prstDash val="solid"/>
           </a:ln>
           <a:effectLst>
-            <a:outerShdw sx="100000" sy="100000" kx="0" ky="0" algn="bl" rotWithShape="0" blurRad="76200" dist="12700" dir="5400000">
+            <a:outerShdw blurRad="76200" dist="12700" dir="5400000" algn="bl" rotWithShape="0">
               <a:srgbClr val="8C7FB0">
                 <a:alpha val="16000"/>
               </a:srgbClr>
@@ -4660,7 +4495,7 @@
           <a:bodyPr wrap="square" lIns="0" tIns="0" rIns="0" bIns="0" rtlCol="0" anchor="ctr"/>
           <a:lstStyle/>
           <a:p>
-            <a:pPr indent="0" marL="0">
+            <a:pPr marL="0" indent="0">
               <a:buNone/>
             </a:pPr>
             <a:r>
@@ -4699,7 +4534,7 @@
           <a:bodyPr wrap="square" lIns="0" tIns="0" rIns="0" bIns="0" rtlCol="0" anchor="ctr"/>
           <a:lstStyle/>
           <a:p>
-            <a:pPr indent="0" marL="0">
+            <a:pPr marL="0" indent="0">
               <a:lnSpc>
                 <a:spcPts val="1500"/>
               </a:lnSpc>
@@ -4768,7 +4603,7 @@
           <a:bodyPr wrap="square" lIns="0" tIns="0" rIns="0" bIns="0" rtlCol="0" anchor="ctr"/>
           <a:lstStyle/>
           <a:p>
-            <a:pPr indent="0" marL="0">
+            <a:pPr marL="0" indent="0">
               <a:buNone/>
             </a:pPr>
             <a:r>
@@ -4807,7 +4642,7 @@
           <a:bodyPr wrap="square" lIns="0" tIns="0" rIns="0" bIns="0" rtlCol="0" anchor="ctr"/>
           <a:lstStyle/>
           <a:p>
-            <a:pPr indent="0" marL="0">
+            <a:pPr marL="0" indent="0">
               <a:lnSpc>
                 <a:spcPts val="1600"/>
               </a:lnSpc>
@@ -4849,7 +4684,7 @@
           <a:bodyPr wrap="square" lIns="0" tIns="0" rIns="0" bIns="0" rtlCol="0" anchor="ctr"/>
           <a:lstStyle/>
           <a:p>
-            <a:pPr algn="r" indent="0" marL="0">
+            <a:pPr marL="0" indent="0" algn="r">
               <a:buNone/>
             </a:pPr>
             <a:r>
@@ -4883,6 +4718,7 @@
         <a:solidFill>
           <a:srgbClr val="F6F4FA"/>
         </a:solidFill>
+        <a:effectLst/>
       </p:bgPr>
     </p:bg>
     <p:spTree>
@@ -4920,11 +4756,11 @@
           <a:bodyPr wrap="square" lIns="0" tIns="0" rIns="0" bIns="0" rtlCol="0" anchor="ctr"/>
           <a:lstStyle/>
           <a:p>
-            <a:pPr indent="0" marL="0">
-              <a:buNone/>
-            </a:pPr>
-            <a:r>
-              <a:rPr lang="en-US" sz="1150" b="1" spc="160" kern="0" dirty="0">
+            <a:pPr marL="0" indent="0">
+              <a:buNone/>
+            </a:pPr>
+            <a:r>
+              <a:rPr lang="en-US" sz="1150" b="1" kern="0" spc="160" dirty="0">
                 <a:solidFill>
                   <a:srgbClr val="9A81DF"/>
                 </a:solidFill>
@@ -4959,7 +4795,7 @@
           <a:bodyPr wrap="square" lIns="0" tIns="0" rIns="0" bIns="0" rtlCol="0" anchor="ctr"/>
           <a:lstStyle/>
           <a:p>
-            <a:pPr indent="0" marL="0">
+            <a:pPr marL="0" indent="0">
               <a:buNone/>
             </a:pPr>
             <a:r>
@@ -5003,7 +4839,7 @@
             <a:prstDash val="solid"/>
           </a:ln>
           <a:effectLst>
-            <a:outerShdw sx="100000" sy="100000" kx="0" ky="0" algn="bl" rotWithShape="0" blurRad="76200" dist="12700" dir="5400000">
+            <a:outerShdw blurRad="76200" dist="12700" dir="5400000" algn="bl" rotWithShape="0">
               <a:srgbClr val="8C7FB0">
                 <a:alpha val="16000"/>
               </a:srgbClr>
@@ -5032,7 +4868,7 @@
           <a:bodyPr wrap="square" lIns="0" tIns="0" rIns="0" bIns="0" rtlCol="0" anchor="ctr"/>
           <a:lstStyle/>
           <a:p>
-            <a:pPr indent="0" marL="0">
+            <a:pPr marL="0" indent="0">
               <a:buNone/>
             </a:pPr>
             <a:r>
@@ -5071,7 +4907,7 @@
           <a:bodyPr wrap="square" lIns="0" tIns="0" rIns="0" bIns="0" rtlCol="0" anchor="ctr"/>
           <a:lstStyle/>
           <a:p>
-            <a:pPr indent="0" marL="0">
+            <a:pPr marL="0" indent="0">
               <a:buNone/>
             </a:pPr>
             <a:r>
@@ -5110,7 +4946,7 @@
           <a:bodyPr wrap="square" lIns="0" tIns="0" rIns="0" bIns="0" rtlCol="0" anchor="ctr"/>
           <a:lstStyle/>
           <a:p>
-            <a:pPr indent="0" marL="0">
+            <a:pPr marL="0" indent="0">
               <a:buNone/>
             </a:pPr>
             <a:r>
@@ -5149,7 +4985,7 @@
           <a:bodyPr wrap="square" lIns="0" tIns="0" rIns="0" bIns="0" rtlCol="0" anchor="ctr"/>
           <a:lstStyle/>
           <a:p>
-            <a:pPr indent="0" marL="0">
+            <a:pPr marL="0" indent="0">
               <a:buNone/>
             </a:pPr>
             <a:r>
@@ -5188,7 +5024,7 @@
           <a:bodyPr wrap="square" lIns="0" tIns="0" rIns="0" bIns="0" rtlCol="0" anchor="ctr"/>
           <a:lstStyle/>
           <a:p>
-            <a:pPr indent="0" marL="0">
+            <a:pPr marL="0" indent="0">
               <a:buNone/>
             </a:pPr>
             <a:r>
@@ -5227,7 +5063,7 @@
           <a:bodyPr wrap="square" lIns="0" tIns="0" rIns="0" bIns="0" rtlCol="0" anchor="ctr"/>
           <a:lstStyle/>
           <a:p>
-            <a:pPr indent="0" marL="0">
+            <a:pPr marL="0" indent="0">
               <a:buNone/>
             </a:pPr>
             <a:r>
@@ -5266,7 +5102,7 @@
           <a:bodyPr wrap="square" lIns="0" tIns="0" rIns="0" bIns="0" rtlCol="0" anchor="ctr"/>
           <a:lstStyle/>
           <a:p>
-            <a:pPr indent="0" marL="0">
+            <a:pPr marL="0" indent="0">
               <a:buNone/>
             </a:pPr>
             <a:r>
@@ -5305,7 +5141,7 @@
           <a:bodyPr wrap="square" lIns="0" tIns="0" rIns="0" bIns="0" rtlCol="0" anchor="ctr"/>
           <a:lstStyle/>
           <a:p>
-            <a:pPr indent="0" marL="0">
+            <a:pPr marL="0" indent="0">
               <a:buNone/>
             </a:pPr>
             <a:r>
@@ -5344,7 +5180,7 @@
           <a:bodyPr wrap="square" lIns="0" tIns="0" rIns="0" bIns="0" rtlCol="0" anchor="ctr"/>
           <a:lstStyle/>
           <a:p>
-            <a:pPr indent="0" marL="0">
+            <a:pPr marL="0" indent="0">
               <a:buNone/>
             </a:pPr>
             <a:r>
@@ -5388,7 +5224,7 @@
             <a:prstDash val="solid"/>
           </a:ln>
           <a:effectLst>
-            <a:outerShdw sx="100000" sy="100000" kx="0" ky="0" algn="bl" rotWithShape="0" blurRad="76200" dist="12700" dir="5400000">
+            <a:outerShdw blurRad="76200" dist="12700" dir="5400000" algn="bl" rotWithShape="0">
               <a:srgbClr val="8C7FB0">
                 <a:alpha val="16000"/>
               </a:srgbClr>
@@ -5417,7 +5253,7 @@
           <a:bodyPr wrap="square" lIns="0" tIns="0" rIns="0" bIns="0" rtlCol="0" anchor="ctr"/>
           <a:lstStyle/>
           <a:p>
-            <a:pPr indent="0" marL="0">
+            <a:pPr marL="0" indent="0">
               <a:buNone/>
             </a:pPr>
             <a:r>
@@ -5456,7 +5292,7 @@
           <a:bodyPr wrap="square" lIns="0" tIns="0" rIns="0" bIns="0" rtlCol="0" anchor="ctr"/>
           <a:lstStyle/>
           <a:p>
-            <a:pPr indent="0" marL="0">
+            <a:pPr marL="0" indent="0">
               <a:lnSpc>
                 <a:spcPts val="1600"/>
               </a:lnSpc>
@@ -5498,7 +5334,7 @@
           <a:bodyPr wrap="square" lIns="0" tIns="0" rIns="0" bIns="0" rtlCol="0" anchor="ctr"/>
           <a:lstStyle/>
           <a:p>
-            <a:pPr indent="0" marL="0">
+            <a:pPr marL="0" indent="0">
               <a:buNone/>
             </a:pPr>
             <a:r>
@@ -5542,7 +5378,7 @@
             <a:prstDash val="solid"/>
           </a:ln>
           <a:effectLst>
-            <a:outerShdw sx="100000" sy="100000" kx="0" ky="0" algn="bl" rotWithShape="0" blurRad="76200" dist="12700" dir="5400000">
+            <a:outerShdw blurRad="76200" dist="12700" dir="5400000" algn="bl" rotWithShape="0">
               <a:srgbClr val="8C7FB0">
                 <a:alpha val="16000"/>
               </a:srgbClr>
@@ -5571,7 +5407,7 @@
           <a:bodyPr wrap="square" lIns="0" tIns="0" rIns="0" bIns="0" rtlCol="0" anchor="ctr"/>
           <a:lstStyle/>
           <a:p>
-            <a:pPr indent="0" marL="0">
+            <a:pPr marL="0" indent="0">
               <a:buNone/>
             </a:pPr>
             <a:r>
@@ -5610,7 +5446,7 @@
           <a:bodyPr wrap="square" lIns="0" tIns="0" rIns="0" bIns="0" rtlCol="0" anchor="ctr"/>
           <a:lstStyle/>
           <a:p>
-            <a:pPr indent="0" marL="0">
+            <a:pPr marL="0" indent="0">
               <a:buNone/>
             </a:pPr>
             <a:r>
@@ -5649,7 +5485,7 @@
           <a:bodyPr wrap="square" lIns="0" tIns="0" rIns="0" bIns="0" rtlCol="0" anchor="ctr"/>
           <a:lstStyle/>
           <a:p>
-            <a:pPr indent="0" marL="0">
+            <a:pPr marL="0" indent="0">
               <a:lnSpc>
                 <a:spcPts val="1300"/>
               </a:lnSpc>
@@ -5691,7 +5527,7 @@
           <a:bodyPr wrap="square" lIns="0" tIns="0" rIns="0" bIns="0" rtlCol="0" anchor="ctr"/>
           <a:lstStyle/>
           <a:p>
-            <a:pPr indent="0" marL="0">
+            <a:pPr marL="0" indent="0">
               <a:buNone/>
             </a:pPr>
             <a:r>
@@ -5730,7 +5566,7 @@
           <a:bodyPr wrap="square" lIns="0" tIns="0" rIns="0" bIns="0" rtlCol="0" anchor="ctr"/>
           <a:lstStyle/>
           <a:p>
-            <a:pPr indent="0" marL="0">
+            <a:pPr marL="0" indent="0">
               <a:lnSpc>
                 <a:spcPts val="1300"/>
               </a:lnSpc>
@@ -5772,7 +5608,7 @@
           <a:bodyPr wrap="square" lIns="0" tIns="0" rIns="0" bIns="0" rtlCol="0" anchor="ctr"/>
           <a:lstStyle/>
           <a:p>
-            <a:pPr indent="0" marL="0">
+            <a:pPr marL="0" indent="0">
               <a:buNone/>
             </a:pPr>
             <a:r>
@@ -5811,7 +5647,7 @@
           <a:bodyPr wrap="square" lIns="0" tIns="0" rIns="0" bIns="0" rtlCol="0" anchor="ctr"/>
           <a:lstStyle/>
           <a:p>
-            <a:pPr indent="0" marL="0">
+            <a:pPr marL="0" indent="0">
               <a:lnSpc>
                 <a:spcPts val="1300"/>
               </a:lnSpc>
@@ -5853,7 +5689,7 @@
           <a:bodyPr wrap="square" lIns="0" tIns="0" rIns="0" bIns="0" rtlCol="0" anchor="ctr"/>
           <a:lstStyle/>
           <a:p>
-            <a:pPr indent="0" marL="0">
+            <a:pPr marL="0" indent="0">
               <a:buNone/>
             </a:pPr>
             <a:r>
@@ -5892,7 +5728,7 @@
           <a:bodyPr wrap="square" lIns="0" tIns="0" rIns="0" bIns="0" rtlCol="0" anchor="ctr"/>
           <a:lstStyle/>
           <a:p>
-            <a:pPr indent="0" marL="0">
+            <a:pPr marL="0" indent="0">
               <a:lnSpc>
                 <a:spcPts val="1300"/>
               </a:lnSpc>
@@ -5934,7 +5770,7 @@
           <a:bodyPr wrap="square" lIns="0" tIns="0" rIns="0" bIns="0" rtlCol="0" anchor="ctr"/>
           <a:lstStyle/>
           <a:p>
-            <a:pPr indent="0" marL="0">
+            <a:pPr marL="0" indent="0">
               <a:buNone/>
             </a:pPr>
             <a:r>
@@ -5973,7 +5809,7 @@
           <a:bodyPr wrap="square" lIns="0" tIns="0" rIns="0" bIns="0" rtlCol="0" anchor="ctr"/>
           <a:lstStyle/>
           <a:p>
-            <a:pPr indent="0" marL="0">
+            <a:pPr marL="0" indent="0">
               <a:lnSpc>
                 <a:spcPts val="1300"/>
               </a:lnSpc>
@@ -6015,7 +5851,7 @@
           <a:bodyPr wrap="square" lIns="0" tIns="0" rIns="0" bIns="0" rtlCol="0" anchor="ctr"/>
           <a:lstStyle/>
           <a:p>
-            <a:pPr indent="0" marL="0">
+            <a:pPr marL="0" indent="0">
               <a:buNone/>
             </a:pPr>
             <a:r>
@@ -6054,7 +5890,7 @@
           <a:bodyPr wrap="square" lIns="0" tIns="0" rIns="0" bIns="0" rtlCol="0" anchor="ctr"/>
           <a:lstStyle/>
           <a:p>
-            <a:pPr indent="0" marL="0">
+            <a:pPr marL="0" indent="0">
               <a:lnSpc>
                 <a:spcPts val="1300"/>
               </a:lnSpc>
@@ -6096,7 +5932,7 @@
           <a:bodyPr wrap="square" lIns="0" tIns="0" rIns="0" bIns="0" rtlCol="0" anchor="ctr"/>
           <a:lstStyle/>
           <a:p>
-            <a:pPr indent="0" marL="0">
+            <a:pPr marL="0" indent="0">
               <a:buNone/>
             </a:pPr>
             <a:r>
@@ -6135,7 +5971,7 @@
           <a:bodyPr wrap="square" lIns="0" tIns="0" rIns="0" bIns="0" rtlCol="0" anchor="ctr"/>
           <a:lstStyle/>
           <a:p>
-            <a:pPr indent="0" marL="0">
+            <a:pPr marL="0" indent="0">
               <a:lnSpc>
                 <a:spcPts val="1300"/>
               </a:lnSpc>
@@ -6177,7 +6013,7 @@
           <a:bodyPr wrap="square" lIns="0" tIns="0" rIns="0" bIns="0" rtlCol="0" anchor="ctr"/>
           <a:lstStyle/>
           <a:p>
-            <a:pPr indent="0" marL="0">
+            <a:pPr marL="0" indent="0">
               <a:buNone/>
             </a:pPr>
             <a:r>
@@ -6216,7 +6052,7 @@
           <a:bodyPr wrap="square" lIns="0" tIns="0" rIns="0" bIns="0" rtlCol="0" anchor="ctr"/>
           <a:lstStyle/>
           <a:p>
-            <a:pPr indent="0" marL="0">
+            <a:pPr marL="0" indent="0">
               <a:lnSpc>
                 <a:spcPts val="1300"/>
               </a:lnSpc>
@@ -6258,7 +6094,7 @@
           <a:bodyPr wrap="square" lIns="0" tIns="0" rIns="0" bIns="0" rtlCol="0" anchor="ctr"/>
           <a:lstStyle/>
           <a:p>
-            <a:pPr algn="r" indent="0" marL="0">
+            <a:pPr marL="0" indent="0" algn="r">
               <a:buNone/>
             </a:pPr>
             <a:r>
@@ -6292,6 +6128,7 @@
         <a:solidFill>
           <a:srgbClr val="F6F4FA"/>
         </a:solidFill>
+        <a:effectLst/>
       </p:bgPr>
     </p:bg>
     <p:spTree>
@@ -6329,11 +6166,11 @@
           <a:bodyPr wrap="square" lIns="0" tIns="0" rIns="0" bIns="0" rtlCol="0" anchor="ctr"/>
           <a:lstStyle/>
           <a:p>
-            <a:pPr indent="0" marL="0">
-              <a:buNone/>
-            </a:pPr>
-            <a:r>
-              <a:rPr lang="en-US" sz="1150" b="1" spc="160" kern="0" dirty="0">
+            <a:pPr marL="0" indent="0">
+              <a:buNone/>
+            </a:pPr>
+            <a:r>
+              <a:rPr lang="en-US" sz="1150" b="1" kern="0" spc="160" dirty="0">
                 <a:solidFill>
                   <a:srgbClr val="9A81DF"/>
                 </a:solidFill>
@@ -6368,7 +6205,7 @@
           <a:bodyPr wrap="square" lIns="0" tIns="0" rIns="0" bIns="0" rtlCol="0" anchor="ctr"/>
           <a:lstStyle/>
           <a:p>
-            <a:pPr indent="0" marL="0">
+            <a:pPr marL="0" indent="0">
               <a:buNone/>
             </a:pPr>
             <a:r>
@@ -6434,7 +6271,7 @@
           <a:bodyPr wrap="square" lIns="0" tIns="0" rIns="0" bIns="0" rtlCol="0" anchor="ctr"/>
           <a:lstStyle/>
           <a:p>
-            <a:pPr indent="0" marL="0">
+            <a:pPr marL="0" indent="0">
               <a:buNone/>
             </a:pPr>
             <a:r>
@@ -6738,7 +6575,7 @@
           <a:bodyPr wrap="square" lIns="0" tIns="0" rIns="0" bIns="0" rtlCol="0" anchor="ctr"/>
           <a:lstStyle/>
           <a:p>
-            <a:pPr indent="0" marL="0">
+            <a:pPr marL="0" indent="0">
               <a:buNone/>
             </a:pPr>
             <a:r>
@@ -6777,7 +6614,7 @@
           <a:bodyPr wrap="square" lIns="0" tIns="0" rIns="0" bIns="0" rtlCol="0" anchor="ctr"/>
           <a:lstStyle/>
           <a:p>
-            <a:pPr indent="0" marL="0">
+            <a:pPr marL="0" indent="0">
               <a:buNone/>
             </a:pPr>
             <a:r>
@@ -6816,7 +6653,7 @@
           <a:bodyPr wrap="square" lIns="0" tIns="0" rIns="0" bIns="0" rtlCol="0" anchor="ctr"/>
           <a:lstStyle/>
           <a:p>
-            <a:pPr indent="0" marL="0">
+            <a:pPr marL="0" indent="0">
               <a:lnSpc>
                 <a:spcPts val="1400"/>
               </a:lnSpc>
@@ -6858,7 +6695,7 @@
           <a:bodyPr wrap="square" lIns="0" tIns="0" rIns="0" bIns="0" rtlCol="0" anchor="ctr"/>
           <a:lstStyle/>
           <a:p>
-            <a:pPr indent="0" marL="0">
+            <a:pPr marL="0" indent="0">
               <a:buNone/>
             </a:pPr>
             <a:r>
@@ -6897,7 +6734,7 @@
           <a:bodyPr wrap="square" lIns="0" tIns="0" rIns="0" bIns="0" rtlCol="0" anchor="ctr"/>
           <a:lstStyle/>
           <a:p>
-            <a:pPr indent="0" marL="0">
+            <a:pPr marL="0" indent="0">
               <a:lnSpc>
                 <a:spcPts val="1400"/>
               </a:lnSpc>
@@ -6939,7 +6776,7 @@
           <a:bodyPr wrap="square" lIns="0" tIns="0" rIns="0" bIns="0" rtlCol="0" anchor="ctr"/>
           <a:lstStyle/>
           <a:p>
-            <a:pPr indent="0" marL="0">
+            <a:pPr marL="0" indent="0">
               <a:buNone/>
             </a:pPr>
             <a:r>
@@ -6978,7 +6815,7 @@
           <a:bodyPr wrap="square" lIns="0" tIns="0" rIns="0" bIns="0" rtlCol="0" anchor="ctr"/>
           <a:lstStyle/>
           <a:p>
-            <a:pPr indent="0" marL="0">
+            <a:pPr marL="0" indent="0">
               <a:lnSpc>
                 <a:spcPts val="1400"/>
               </a:lnSpc>
@@ -7020,7 +6857,7 @@
           <a:bodyPr wrap="square" lIns="0" tIns="0" rIns="0" bIns="0" rtlCol="0" anchor="ctr"/>
           <a:lstStyle/>
           <a:p>
-            <a:pPr indent="0" marL="0">
+            <a:pPr marL="0" indent="0">
               <a:buNone/>
             </a:pPr>
             <a:r>
@@ -7059,7 +6896,7 @@
           <a:bodyPr wrap="square" lIns="0" tIns="0" rIns="0" bIns="0" rtlCol="0" anchor="ctr"/>
           <a:lstStyle/>
           <a:p>
-            <a:pPr indent="0" marL="0">
+            <a:pPr marL="0" indent="0">
               <a:lnSpc>
                 <a:spcPts val="1400"/>
               </a:lnSpc>
@@ -7101,7 +6938,7 @@
           <a:bodyPr wrap="square" lIns="0" tIns="0" rIns="0" bIns="0" rtlCol="0" anchor="ctr"/>
           <a:lstStyle/>
           <a:p>
-            <a:pPr algn="ctr" indent="0" marL="0">
+            <a:pPr marL="0" indent="0" algn="ctr">
               <a:buNone/>
             </a:pPr>
             <a:r>
@@ -7140,7 +6977,7 @@
           <a:bodyPr wrap="square" lIns="0" tIns="0" rIns="0" bIns="0" rtlCol="0" anchor="ctr"/>
           <a:lstStyle/>
           <a:p>
-            <a:pPr algn="r" indent="0" marL="0">
+            <a:pPr marL="0" indent="0" algn="r">
               <a:buNone/>
             </a:pPr>
             <a:r>
@@ -7174,6 +7011,7 @@
         <a:solidFill>
           <a:srgbClr val="0C0625"/>
         </a:solidFill>
+        <a:effectLst/>
       </p:bgPr>
     </p:bg>
     <p:spTree>
@@ -7236,11 +7074,11 @@
           <a:bodyPr wrap="square" lIns="0" tIns="0" rIns="0" bIns="0" rtlCol="0" anchor="ctr"/>
           <a:lstStyle/>
           <a:p>
-            <a:pPr indent="0" marL="0">
-              <a:buNone/>
-            </a:pPr>
-            <a:r>
-              <a:rPr lang="en-US" sz="1150" b="1" spc="160" kern="0" dirty="0">
+            <a:pPr marL="0" indent="0">
+              <a:buNone/>
+            </a:pPr>
+            <a:r>
+              <a:rPr lang="en-US" sz="1150" b="1" kern="0" spc="160" dirty="0">
                 <a:solidFill>
                   <a:srgbClr val="FF8AAF"/>
                 </a:solidFill>
@@ -7275,7 +7113,7 @@
           <a:bodyPr wrap="square" lIns="0" tIns="0" rIns="0" bIns="0" rtlCol="0" anchor="ctr"/>
           <a:lstStyle/>
           <a:p>
-            <a:pPr indent="0" marL="0">
+            <a:pPr marL="0" indent="0">
               <a:buNone/>
             </a:pPr>
             <a:r>
@@ -7366,7 +7204,7 @@
           <a:bodyPr wrap="square" lIns="0" tIns="0" rIns="0" bIns="0" rtlCol="0" anchor="ctr"/>
           <a:lstStyle/>
           <a:p>
-            <a:pPr algn="ctr" indent="0" marL="0">
+            <a:pPr marL="0" indent="0" algn="ctr">
               <a:buNone/>
             </a:pPr>
             <a:r>
@@ -7405,7 +7243,7 @@
           <a:bodyPr wrap="square" lIns="0" tIns="0" rIns="0" bIns="0" rtlCol="0" anchor="ctr"/>
           <a:lstStyle/>
           <a:p>
-            <a:pPr indent="0" marL="0">
+            <a:pPr marL="0" indent="0">
               <a:buNone/>
             </a:pPr>
             <a:r>
@@ -7444,7 +7282,7 @@
           <a:bodyPr wrap="square" lIns="0" tIns="0" rIns="0" bIns="0" rtlCol="0" anchor="ctr"/>
           <a:lstStyle/>
           <a:p>
-            <a:pPr indent="0" marL="0">
+            <a:pPr marL="0" indent="0">
               <a:lnSpc>
                 <a:spcPts val="1500"/>
               </a:lnSpc>
@@ -7538,7 +7376,7 @@
           <a:bodyPr wrap="square" lIns="0" tIns="0" rIns="0" bIns="0" rtlCol="0" anchor="ctr"/>
           <a:lstStyle/>
           <a:p>
-            <a:pPr algn="ctr" indent="0" marL="0">
+            <a:pPr marL="0" indent="0" algn="ctr">
               <a:buNone/>
             </a:pPr>
             <a:r>
@@ -7577,7 +7415,7 @@
           <a:bodyPr wrap="square" lIns="0" tIns="0" rIns="0" bIns="0" rtlCol="0" anchor="ctr"/>
           <a:lstStyle/>
           <a:p>
-            <a:pPr indent="0" marL="0">
+            <a:pPr marL="0" indent="0">
               <a:buNone/>
             </a:pPr>
             <a:r>
@@ -7616,7 +7454,7 @@
           <a:bodyPr wrap="square" lIns="0" tIns="0" rIns="0" bIns="0" rtlCol="0" anchor="ctr"/>
           <a:lstStyle/>
           <a:p>
-            <a:pPr indent="0" marL="0">
+            <a:pPr marL="0" indent="0">
               <a:lnSpc>
                 <a:spcPts val="1500"/>
               </a:lnSpc>
@@ -7710,7 +7548,7 @@
           <a:bodyPr wrap="square" lIns="0" tIns="0" rIns="0" bIns="0" rtlCol="0" anchor="ctr"/>
           <a:lstStyle/>
           <a:p>
-            <a:pPr algn="ctr" indent="0" marL="0">
+            <a:pPr marL="0" indent="0" algn="ctr">
               <a:buNone/>
             </a:pPr>
             <a:r>
@@ -7749,7 +7587,7 @@
           <a:bodyPr wrap="square" lIns="0" tIns="0" rIns="0" bIns="0" rtlCol="0" anchor="ctr"/>
           <a:lstStyle/>
           <a:p>
-            <a:pPr indent="0" marL="0">
+            <a:pPr marL="0" indent="0">
               <a:buNone/>
             </a:pPr>
             <a:r>
@@ -7788,7 +7626,7 @@
           <a:bodyPr wrap="square" lIns="0" tIns="0" rIns="0" bIns="0" rtlCol="0" anchor="ctr"/>
           <a:lstStyle/>
           <a:p>
-            <a:pPr indent="0" marL="0">
+            <a:pPr marL="0" indent="0">
               <a:lnSpc>
                 <a:spcPts val="1500"/>
               </a:lnSpc>
@@ -7882,7 +7720,7 @@
           <a:bodyPr wrap="square" lIns="0" tIns="0" rIns="0" bIns="0" rtlCol="0" anchor="ctr"/>
           <a:lstStyle/>
           <a:p>
-            <a:pPr algn="ctr" indent="0" marL="0">
+            <a:pPr marL="0" indent="0" algn="ctr">
               <a:buNone/>
             </a:pPr>
             <a:r>
@@ -7921,7 +7759,7 @@
           <a:bodyPr wrap="square" lIns="0" tIns="0" rIns="0" bIns="0" rtlCol="0" anchor="ctr"/>
           <a:lstStyle/>
           <a:p>
-            <a:pPr indent="0" marL="0">
+            <a:pPr marL="0" indent="0">
               <a:buNone/>
             </a:pPr>
             <a:r>
@@ -7960,7 +7798,7 @@
           <a:bodyPr wrap="square" lIns="0" tIns="0" rIns="0" bIns="0" rtlCol="0" anchor="ctr"/>
           <a:lstStyle/>
           <a:p>
-            <a:pPr indent="0" marL="0">
+            <a:pPr marL="0" indent="0">
               <a:lnSpc>
                 <a:spcPts val="1500"/>
               </a:lnSpc>
@@ -8029,7 +7867,7 @@
           <a:bodyPr wrap="square" lIns="0" tIns="0" rIns="0" bIns="0" rtlCol="0" anchor="ctr"/>
           <a:lstStyle/>
           <a:p>
-            <a:pPr indent="0" marL="0">
+            <a:pPr marL="0" indent="0">
               <a:lnSpc>
                 <a:spcPts val="1900"/>
               </a:lnSpc>
@@ -8071,7 +7909,7 @@
           <a:bodyPr wrap="square" lIns="0" tIns="0" rIns="0" bIns="0" rtlCol="0" anchor="ctr"/>
           <a:lstStyle/>
           <a:p>
-            <a:pPr indent="0" marL="0">
+            <a:pPr marL="0" indent="0">
               <a:buNone/>
             </a:pPr>
             <a:r>
@@ -8110,7 +7948,7 @@
           <a:bodyPr wrap="square" lIns="0" tIns="0" rIns="0" bIns="0" rtlCol="0" anchor="ctr"/>
           <a:lstStyle/>
           <a:p>
-            <a:pPr indent="0" marL="0">
+            <a:pPr marL="0" indent="0">
               <a:buNone/>
             </a:pPr>
             <a:r>
@@ -8144,6 +7982,7 @@
         <a:solidFill>
           <a:srgbClr val="F6F4FA"/>
         </a:solidFill>
+        <a:effectLst/>
       </p:bgPr>
     </p:bg>
     <p:spTree>
@@ -8181,11 +8020,11 @@
           <a:bodyPr wrap="square" lIns="0" tIns="0" rIns="0" bIns="0" rtlCol="0" anchor="ctr"/>
           <a:lstStyle/>
           <a:p>
-            <a:pPr indent="0" marL="0">
-              <a:buNone/>
-            </a:pPr>
-            <a:r>
-              <a:rPr lang="en-US" sz="1150" b="1" spc="160" kern="0" dirty="0">
+            <a:pPr marL="0" indent="0">
+              <a:buNone/>
+            </a:pPr>
+            <a:r>
+              <a:rPr lang="en-US" sz="1150" b="1" kern="0" spc="160" dirty="0">
                 <a:solidFill>
                   <a:srgbClr val="9A81DF"/>
                 </a:solidFill>
@@ -8220,7 +8059,7 @@
           <a:bodyPr wrap="square" lIns="0" tIns="0" rIns="0" bIns="0" rtlCol="0" anchor="ctr"/>
           <a:lstStyle/>
           <a:p>
-            <a:pPr indent="0" marL="0">
+            <a:pPr marL="0" indent="0">
               <a:buNone/>
             </a:pPr>
             <a:r>
@@ -8264,7 +8103,7 @@
             <a:prstDash val="solid"/>
           </a:ln>
           <a:effectLst>
-            <a:outerShdw sx="100000" sy="100000" kx="0" ky="0" algn="bl" rotWithShape="0" blurRad="76200" dist="12700" dir="5400000">
+            <a:outerShdw blurRad="76200" dist="12700" dir="5400000" algn="bl" rotWithShape="0">
               <a:srgbClr val="8C7FB0">
                 <a:alpha val="16000"/>
               </a:srgbClr>
@@ -8318,7 +8157,7 @@
           <a:bodyPr wrap="square" lIns="0" tIns="0" rIns="0" bIns="0" rtlCol="0" anchor="ctr"/>
           <a:lstStyle/>
           <a:p>
-            <a:pPr algn="ctr" indent="0" marL="0">
+            <a:pPr marL="0" indent="0" algn="ctr">
               <a:buNone/>
             </a:pPr>
             <a:r>
@@ -8357,7 +8196,7 @@
           <a:bodyPr wrap="square" lIns="0" tIns="0" rIns="0" bIns="0" rtlCol="0" anchor="ctr"/>
           <a:lstStyle/>
           <a:p>
-            <a:pPr indent="0" marL="0">
+            <a:pPr marL="0" indent="0">
               <a:buNone/>
             </a:pPr>
             <a:r>
@@ -8396,7 +8235,7 @@
           <a:bodyPr wrap="square" lIns="0" tIns="0" rIns="0" bIns="0" rtlCol="0" anchor="ctr"/>
           <a:lstStyle/>
           <a:p>
-            <a:pPr indent="0" marL="0">
+            <a:pPr marL="0" indent="0">
               <a:buNone/>
             </a:pPr>
             <a:r>
@@ -8462,7 +8301,7 @@
           <a:bodyPr wrap="square" lIns="0" tIns="0" rIns="0" bIns="0" rtlCol="0" anchor="ctr"/>
           <a:lstStyle/>
           <a:p>
-            <a:pPr algn="ctr" indent="0" marL="0">
+            <a:pPr marL="0" indent="0" algn="ctr">
               <a:buNone/>
             </a:pPr>
             <a:r>
@@ -8501,7 +8340,7 @@
           <a:bodyPr wrap="square" lIns="0" tIns="0" rIns="0" bIns="0" rtlCol="0" anchor="ctr"/>
           <a:lstStyle/>
           <a:p>
-            <a:pPr indent="0" marL="0">
+            <a:pPr marL="0" indent="0">
               <a:buNone/>
             </a:pPr>
             <a:r>
@@ -8545,7 +8384,7 @@
             <a:prstDash val="solid"/>
           </a:ln>
           <a:effectLst>
-            <a:outerShdw sx="100000" sy="100000" kx="0" ky="0" algn="bl" rotWithShape="0" blurRad="76200" dist="12700" dir="5400000">
+            <a:outerShdw blurRad="76200" dist="12700" dir="5400000" algn="bl" rotWithShape="0">
               <a:srgbClr val="8C7FB0">
                 <a:alpha val="16000"/>
               </a:srgbClr>
@@ -8599,7 +8438,7 @@
           <a:bodyPr wrap="square" lIns="0" tIns="0" rIns="0" bIns="0" rtlCol="0" anchor="ctr"/>
           <a:lstStyle/>
           <a:p>
-            <a:pPr algn="ctr" indent="0" marL="0">
+            <a:pPr marL="0" indent="0" algn="ctr">
               <a:buNone/>
             </a:pPr>
             <a:r>
@@ -8638,7 +8477,7 @@
           <a:bodyPr wrap="square" lIns="0" tIns="0" rIns="0" bIns="0" rtlCol="0" anchor="ctr"/>
           <a:lstStyle/>
           <a:p>
-            <a:pPr indent="0" marL="0">
+            <a:pPr marL="0" indent="0">
               <a:buNone/>
             </a:pPr>
             <a:r>
@@ -8677,7 +8516,7 @@
           <a:bodyPr wrap="square" lIns="0" tIns="0" rIns="0" bIns="0" rtlCol="0" anchor="ctr"/>
           <a:lstStyle/>
           <a:p>
-            <a:pPr indent="0" marL="0">
+            <a:pPr marL="0" indent="0">
               <a:buNone/>
             </a:pPr>
             <a:r>
@@ -8743,7 +8582,7 @@
           <a:bodyPr wrap="square" lIns="0" tIns="0" rIns="0" bIns="0" rtlCol="0" anchor="ctr"/>
           <a:lstStyle/>
           <a:p>
-            <a:pPr algn="ctr" indent="0" marL="0">
+            <a:pPr marL="0" indent="0" algn="ctr">
               <a:buNone/>
             </a:pPr>
             <a:r>
@@ -8782,7 +8621,7 @@
           <a:bodyPr wrap="square" lIns="0" tIns="0" rIns="0" bIns="0" rtlCol="0" anchor="ctr"/>
           <a:lstStyle/>
           <a:p>
-            <a:pPr indent="0" marL="0">
+            <a:pPr marL="0" indent="0">
               <a:buNone/>
             </a:pPr>
             <a:r>
@@ -8826,7 +8665,7 @@
             <a:prstDash val="solid"/>
           </a:ln>
           <a:effectLst>
-            <a:outerShdw sx="100000" sy="100000" kx="0" ky="0" algn="bl" rotWithShape="0" blurRad="76200" dist="12700" dir="5400000">
+            <a:outerShdw blurRad="76200" dist="12700" dir="5400000" algn="bl" rotWithShape="0">
               <a:srgbClr val="8C7FB0">
                 <a:alpha val="16000"/>
               </a:srgbClr>
@@ -8880,7 +8719,7 @@
           <a:bodyPr wrap="square" lIns="0" tIns="0" rIns="0" bIns="0" rtlCol="0" anchor="ctr"/>
           <a:lstStyle/>
           <a:p>
-            <a:pPr algn="ctr" indent="0" marL="0">
+            <a:pPr marL="0" indent="0" algn="ctr">
               <a:buNone/>
             </a:pPr>
             <a:r>
@@ -8919,7 +8758,7 @@
           <a:bodyPr wrap="square" lIns="0" tIns="0" rIns="0" bIns="0" rtlCol="0" anchor="ctr"/>
           <a:lstStyle/>
           <a:p>
-            <a:pPr indent="0" marL="0">
+            <a:pPr marL="0" indent="0">
               <a:buNone/>
             </a:pPr>
             <a:r>
@@ -8958,7 +8797,7 @@
           <a:bodyPr wrap="square" lIns="0" tIns="0" rIns="0" bIns="0" rtlCol="0" anchor="ctr"/>
           <a:lstStyle/>
           <a:p>
-            <a:pPr indent="0" marL="0">
+            <a:pPr marL="0" indent="0">
               <a:buNone/>
             </a:pPr>
             <a:r>
@@ -9024,7 +8863,7 @@
           <a:bodyPr wrap="square" lIns="0" tIns="0" rIns="0" bIns="0" rtlCol="0" anchor="ctr"/>
           <a:lstStyle/>
           <a:p>
-            <a:pPr algn="ctr" indent="0" marL="0">
+            <a:pPr marL="0" indent="0" algn="ctr">
               <a:buNone/>
             </a:pPr>
             <a:r>
@@ -9063,7 +8902,7 @@
           <a:bodyPr wrap="square" lIns="0" tIns="0" rIns="0" bIns="0" rtlCol="0" anchor="ctr"/>
           <a:lstStyle/>
           <a:p>
-            <a:pPr indent="0" marL="0">
+            <a:pPr marL="0" indent="0">
               <a:buNone/>
             </a:pPr>
             <a:r>
@@ -9107,7 +8946,7 @@
             <a:prstDash val="solid"/>
           </a:ln>
           <a:effectLst>
-            <a:outerShdw sx="100000" sy="100000" kx="0" ky="0" algn="bl" rotWithShape="0" blurRad="76200" dist="12700" dir="5400000">
+            <a:outerShdw blurRad="76200" dist="12700" dir="5400000" algn="bl" rotWithShape="0">
               <a:srgbClr val="8C7FB0">
                 <a:alpha val="16000"/>
               </a:srgbClr>
@@ -9161,7 +9000,7 @@
           <a:bodyPr wrap="square" lIns="0" tIns="0" rIns="0" bIns="0" rtlCol="0" anchor="ctr"/>
           <a:lstStyle/>
           <a:p>
-            <a:pPr algn="ctr" indent="0" marL="0">
+            <a:pPr marL="0" indent="0" algn="ctr">
               <a:buNone/>
             </a:pPr>
             <a:r>
@@ -9200,7 +9039,7 @@
           <a:bodyPr wrap="square" lIns="0" tIns="0" rIns="0" bIns="0" rtlCol="0" anchor="ctr"/>
           <a:lstStyle/>
           <a:p>
-            <a:pPr indent="0" marL="0">
+            <a:pPr marL="0" indent="0">
               <a:buNone/>
             </a:pPr>
             <a:r>
@@ -9239,7 +9078,7 @@
           <a:bodyPr wrap="square" lIns="0" tIns="0" rIns="0" bIns="0" rtlCol="0" anchor="ctr"/>
           <a:lstStyle/>
           <a:p>
-            <a:pPr indent="0" marL="0">
+            <a:pPr marL="0" indent="0">
               <a:buNone/>
             </a:pPr>
             <a:r>
@@ -9305,7 +9144,7 @@
           <a:bodyPr wrap="square" lIns="0" tIns="0" rIns="0" bIns="0" rtlCol="0" anchor="ctr"/>
           <a:lstStyle/>
           <a:p>
-            <a:pPr algn="ctr" indent="0" marL="0">
+            <a:pPr marL="0" indent="0" algn="ctr">
               <a:buNone/>
             </a:pPr>
             <a:r>
@@ -9344,7 +9183,7 @@
           <a:bodyPr wrap="square" lIns="0" tIns="0" rIns="0" bIns="0" rtlCol="0" anchor="ctr"/>
           <a:lstStyle/>
           <a:p>
-            <a:pPr indent="0" marL="0">
+            <a:pPr marL="0" indent="0">
               <a:buNone/>
             </a:pPr>
             <a:r>
@@ -9388,7 +9227,7 @@
             <a:prstDash val="solid"/>
           </a:ln>
           <a:effectLst>
-            <a:outerShdw sx="100000" sy="100000" kx="0" ky="0" algn="bl" rotWithShape="0" blurRad="76200" dist="12700" dir="5400000">
+            <a:outerShdw blurRad="76200" dist="12700" dir="5400000" algn="bl" rotWithShape="0">
               <a:srgbClr val="8C7FB0">
                 <a:alpha val="16000"/>
               </a:srgbClr>
@@ -9442,7 +9281,7 @@
           <a:bodyPr wrap="square" lIns="0" tIns="0" rIns="0" bIns="0" rtlCol="0" anchor="ctr"/>
           <a:lstStyle/>
           <a:p>
-            <a:pPr algn="ctr" indent="0" marL="0">
+            <a:pPr marL="0" indent="0" algn="ctr">
               <a:buNone/>
             </a:pPr>
             <a:r>
@@ -9481,7 +9320,7 @@
           <a:bodyPr wrap="square" lIns="0" tIns="0" rIns="0" bIns="0" rtlCol="0" anchor="ctr"/>
           <a:lstStyle/>
           <a:p>
-            <a:pPr indent="0" marL="0">
+            <a:pPr marL="0" indent="0">
               <a:buNone/>
             </a:pPr>
             <a:r>
@@ -9520,7 +9359,7 @@
           <a:bodyPr wrap="square" lIns="0" tIns="0" rIns="0" bIns="0" rtlCol="0" anchor="ctr"/>
           <a:lstStyle/>
           <a:p>
-            <a:pPr indent="0" marL="0">
+            <a:pPr marL="0" indent="0">
               <a:buNone/>
             </a:pPr>
             <a:r>
@@ -9586,7 +9425,7 @@
           <a:bodyPr wrap="square" lIns="0" tIns="0" rIns="0" bIns="0" rtlCol="0" anchor="ctr"/>
           <a:lstStyle/>
           <a:p>
-            <a:pPr algn="ctr" indent="0" marL="0">
+            <a:pPr marL="0" indent="0" algn="ctr">
               <a:buNone/>
             </a:pPr>
             <a:r>
@@ -9625,7 +9464,7 @@
           <a:bodyPr wrap="square" lIns="0" tIns="0" rIns="0" bIns="0" rtlCol="0" anchor="ctr"/>
           <a:lstStyle/>
           <a:p>
-            <a:pPr indent="0" marL="0">
+            <a:pPr marL="0" indent="0">
               <a:buNone/>
             </a:pPr>
             <a:r>
@@ -9664,7 +9503,7 @@
           <a:bodyPr wrap="square" lIns="0" tIns="0" rIns="0" bIns="0" rtlCol="0" anchor="ctr"/>
           <a:lstStyle/>
           <a:p>
-            <a:pPr algn="r" indent="0" marL="0">
+            <a:pPr marL="0" indent="0" algn="r">
               <a:buNone/>
             </a:pPr>
             <a:r>
@@ -9698,6 +9537,7 @@
         <a:solidFill>
           <a:srgbClr val="0C0625"/>
         </a:solidFill>
+        <a:effectLst/>
       </p:bgPr>
     </p:bg>
     <p:spTree>
@@ -9729,7 +9569,9 @@
             <a:avLst/>
           </a:prstGeom>
           <a:solidFill>
-            <a:srgbClr val="2F1D63"/>
+            <a:srgbClr val="2F1D63">
+              <a:alpha val="69000"/>
+            </a:srgbClr>
           </a:solidFill>
           <a:ln w="12700">
             <a:solidFill>
@@ -9760,11 +9602,11 @@
           <a:bodyPr wrap="square" lIns="0" tIns="0" rIns="0" bIns="0" rtlCol="0" anchor="ctr"/>
           <a:lstStyle/>
           <a:p>
-            <a:pPr indent="0" marL="0">
-              <a:buNone/>
-            </a:pPr>
-            <a:r>
-              <a:rPr lang="en-US" sz="1200" b="1" spc="200" kern="0" dirty="0">
+            <a:pPr marL="0" indent="0">
+              <a:buNone/>
+            </a:pPr>
+            <a:r>
+              <a:rPr lang="en-US" sz="1200" b="1" kern="0" spc="200" dirty="0">
                 <a:solidFill>
                   <a:srgbClr val="FF8AAF"/>
                 </a:solidFill>
@@ -9799,7 +9641,7 @@
           <a:bodyPr wrap="square" lIns="0" tIns="0" rIns="0" bIns="0" rtlCol="0" anchor="ctr"/>
           <a:lstStyle/>
           <a:p>
-            <a:pPr indent="0" marL="0">
+            <a:pPr marL="0" indent="0">
               <a:lnSpc>
                 <a:spcPts val="4600"/>
               </a:lnSpc>
@@ -9816,70 +9658,58 @@
               </a:rPr>
               <a:t>Blockchain makes a record </a:t>
             </a:r>
-            <a:pPr indent="0" marL="0">
+            <a:r>
+              <a:rPr lang="en-US" sz="3400" b="1" i="1" dirty="0">
+                <a:solidFill>
+                  <a:srgbClr val="9A81DF"/>
+                </a:solidFill>
+                <a:latin typeface="Calibri" pitchFamily="34" charset="0"/>
+                <a:ea typeface="Calibri" pitchFamily="34" charset="-122"/>
+                <a:cs typeface="Calibri" pitchFamily="34" charset="-120"/>
+              </a:rPr>
+              <a:t>immutable</a:t>
+            </a:r>
+            <a:r>
+              <a:rPr lang="en-US" sz="3400" b="1" dirty="0">
+                <a:solidFill>
+                  <a:srgbClr val="FFFFFF"/>
+                </a:solidFill>
+                <a:latin typeface="Calibri" pitchFamily="34" charset="0"/>
+                <a:ea typeface="Calibri" pitchFamily="34" charset="-122"/>
+                <a:cs typeface="Calibri" pitchFamily="34" charset="-120"/>
+              </a:rPr>
+              <a:t>.</a:t>
+            </a:r>
+            <a:endParaRPr lang="en-US" sz="3400" dirty="0"/>
+          </a:p>
+          <a:p>
+            <a:pPr marL="0" indent="0">
               <a:lnSpc>
                 <a:spcPts val="4600"/>
               </a:lnSpc>
               <a:buNone/>
             </a:pPr>
             <a:r>
-              <a:rPr lang="en-US" sz="3400" b="1" i="1" dirty="0">
-                <a:solidFill>
-                  <a:srgbClr val="9A81DF"/>
-                </a:solidFill>
-                <a:latin typeface="Calibri" pitchFamily="34" charset="0"/>
-                <a:ea typeface="Calibri" pitchFamily="34" charset="-122"/>
-                <a:cs typeface="Calibri" pitchFamily="34" charset="-120"/>
-              </a:rPr>
-              <a:t>immutable</a:t>
-            </a:r>
-            <a:pPr indent="0" marL="0">
+              <a:rPr lang="en-US" sz="3400" b="1" dirty="0">
+                <a:solidFill>
+                  <a:srgbClr val="FFFFFF"/>
+                </a:solidFill>
+                <a:latin typeface="Calibri" pitchFamily="34" charset="0"/>
+                <a:ea typeface="Calibri" pitchFamily="34" charset="-122"/>
+                <a:cs typeface="Calibri" pitchFamily="34" charset="-120"/>
+              </a:rPr>
+              <a:t>It does not make it </a:t>
+            </a:r>
+            <a:endParaRPr lang="en-US" sz="3400" dirty="0"/>
+          </a:p>
+          <a:p>
+            <a:pPr marL="0" indent="0">
               <a:lnSpc>
                 <a:spcPts val="4600"/>
               </a:lnSpc>
               <a:buNone/>
             </a:pPr>
             <a:r>
-              <a:rPr lang="en-US" sz="3400" b="1" dirty="0">
-                <a:solidFill>
-                  <a:srgbClr val="FFFFFF"/>
-                </a:solidFill>
-                <a:latin typeface="Calibri" pitchFamily="34" charset="0"/>
-                <a:ea typeface="Calibri" pitchFamily="34" charset="-122"/>
-                <a:cs typeface="Calibri" pitchFamily="34" charset="-120"/>
-              </a:rPr>
-              <a:t>.</a:t>
-            </a:r>
-            <a:endParaRPr lang="en-US" sz="3400" dirty="0"/>
-          </a:p>
-          <a:p>
-            <a:pPr indent="0" marL="0">
-              <a:lnSpc>
-                <a:spcPts val="4600"/>
-              </a:lnSpc>
-              <a:buNone/>
-            </a:pPr>
-            <a:r>
-              <a:rPr lang="en-US" sz="3400" b="1" dirty="0">
-                <a:solidFill>
-                  <a:srgbClr val="FFFFFF"/>
-                </a:solidFill>
-                <a:latin typeface="Calibri" pitchFamily="34" charset="0"/>
-                <a:ea typeface="Calibri" pitchFamily="34" charset="-122"/>
-                <a:cs typeface="Calibri" pitchFamily="34" charset="-120"/>
-              </a:rPr>
-              <a:t>It does not make it </a:t>
-            </a:r>
-            <a:endParaRPr lang="en-US" sz="3400" dirty="0"/>
-          </a:p>
-          <a:p>
-            <a:pPr indent="0" marL="0">
-              <a:lnSpc>
-                <a:spcPts val="4600"/>
-              </a:lnSpc>
-              <a:buNone/>
-            </a:pPr>
-            <a:r>
               <a:rPr lang="en-US" sz="3400" b="1" i="1" dirty="0">
                 <a:solidFill>
                   <a:srgbClr val="FF8AAF"/>
@@ -9890,12 +9720,6 @@
               </a:rPr>
               <a:t>correct</a:t>
             </a:r>
-            <a:pPr indent="0" marL="0">
-              <a:lnSpc>
-                <a:spcPts val="4600"/>
-              </a:lnSpc>
-              <a:buNone/>
-            </a:pPr>
             <a:r>
               <a:rPr lang="en-US" sz="3400" b="1" dirty="0">
                 <a:solidFill>
@@ -9932,7 +9756,7 @@
           <a:bodyPr wrap="square" lIns="0" tIns="0" rIns="0" bIns="0" rtlCol="0" anchor="ctr"/>
           <a:lstStyle/>
           <a:p>
-            <a:pPr indent="0" marL="0">
+            <a:pPr marL="0" indent="0">
               <a:lnSpc>
                 <a:spcPts val="2200"/>
               </a:lnSpc>
@@ -10001,7 +9825,7 @@
           <a:bodyPr wrap="square" lIns="0" tIns="0" rIns="0" bIns="0" rtlCol="0" anchor="ctr"/>
           <a:lstStyle/>
           <a:p>
-            <a:pPr indent="0" marL="0">
+            <a:pPr marL="0" indent="0">
               <a:buNone/>
             </a:pPr>
             <a:r>
@@ -10040,7 +9864,7 @@
           <a:bodyPr wrap="square" lIns="0" tIns="0" rIns="0" bIns="0" rtlCol="0" anchor="ctr"/>
           <a:lstStyle/>
           <a:p>
-            <a:pPr indent="0" marL="0">
+            <a:pPr marL="0" indent="0">
               <a:lnSpc>
                 <a:spcPts val="1500"/>
               </a:lnSpc>
@@ -10109,7 +9933,7 @@
           <a:bodyPr wrap="square" lIns="0" tIns="0" rIns="0" bIns="0" rtlCol="0" anchor="ctr"/>
           <a:lstStyle/>
           <a:p>
-            <a:pPr indent="0" marL="0">
+            <a:pPr marL="0" indent="0">
               <a:buNone/>
             </a:pPr>
             <a:r>
@@ -10148,7 +9972,7 @@
           <a:bodyPr wrap="square" lIns="0" tIns="0" rIns="0" bIns="0" rtlCol="0" anchor="ctr"/>
           <a:lstStyle/>
           <a:p>
-            <a:pPr indent="0" marL="0">
+            <a:pPr marL="0" indent="0">
               <a:lnSpc>
                 <a:spcPts val="1500"/>
               </a:lnSpc>
@@ -10217,7 +10041,7 @@
           <a:bodyPr wrap="square" lIns="0" tIns="0" rIns="0" bIns="0" rtlCol="0" anchor="ctr"/>
           <a:lstStyle/>
           <a:p>
-            <a:pPr indent="0" marL="0">
+            <a:pPr marL="0" indent="0">
               <a:buNone/>
             </a:pPr>
             <a:r>
@@ -10256,7 +10080,7 @@
           <a:bodyPr wrap="square" lIns="0" tIns="0" rIns="0" bIns="0" rtlCol="0" anchor="ctr"/>
           <a:lstStyle/>
           <a:p>
-            <a:pPr indent="0" marL="0">
+            <a:pPr marL="0" indent="0">
               <a:lnSpc>
                 <a:spcPts val="1500"/>
               </a:lnSpc>
@@ -10293,6 +10117,7 @@
         <a:solidFill>
           <a:srgbClr val="F6F4FA"/>
         </a:solidFill>
+        <a:effectLst/>
       </p:bgPr>
     </p:bg>
     <p:spTree>
@@ -10330,11 +10155,11 @@
           <a:bodyPr wrap="square" lIns="0" tIns="0" rIns="0" bIns="0" rtlCol="0" anchor="ctr"/>
           <a:lstStyle/>
           <a:p>
-            <a:pPr indent="0" marL="0">
-              <a:buNone/>
-            </a:pPr>
-            <a:r>
-              <a:rPr lang="en-US" sz="1150" b="1" spc="160" kern="0" dirty="0">
+            <a:pPr marL="0" indent="0">
+              <a:buNone/>
+            </a:pPr>
+            <a:r>
+              <a:rPr lang="en-US" sz="1150" b="1" kern="0" spc="160" dirty="0">
                 <a:solidFill>
                   <a:srgbClr val="9A81DF"/>
                 </a:solidFill>
@@ -10369,7 +10194,7 @@
           <a:bodyPr wrap="square" lIns="0" tIns="0" rIns="0" bIns="0" rtlCol="0" anchor="ctr"/>
           <a:lstStyle/>
           <a:p>
-            <a:pPr indent="0" marL="0">
+            <a:pPr marL="0" indent="0">
               <a:buNone/>
             </a:pPr>
             <a:r>
@@ -10413,7 +10238,7 @@
             <a:prstDash val="solid"/>
           </a:ln>
           <a:effectLst>
-            <a:outerShdw sx="100000" sy="100000" kx="0" ky="0" algn="bl" rotWithShape="0" blurRad="76200" dist="12700" dir="5400000">
+            <a:outerShdw blurRad="76200" dist="12700" dir="5400000" algn="bl" rotWithShape="0">
               <a:srgbClr val="8C7FB0">
                 <a:alpha val="16000"/>
               </a:srgbClr>
@@ -10469,11 +10294,11 @@
           <a:bodyPr wrap="square" lIns="0" tIns="0" rIns="0" bIns="0" rtlCol="0" anchor="ctr"/>
           <a:lstStyle/>
           <a:p>
-            <a:pPr algn="ctr" indent="0" marL="0">
-              <a:buNone/>
-            </a:pPr>
-            <a:r>
-              <a:rPr lang="en-US" sz="950" b="1" spc="100" kern="0" dirty="0">
+            <a:pPr marL="0" indent="0" algn="ctr">
+              <a:buNone/>
+            </a:pPr>
+            <a:r>
+              <a:rPr lang="en-US" sz="950" b="1" kern="0" spc="100" dirty="0">
                 <a:solidFill>
                   <a:srgbClr val="FFFFFF"/>
                 </a:solidFill>
@@ -10508,7 +10333,7 @@
           <a:bodyPr wrap="square" lIns="0" tIns="0" rIns="0" bIns="0" rtlCol="0" anchor="ctr"/>
           <a:lstStyle/>
           <a:p>
-            <a:pPr indent="0" marL="0">
+            <a:pPr marL="0" indent="0">
               <a:buNone/>
             </a:pPr>
             <a:r>
@@ -10547,7 +10372,7 @@
           <a:bodyPr wrap="square" lIns="0" tIns="0" rIns="0" bIns="0" rtlCol="0" anchor="ctr"/>
           <a:lstStyle/>
           <a:p>
-            <a:pPr indent="0" marL="0">
+            <a:pPr marL="0" indent="0">
               <a:buNone/>
             </a:pPr>
             <a:r>
@@ -10586,7 +10411,7 @@
           <a:bodyPr wrap="square" lIns="0" tIns="0" rIns="0" bIns="0" rtlCol="0" anchor="ctr"/>
           <a:lstStyle/>
           <a:p>
-            <a:pPr indent="0" marL="0">
+            <a:pPr marL="0" indent="0">
               <a:buNone/>
             </a:pPr>
             <a:r>
@@ -10625,7 +10450,7 @@
           <a:bodyPr wrap="square" lIns="0" tIns="0" rIns="0" bIns="0" rtlCol="0" anchor="ctr"/>
           <a:lstStyle/>
           <a:p>
-            <a:pPr indent="0" marL="0">
+            <a:pPr marL="0" indent="0">
               <a:buNone/>
             </a:pPr>
             <a:r>
@@ -10664,7 +10489,7 @@
           <a:bodyPr wrap="square" lIns="0" tIns="0" rIns="0" bIns="0" rtlCol="0" anchor="ctr"/>
           <a:lstStyle/>
           <a:p>
-            <a:pPr indent="0" marL="0">
+            <a:pPr marL="0" indent="0">
               <a:buNone/>
             </a:pPr>
             <a:r>
@@ -10703,7 +10528,7 @@
           <a:bodyPr wrap="square" lIns="0" tIns="0" rIns="0" bIns="0" rtlCol="0" anchor="ctr"/>
           <a:lstStyle/>
           <a:p>
-            <a:pPr indent="0" marL="0">
+            <a:pPr marL="0" indent="0">
               <a:buNone/>
             </a:pPr>
             <a:r>
@@ -10742,7 +10567,7 @@
           <a:bodyPr wrap="square" lIns="0" tIns="0" rIns="0" bIns="0" rtlCol="0" anchor="ctr"/>
           <a:lstStyle/>
           <a:p>
-            <a:pPr indent="0" marL="0">
+            <a:pPr marL="0" indent="0">
               <a:buNone/>
             </a:pPr>
             <a:r>
@@ -10781,7 +10606,7 @@
           <a:bodyPr wrap="square" lIns="0" tIns="0" rIns="0" bIns="0" rtlCol="0" anchor="ctr"/>
           <a:lstStyle/>
           <a:p>
-            <a:pPr indent="0" marL="0">
+            <a:pPr marL="0" indent="0">
               <a:buNone/>
             </a:pPr>
             <a:r>
@@ -10825,7 +10650,7 @@
             <a:prstDash val="solid"/>
           </a:ln>
           <a:effectLst>
-            <a:outerShdw sx="100000" sy="100000" kx="0" ky="0" algn="bl" rotWithShape="0" blurRad="76200" dist="12700" dir="5400000">
+            <a:outerShdw blurRad="76200" dist="12700" dir="5400000" algn="bl" rotWithShape="0">
               <a:srgbClr val="8C7FB0">
                 <a:alpha val="16000"/>
               </a:srgbClr>
@@ -10881,11 +10706,11 @@
           <a:bodyPr wrap="square" lIns="0" tIns="0" rIns="0" bIns="0" rtlCol="0" anchor="ctr"/>
           <a:lstStyle/>
           <a:p>
-            <a:pPr algn="ctr" indent="0" marL="0">
-              <a:buNone/>
-            </a:pPr>
-            <a:r>
-              <a:rPr lang="en-US" sz="950" b="1" spc="100" kern="0" dirty="0">
+            <a:pPr marL="0" indent="0" algn="ctr">
+              <a:buNone/>
+            </a:pPr>
+            <a:r>
+              <a:rPr lang="en-US" sz="950" b="1" kern="0" spc="100" dirty="0">
                 <a:solidFill>
                   <a:srgbClr val="FFFFFF"/>
                 </a:solidFill>
@@ -10920,7 +10745,7 @@
           <a:bodyPr wrap="square" lIns="0" tIns="0" rIns="0" bIns="0" rtlCol="0" anchor="ctr"/>
           <a:lstStyle/>
           <a:p>
-            <a:pPr indent="0" marL="0">
+            <a:pPr marL="0" indent="0">
               <a:buNone/>
             </a:pPr>
             <a:r>
@@ -10959,7 +10784,7 @@
           <a:bodyPr wrap="square" lIns="0" tIns="0" rIns="0" bIns="0" rtlCol="0" anchor="ctr"/>
           <a:lstStyle/>
           <a:p>
-            <a:pPr indent="0" marL="0">
+            <a:pPr marL="0" indent="0">
               <a:buNone/>
             </a:pPr>
             <a:r>
@@ -10998,7 +10823,7 @@
           <a:bodyPr wrap="square" lIns="0" tIns="0" rIns="0" bIns="0" rtlCol="0" anchor="ctr"/>
           <a:lstStyle/>
           <a:p>
-            <a:pPr indent="0" marL="0">
+            <a:pPr marL="0" indent="0">
               <a:buNone/>
             </a:pPr>
             <a:r>
@@ -11037,7 +10862,7 @@
           <a:bodyPr wrap="square" lIns="0" tIns="0" rIns="0" bIns="0" rtlCol="0" anchor="ctr"/>
           <a:lstStyle/>
           <a:p>
-            <a:pPr indent="0" marL="0">
+            <a:pPr marL="0" indent="0">
               <a:buNone/>
             </a:pPr>
             <a:r>
@@ -11081,7 +10906,7 @@
             <a:prstDash val="solid"/>
           </a:ln>
           <a:effectLst>
-            <a:outerShdw sx="100000" sy="100000" kx="0" ky="0" algn="bl" rotWithShape="0" blurRad="76200" dist="12700" dir="5400000">
+            <a:outerShdw blurRad="76200" dist="12700" dir="5400000" algn="bl" rotWithShape="0">
               <a:srgbClr val="8C7FB0">
                 <a:alpha val="16000"/>
               </a:srgbClr>
@@ -11137,11 +10962,11 @@
           <a:bodyPr wrap="square" lIns="0" tIns="0" rIns="0" bIns="0" rtlCol="0" anchor="ctr"/>
           <a:lstStyle/>
           <a:p>
-            <a:pPr algn="ctr" indent="0" marL="0">
-              <a:buNone/>
-            </a:pPr>
-            <a:r>
-              <a:rPr lang="en-US" sz="950" b="1" spc="100" kern="0" dirty="0">
+            <a:pPr marL="0" indent="0" algn="ctr">
+              <a:buNone/>
+            </a:pPr>
+            <a:r>
+              <a:rPr lang="en-US" sz="950" b="1" kern="0" spc="100" dirty="0">
                 <a:solidFill>
                   <a:srgbClr val="FFFFFF"/>
                 </a:solidFill>
@@ -11176,7 +11001,7 @@
           <a:bodyPr wrap="square" lIns="0" tIns="0" rIns="0" bIns="0" rtlCol="0" anchor="ctr"/>
           <a:lstStyle/>
           <a:p>
-            <a:pPr indent="0" marL="0">
+            <a:pPr marL="0" indent="0">
               <a:buNone/>
             </a:pPr>
             <a:r>
@@ -11215,7 +11040,7 @@
           <a:bodyPr wrap="square" lIns="0" tIns="0" rIns="0" bIns="0" rtlCol="0" anchor="ctr"/>
           <a:lstStyle/>
           <a:p>
-            <a:pPr indent="0" marL="0">
+            <a:pPr marL="0" indent="0">
               <a:buNone/>
             </a:pPr>
             <a:r>
@@ -11254,7 +11079,7 @@
           <a:bodyPr wrap="square" lIns="0" tIns="0" rIns="0" bIns="0" rtlCol="0" anchor="ctr"/>
           <a:lstStyle/>
           <a:p>
-            <a:pPr indent="0" marL="0">
+            <a:pPr marL="0" indent="0">
               <a:buNone/>
             </a:pPr>
             <a:r>
@@ -11293,7 +11118,7 @@
           <a:bodyPr wrap="square" lIns="0" tIns="0" rIns="0" bIns="0" rtlCol="0" anchor="ctr"/>
           <a:lstStyle/>
           <a:p>
-            <a:pPr indent="0" marL="0">
+            <a:pPr marL="0" indent="0">
               <a:buNone/>
             </a:pPr>
             <a:r>
@@ -11337,7 +11162,7 @@
             <a:prstDash val="solid"/>
           </a:ln>
           <a:effectLst>
-            <a:outerShdw sx="100000" sy="100000" kx="0" ky="0" algn="bl" rotWithShape="0" blurRad="76200" dist="12700" dir="5400000">
+            <a:outerShdw blurRad="76200" dist="12700" dir="5400000" algn="bl" rotWithShape="0">
               <a:srgbClr val="8C7FB0">
                 <a:alpha val="16000"/>
               </a:srgbClr>
@@ -11393,11 +11218,11 @@
           <a:bodyPr wrap="square" lIns="0" tIns="0" rIns="0" bIns="0" rtlCol="0" anchor="ctr"/>
           <a:lstStyle/>
           <a:p>
-            <a:pPr algn="ctr" indent="0" marL="0">
-              <a:buNone/>
-            </a:pPr>
-            <a:r>
-              <a:rPr lang="en-US" sz="950" b="1" spc="100" kern="0" dirty="0">
+            <a:pPr marL="0" indent="0" algn="ctr">
+              <a:buNone/>
+            </a:pPr>
+            <a:r>
+              <a:rPr lang="en-US" sz="950" b="1" kern="0" spc="100" dirty="0">
                 <a:solidFill>
                   <a:srgbClr val="FFFFFF"/>
                 </a:solidFill>
@@ -11432,7 +11257,7 @@
           <a:bodyPr wrap="square" lIns="0" tIns="0" rIns="0" bIns="0" rtlCol="0" anchor="ctr"/>
           <a:lstStyle/>
           <a:p>
-            <a:pPr indent="0" marL="0">
+            <a:pPr marL="0" indent="0">
               <a:buNone/>
             </a:pPr>
             <a:r>
@@ -11471,7 +11296,7 @@
           <a:bodyPr wrap="square" lIns="0" tIns="0" rIns="0" bIns="0" rtlCol="0" anchor="ctr"/>
           <a:lstStyle/>
           <a:p>
-            <a:pPr indent="0" marL="0">
+            <a:pPr marL="0" indent="0">
               <a:buNone/>
             </a:pPr>
             <a:r>
@@ -11510,7 +11335,7 @@
           <a:bodyPr wrap="square" lIns="0" tIns="0" rIns="0" bIns="0" rtlCol="0" anchor="ctr"/>
           <a:lstStyle/>
           <a:p>
-            <a:pPr indent="0" marL="0">
+            <a:pPr marL="0" indent="0">
               <a:buNone/>
             </a:pPr>
             <a:r>
@@ -11549,7 +11374,7 @@
           <a:bodyPr wrap="square" lIns="0" tIns="0" rIns="0" bIns="0" rtlCol="0" anchor="ctr"/>
           <a:lstStyle/>
           <a:p>
-            <a:pPr indent="0" marL="0">
+            <a:pPr marL="0" indent="0">
               <a:buNone/>
             </a:pPr>
             <a:r>
@@ -11588,7 +11413,7 @@
           <a:bodyPr wrap="square" lIns="0" tIns="0" rIns="0" bIns="0" rtlCol="0" anchor="ctr"/>
           <a:lstStyle/>
           <a:p>
-            <a:pPr indent="0" marL="0">
+            <a:pPr marL="0" indent="0">
               <a:buNone/>
             </a:pPr>
             <a:r>
@@ -11627,7 +11452,7 @@
           <a:bodyPr wrap="square" lIns="0" tIns="0" rIns="0" bIns="0" rtlCol="0" anchor="ctr"/>
           <a:lstStyle/>
           <a:p>
-            <a:pPr indent="0" marL="0">
+            <a:pPr marL="0" indent="0">
               <a:buNone/>
             </a:pPr>
             <a:r>
@@ -11666,7 +11491,7 @@
           <a:bodyPr wrap="square" lIns="0" tIns="0" rIns="0" bIns="0" rtlCol="0" anchor="ctr"/>
           <a:lstStyle/>
           <a:p>
-            <a:pPr indent="0" marL="0">
+            <a:pPr marL="0" indent="0">
               <a:buNone/>
             </a:pPr>
             <a:r>
@@ -11705,7 +11530,7 @@
           <a:bodyPr wrap="square" lIns="0" tIns="0" rIns="0" bIns="0" rtlCol="0" anchor="ctr"/>
           <a:lstStyle/>
           <a:p>
-            <a:pPr indent="0" marL="0">
+            <a:pPr marL="0" indent="0">
               <a:buNone/>
             </a:pPr>
             <a:r>
@@ -11744,7 +11569,7 @@
           <a:bodyPr wrap="square" lIns="0" tIns="0" rIns="0" bIns="0" rtlCol="0" anchor="ctr"/>
           <a:lstStyle/>
           <a:p>
-            <a:pPr algn="ctr" indent="0" marL="0">
+            <a:pPr marL="0" indent="0" algn="ctr">
               <a:buNone/>
             </a:pPr>
             <a:r>
@@ -11783,7 +11608,7 @@
           <a:bodyPr wrap="square" lIns="0" tIns="0" rIns="0" bIns="0" rtlCol="0" anchor="ctr"/>
           <a:lstStyle/>
           <a:p>
-            <a:pPr algn="ctr" indent="0" marL="0">
+            <a:pPr marL="0" indent="0" algn="ctr">
               <a:buNone/>
             </a:pPr>
             <a:r>
@@ -11822,7 +11647,7 @@
           <a:bodyPr wrap="square" lIns="0" tIns="0" rIns="0" bIns="0" rtlCol="0" anchor="ctr"/>
           <a:lstStyle/>
           <a:p>
-            <a:pPr algn="ctr" indent="0" marL="0">
+            <a:pPr marL="0" indent="0" algn="ctr">
               <a:buNone/>
             </a:pPr>
             <a:r>
@@ -11866,7 +11691,7 @@
             <a:prstDash val="solid"/>
           </a:ln>
           <a:effectLst>
-            <a:outerShdw sx="100000" sy="100000" kx="0" ky="0" algn="bl" rotWithShape="0" blurRad="76200" dist="12700" dir="5400000">
+            <a:outerShdw blurRad="76200" dist="12700" dir="5400000" algn="bl" rotWithShape="0">
               <a:srgbClr val="8C7FB0">
                 <a:alpha val="16000"/>
               </a:srgbClr>
@@ -11922,11 +11747,11 @@
           <a:bodyPr wrap="square" lIns="0" tIns="0" rIns="0" bIns="0" rtlCol="0" anchor="ctr"/>
           <a:lstStyle/>
           <a:p>
-            <a:pPr algn="ctr" indent="0" marL="0">
-              <a:buNone/>
-            </a:pPr>
-            <a:r>
-              <a:rPr lang="en-US" sz="950" b="1" spc="80" kern="0" dirty="0">
+            <a:pPr marL="0" indent="0" algn="ctr">
+              <a:buNone/>
+            </a:pPr>
+            <a:r>
+              <a:rPr lang="en-US" sz="950" b="1" kern="0" spc="80" dirty="0">
                 <a:solidFill>
                   <a:srgbClr val="0C0625"/>
                 </a:solidFill>
@@ -11948,7 +11773,7 @@
         </p:nvSpPr>
         <p:spPr>
           <a:xfrm>
-            <a:off x="768096" y="4754880"/>
+            <a:off x="768096" y="4636008"/>
             <a:ext cx="3108960" cy="566928"/>
           </a:xfrm>
           <a:prstGeom prst="rect">
@@ -11961,7 +11786,7 @@
           <a:bodyPr wrap="square" lIns="0" tIns="0" rIns="0" bIns="0" rtlCol="0" anchor="ctr"/>
           <a:lstStyle/>
           <a:p>
-            <a:pPr indent="0" marL="0">
+            <a:pPr marL="0" indent="0">
               <a:lnSpc>
                 <a:spcPts val="1400"/>
               </a:lnSpc>
@@ -12008,7 +11833,7 @@
             <a:prstDash val="solid"/>
           </a:ln>
           <a:effectLst>
-            <a:outerShdw sx="100000" sy="100000" kx="0" ky="0" algn="bl" rotWithShape="0" blurRad="76200" dist="12700" dir="5400000">
+            <a:outerShdw blurRad="76200" dist="12700" dir="5400000" algn="bl" rotWithShape="0">
               <a:srgbClr val="8C7FB0">
                 <a:alpha val="16000"/>
               </a:srgbClr>
@@ -12064,11 +11889,11 @@
           <a:bodyPr wrap="square" lIns="0" tIns="0" rIns="0" bIns="0" rtlCol="0" anchor="ctr"/>
           <a:lstStyle/>
           <a:p>
-            <a:pPr algn="ctr" indent="0" marL="0">
-              <a:buNone/>
-            </a:pPr>
-            <a:r>
-              <a:rPr lang="en-US" sz="950" b="1" spc="80" kern="0" dirty="0">
+            <a:pPr marL="0" indent="0" algn="ctr">
+              <a:buNone/>
+            </a:pPr>
+            <a:r>
+              <a:rPr lang="en-US" sz="950" b="1" kern="0" spc="80" dirty="0">
                 <a:solidFill>
                   <a:srgbClr val="0C0625"/>
                 </a:solidFill>
@@ -12090,7 +11915,7 @@
         </p:nvSpPr>
         <p:spPr>
           <a:xfrm>
-            <a:off x="4471416" y="4754880"/>
+            <a:off x="4498848" y="4633722"/>
             <a:ext cx="3108960" cy="566928"/>
           </a:xfrm>
           <a:prstGeom prst="rect">
@@ -12103,7 +11928,7 @@
           <a:bodyPr wrap="square" lIns="0" tIns="0" rIns="0" bIns="0" rtlCol="0" anchor="ctr"/>
           <a:lstStyle/>
           <a:p>
-            <a:pPr indent="0" marL="0">
+            <a:pPr marL="0" indent="0">
               <a:lnSpc>
                 <a:spcPts val="1400"/>
               </a:lnSpc>
@@ -12150,7 +11975,7 @@
             <a:prstDash val="solid"/>
           </a:ln>
           <a:effectLst>
-            <a:outerShdw sx="100000" sy="100000" kx="0" ky="0" algn="bl" rotWithShape="0" blurRad="76200" dist="12700" dir="5400000">
+            <a:outerShdw blurRad="76200" dist="12700" dir="5400000" algn="bl" rotWithShape="0">
               <a:srgbClr val="8C7FB0">
                 <a:alpha val="16000"/>
               </a:srgbClr>
@@ -12206,11 +12031,11 @@
           <a:bodyPr wrap="square" lIns="0" tIns="0" rIns="0" bIns="0" rtlCol="0" anchor="ctr"/>
           <a:lstStyle/>
           <a:p>
-            <a:pPr algn="ctr" indent="0" marL="0">
-              <a:buNone/>
-            </a:pPr>
-            <a:r>
-              <a:rPr lang="en-US" sz="950" b="1" spc="80" kern="0" dirty="0">
+            <a:pPr marL="0" indent="0" algn="ctr">
+              <a:buNone/>
+            </a:pPr>
+            <a:r>
+              <a:rPr lang="en-US" sz="950" b="1" kern="0" spc="80" dirty="0">
                 <a:solidFill>
                   <a:srgbClr val="0C0625"/>
                 </a:solidFill>
@@ -12232,7 +12057,7 @@
         </p:nvSpPr>
         <p:spPr>
           <a:xfrm>
-            <a:off x="8174736" y="4754880"/>
+            <a:off x="8174736" y="4617720"/>
             <a:ext cx="3108960" cy="566928"/>
           </a:xfrm>
           <a:prstGeom prst="rect">
@@ -12245,7 +12070,7 @@
           <a:bodyPr wrap="square" lIns="0" tIns="0" rIns="0" bIns="0" rtlCol="0" anchor="ctr"/>
           <a:lstStyle/>
           <a:p>
-            <a:pPr indent="0" marL="0">
+            <a:pPr marL="0" indent="0">
               <a:lnSpc>
                 <a:spcPts val="1400"/>
               </a:lnSpc>
@@ -12292,7 +12117,7 @@
             <a:prstDash val="solid"/>
           </a:ln>
           <a:effectLst>
-            <a:outerShdw sx="100000" sy="100000" kx="0" ky="0" algn="bl" rotWithShape="0" blurRad="76200" dist="12700" dir="5400000">
+            <a:outerShdw blurRad="76200" dist="12700" dir="5400000" algn="bl" rotWithShape="0">
               <a:srgbClr val="8C7FB0">
                 <a:alpha val="16000"/>
               </a:srgbClr>
@@ -12321,7 +12146,7 @@
           <a:bodyPr wrap="square" lIns="0" tIns="0" rIns="0" bIns="0" rtlCol="0" anchor="ctr"/>
           <a:lstStyle/>
           <a:p>
-            <a:pPr indent="0" marL="0">
+            <a:pPr marL="0" indent="0">
               <a:lnSpc>
                 <a:spcPts val="1600"/>
               </a:lnSpc>
@@ -12338,12 +12163,6 @@
               </a:rPr>
               <a:t>One internal schema.  </a:t>
             </a:r>
-            <a:pPr indent="0" marL="0">
-              <a:lnSpc>
-                <a:spcPts val="1600"/>
-              </a:lnSpc>
-              <a:buNone/>
-            </a:pPr>
             <a:r>
               <a:rPr lang="en-US" sz="1200" dirty="0">
                 <a:solidFill>
@@ -12380,7 +12199,7 @@
           <a:bodyPr wrap="square" lIns="0" tIns="0" rIns="0" bIns="0" rtlCol="0" anchor="ctr"/>
           <a:lstStyle/>
           <a:p>
-            <a:pPr algn="r" indent="0" marL="0">
+            <a:pPr marL="0" indent="0" algn="r">
               <a:buNone/>
             </a:pPr>
             <a:r>
@@ -12414,6 +12233,7 @@
         <a:solidFill>
           <a:srgbClr val="F6F4FA"/>
         </a:solidFill>
+        <a:effectLst/>
       </p:bgPr>
     </p:bg>
     <p:spTree>
@@ -12451,11 +12271,11 @@
           <a:bodyPr wrap="square" lIns="0" tIns="0" rIns="0" bIns="0" rtlCol="0" anchor="ctr"/>
           <a:lstStyle/>
           <a:p>
-            <a:pPr indent="0" marL="0">
-              <a:buNone/>
-            </a:pPr>
-            <a:r>
-              <a:rPr lang="en-US" sz="1150" b="1" spc="160" kern="0" dirty="0">
+            <a:pPr marL="0" indent="0">
+              <a:buNone/>
+            </a:pPr>
+            <a:r>
+              <a:rPr lang="en-US" sz="1150" b="1" kern="0" spc="160" dirty="0">
                 <a:solidFill>
                   <a:srgbClr val="9A81DF"/>
                 </a:solidFill>
@@ -12490,7 +12310,7 @@
           <a:bodyPr wrap="square" lIns="0" tIns="0" rIns="0" bIns="0" rtlCol="0" anchor="ctr"/>
           <a:lstStyle/>
           <a:p>
-            <a:pPr indent="0" marL="0">
+            <a:pPr marL="0" indent="0">
               <a:buNone/>
             </a:pPr>
             <a:r>
@@ -12524,17 +12344,41 @@
         </p:nvGraphicFramePr>
         <p:xfrm>
           <a:off x="566928" y="1536192"/>
-          <a:ext cx="11055096" cy="914400"/>
+          <a:ext cx="11073384" cy="2816352"/>
         </p:xfrm>
         <a:graphic>
           <a:graphicData uri="http://schemas.openxmlformats.org/drawingml/2006/table">
             <a:tbl>
               <a:tblPr/>
               <a:tblGrid>
-                <a:gridCol w="1828800"/>
-                <a:gridCol w="3566160"/>
-                <a:gridCol w="4480560"/>
-                <a:gridCol w="1197864"/>
+                <a:gridCol w="1828800">
+                  <a:extLst>
+                    <a:ext uri="{9D8B030D-6E8A-4147-A177-3AD203B41FA5}">
+                      <a16:colId xmlns:a16="http://schemas.microsoft.com/office/drawing/2014/main" val="20000"/>
+                    </a:ext>
+                  </a:extLst>
+                </a:gridCol>
+                <a:gridCol w="3566160">
+                  <a:extLst>
+                    <a:ext uri="{9D8B030D-6E8A-4147-A177-3AD203B41FA5}">
+                      <a16:colId xmlns:a16="http://schemas.microsoft.com/office/drawing/2014/main" val="20001"/>
+                    </a:ext>
+                  </a:extLst>
+                </a:gridCol>
+                <a:gridCol w="4480560">
+                  <a:extLst>
+                    <a:ext uri="{9D8B030D-6E8A-4147-A177-3AD203B41FA5}">
+                      <a16:colId xmlns:a16="http://schemas.microsoft.com/office/drawing/2014/main" val="20002"/>
+                    </a:ext>
+                  </a:extLst>
+                </a:gridCol>
+                <a:gridCol w="1197864">
+                  <a:extLst>
+                    <a:ext uri="{9D8B030D-6E8A-4147-A177-3AD203B41FA5}">
+                      <a16:colId xmlns:a16="http://schemas.microsoft.com/office/drawing/2014/main" val="20003"/>
+                    </a:ext>
+                  </a:extLst>
+                </a:gridCol>
               </a:tblGrid>
               <a:tr h="402336">
                 <a:tc>
@@ -12542,7 +12386,7 @@
                     <a:bodyPr/>
                     <a:lstStyle/>
                     <a:p>
-                      <a:pPr indent="0" marL="0">
+                      <a:pPr marL="0" indent="0">
                         <a:buNone/>
                       </a:pPr>
                       <a:r>
@@ -12563,7 +12407,7 @@
                       </a:endParaRPr>
                     </a:p>
                   </a:txBody>
-                  <a:tcPr marL="91440" marR="91440" marT="45720" marB="45720" anchor="ctr">
+                  <a:tcPr anchor="ctr">
                     <a:lnL w="9525" cap="flat" cmpd="sng" algn="ctr">
                       <a:solidFill>
                         <a:srgbClr val="E2DCEC"/>
@@ -12610,7 +12454,7 @@
                     <a:bodyPr/>
                     <a:lstStyle/>
                     <a:p>
-                      <a:pPr indent="0" marL="0">
+                      <a:pPr marL="0" indent="0">
                         <a:buNone/>
                       </a:pPr>
                       <a:r>
@@ -12631,7 +12475,7 @@
                       </a:endParaRPr>
                     </a:p>
                   </a:txBody>
-                  <a:tcPr marL="91440" marR="91440" marT="45720" marB="45720" anchor="ctr">
+                  <a:tcPr anchor="ctr">
                     <a:lnL w="9525" cap="flat" cmpd="sng" algn="ctr">
                       <a:solidFill>
                         <a:srgbClr val="E2DCEC"/>
@@ -12678,7 +12522,7 @@
                     <a:bodyPr/>
                     <a:lstStyle/>
                     <a:p>
-                      <a:pPr indent="0" marL="0">
+                      <a:pPr marL="0" indent="0">
                         <a:buNone/>
                       </a:pPr>
                       <a:r>
@@ -12699,7 +12543,7 @@
                       </a:endParaRPr>
                     </a:p>
                   </a:txBody>
-                  <a:tcPr marL="91440" marR="91440" marT="45720" marB="45720" anchor="ctr">
+                  <a:tcPr anchor="ctr">
                     <a:lnL w="9525" cap="flat" cmpd="sng" algn="ctr">
                       <a:solidFill>
                         <a:srgbClr val="E2DCEC"/>
@@ -12746,7 +12590,7 @@
                     <a:bodyPr/>
                     <a:lstStyle/>
                     <a:p>
-                      <a:pPr indent="0" marL="0">
+                      <a:pPr marL="0" indent="0">
                         <a:buNone/>
                       </a:pPr>
                       <a:r>
@@ -12767,7 +12611,7 @@
                       </a:endParaRPr>
                     </a:p>
                   </a:txBody>
-                  <a:tcPr marL="91440" marR="91440" marT="45720" marB="45720" anchor="ctr">
+                  <a:tcPr anchor="ctr">
                     <a:lnL w="9525" cap="flat" cmpd="sng" algn="ctr">
                       <a:solidFill>
                         <a:srgbClr val="E2DCEC"/>
@@ -12809,6 +12653,11 @@
                     </a:solidFill>
                   </a:tcPr>
                 </a:tc>
+                <a:extLst>
+                  <a:ext uri="{0D108BD9-81ED-4DB2-BD59-A6C34878D82A}">
+                    <a16:rowId xmlns:a16="http://schemas.microsoft.com/office/drawing/2014/main" val="10000"/>
+                  </a:ext>
+                </a:extLst>
               </a:tr>
               <a:tr h="402336">
                 <a:tc>
@@ -12816,7 +12665,7 @@
                     <a:bodyPr/>
                     <a:lstStyle/>
                     <a:p>
-                      <a:pPr indent="0" marL="0">
+                      <a:pPr marL="0" indent="0">
                         <a:buNone/>
                       </a:pPr>
                       <a:r>
@@ -12837,7 +12686,7 @@
                       </a:endParaRPr>
                     </a:p>
                   </a:txBody>
-                  <a:tcPr marL="91440" marR="91440" marT="45720" marB="45720" anchor="ctr">
+                  <a:tcPr anchor="ctr">
                     <a:lnL w="9525" cap="flat" cmpd="sng" algn="ctr">
                       <a:solidFill>
                         <a:srgbClr val="E2DCEC"/>
@@ -12881,7 +12730,7 @@
                     <a:bodyPr/>
                     <a:lstStyle/>
                     <a:p>
-                      <a:pPr indent="0" marL="0">
+                      <a:pPr marL="0" indent="0">
                         <a:buNone/>
                       </a:pPr>
                       <a:r>
@@ -12902,7 +12751,7 @@
                       </a:endParaRPr>
                     </a:p>
                   </a:txBody>
-                  <a:tcPr marL="91440" marR="91440" marT="45720" marB="45720" anchor="ctr">
+                  <a:tcPr anchor="ctr">
                     <a:lnL w="9525" cap="flat" cmpd="sng" algn="ctr">
                       <a:solidFill>
                         <a:srgbClr val="E2DCEC"/>
@@ -12946,7 +12795,7 @@
                     <a:bodyPr/>
                     <a:lstStyle/>
                     <a:p>
-                      <a:pPr indent="0" marL="0">
+                      <a:pPr marL="0" indent="0">
                         <a:buNone/>
                       </a:pPr>
                       <a:r>
@@ -12967,7 +12816,7 @@
                       </a:endParaRPr>
                     </a:p>
                   </a:txBody>
-                  <a:tcPr marL="91440" marR="91440" marT="45720" marB="45720" anchor="ctr">
+                  <a:tcPr anchor="ctr">
                     <a:lnL w="9525" cap="flat" cmpd="sng" algn="ctr">
                       <a:solidFill>
                         <a:srgbClr val="E2DCEC"/>
@@ -13011,7 +12860,7 @@
                     <a:bodyPr/>
                     <a:lstStyle/>
                     <a:p>
-                      <a:pPr indent="0" marL="0">
+                      <a:pPr marL="0" indent="0">
                         <a:buNone/>
                       </a:pPr>
                       <a:r>
@@ -13032,7 +12881,7 @@
                       </a:endParaRPr>
                     </a:p>
                   </a:txBody>
-                  <a:tcPr marL="91440" marR="91440" marT="45720" marB="45720" anchor="ctr">
+                  <a:tcPr anchor="ctr">
                     <a:lnL w="9525" cap="flat" cmpd="sng" algn="ctr">
                       <a:solidFill>
                         <a:srgbClr val="E2DCEC"/>
@@ -13071,6 +12920,11 @@
                     </a:lnB>
                   </a:tcPr>
                 </a:tc>
+                <a:extLst>
+                  <a:ext uri="{0D108BD9-81ED-4DB2-BD59-A6C34878D82A}">
+                    <a16:rowId xmlns:a16="http://schemas.microsoft.com/office/drawing/2014/main" val="10001"/>
+                  </a:ext>
+                </a:extLst>
               </a:tr>
               <a:tr h="402336">
                 <a:tc>
@@ -13078,7 +12932,7 @@
                     <a:bodyPr/>
                     <a:lstStyle/>
                     <a:p>
-                      <a:pPr indent="0" marL="0">
+                      <a:pPr marL="0" indent="0">
                         <a:buNone/>
                       </a:pPr>
                       <a:r>
@@ -13099,7 +12953,7 @@
                       </a:endParaRPr>
                     </a:p>
                   </a:txBody>
-                  <a:tcPr marL="91440" marR="91440" marT="45720" marB="45720" anchor="ctr">
+                  <a:tcPr anchor="ctr">
                     <a:lnL w="9525" cap="flat" cmpd="sng" algn="ctr">
                       <a:solidFill>
                         <a:srgbClr val="E2DCEC"/>
@@ -13143,7 +12997,7 @@
                     <a:bodyPr/>
                     <a:lstStyle/>
                     <a:p>
-                      <a:pPr indent="0" marL="0">
+                      <a:pPr marL="0" indent="0">
                         <a:buNone/>
                       </a:pPr>
                       <a:r>
@@ -13164,7 +13018,7 @@
                       </a:endParaRPr>
                     </a:p>
                   </a:txBody>
-                  <a:tcPr marL="91440" marR="91440" marT="45720" marB="45720" anchor="ctr">
+                  <a:tcPr anchor="ctr">
                     <a:lnL w="9525" cap="flat" cmpd="sng" algn="ctr">
                       <a:solidFill>
                         <a:srgbClr val="E2DCEC"/>
@@ -13208,7 +13062,7 @@
                     <a:bodyPr/>
                     <a:lstStyle/>
                     <a:p>
-                      <a:pPr indent="0" marL="0">
+                      <a:pPr marL="0" indent="0">
                         <a:buNone/>
                       </a:pPr>
                       <a:r>
@@ -13229,7 +13083,7 @@
                       </a:endParaRPr>
                     </a:p>
                   </a:txBody>
-                  <a:tcPr marL="91440" marR="91440" marT="45720" marB="45720" anchor="ctr">
+                  <a:tcPr anchor="ctr">
                     <a:lnL w="9525" cap="flat" cmpd="sng" algn="ctr">
                       <a:solidFill>
                         <a:srgbClr val="E2DCEC"/>
@@ -13273,7 +13127,7 @@
                     <a:bodyPr/>
                     <a:lstStyle/>
                     <a:p>
-                      <a:pPr indent="0" marL="0">
+                      <a:pPr marL="0" indent="0">
                         <a:buNone/>
                       </a:pPr>
                       <a:r>
@@ -13294,7 +13148,7 @@
                       </a:endParaRPr>
                     </a:p>
                   </a:txBody>
-                  <a:tcPr marL="91440" marR="91440" marT="45720" marB="45720" anchor="ctr">
+                  <a:tcPr anchor="ctr">
                     <a:lnL w="9525" cap="flat" cmpd="sng" algn="ctr">
                       <a:solidFill>
                         <a:srgbClr val="E2DCEC"/>
@@ -13333,6 +13187,11 @@
                     </a:lnB>
                   </a:tcPr>
                 </a:tc>
+                <a:extLst>
+                  <a:ext uri="{0D108BD9-81ED-4DB2-BD59-A6C34878D82A}">
+                    <a16:rowId xmlns:a16="http://schemas.microsoft.com/office/drawing/2014/main" val="10002"/>
+                  </a:ext>
+                </a:extLst>
               </a:tr>
               <a:tr h="402336">
                 <a:tc>
@@ -13340,7 +13199,7 @@
                     <a:bodyPr/>
                     <a:lstStyle/>
                     <a:p>
-                      <a:pPr indent="0" marL="0">
+                      <a:pPr marL="0" indent="0">
                         <a:buNone/>
                       </a:pPr>
                       <a:r>
@@ -13361,7 +13220,7 @@
                       </a:endParaRPr>
                     </a:p>
                   </a:txBody>
-                  <a:tcPr marL="91440" marR="91440" marT="45720" marB="45720" anchor="ctr">
+                  <a:tcPr anchor="ctr">
                     <a:lnL w="9525" cap="flat" cmpd="sng" algn="ctr">
                       <a:solidFill>
                         <a:srgbClr val="E2DCEC"/>
@@ -13405,7 +13264,7 @@
                     <a:bodyPr/>
                     <a:lstStyle/>
                     <a:p>
-                      <a:pPr indent="0" marL="0">
+                      <a:pPr marL="0" indent="0">
                         <a:buNone/>
                       </a:pPr>
                       <a:r>
@@ -13426,7 +13285,7 @@
                       </a:endParaRPr>
                     </a:p>
                   </a:txBody>
-                  <a:tcPr marL="91440" marR="91440" marT="45720" marB="45720" anchor="ctr">
+                  <a:tcPr anchor="ctr">
                     <a:lnL w="9525" cap="flat" cmpd="sng" algn="ctr">
                       <a:solidFill>
                         <a:srgbClr val="E2DCEC"/>
@@ -13470,7 +13329,7 @@
                     <a:bodyPr/>
                     <a:lstStyle/>
                     <a:p>
-                      <a:pPr indent="0" marL="0">
+                      <a:pPr marL="0" indent="0">
                         <a:buNone/>
                       </a:pPr>
                       <a:r>
@@ -13491,7 +13350,7 @@
                       </a:endParaRPr>
                     </a:p>
                   </a:txBody>
-                  <a:tcPr marL="91440" marR="91440" marT="45720" marB="45720" anchor="ctr">
+                  <a:tcPr anchor="ctr">
                     <a:lnL w="9525" cap="flat" cmpd="sng" algn="ctr">
                       <a:solidFill>
                         <a:srgbClr val="E2DCEC"/>
@@ -13535,7 +13394,7 @@
                     <a:bodyPr/>
                     <a:lstStyle/>
                     <a:p>
-                      <a:pPr indent="0" marL="0">
+                      <a:pPr marL="0" indent="0">
                         <a:buNone/>
                       </a:pPr>
                       <a:r>
@@ -13556,7 +13415,7 @@
                       </a:endParaRPr>
                     </a:p>
                   </a:txBody>
-                  <a:tcPr marL="91440" marR="91440" marT="45720" marB="45720" anchor="ctr">
+                  <a:tcPr anchor="ctr">
                     <a:lnL w="9525" cap="flat" cmpd="sng" algn="ctr">
                       <a:solidFill>
                         <a:srgbClr val="E2DCEC"/>
@@ -13595,6 +13454,11 @@
                     </a:lnB>
                   </a:tcPr>
                 </a:tc>
+                <a:extLst>
+                  <a:ext uri="{0D108BD9-81ED-4DB2-BD59-A6C34878D82A}">
+                    <a16:rowId xmlns:a16="http://schemas.microsoft.com/office/drawing/2014/main" val="10003"/>
+                  </a:ext>
+                </a:extLst>
               </a:tr>
               <a:tr h="402336">
                 <a:tc>
@@ -13602,7 +13466,7 @@
                     <a:bodyPr/>
                     <a:lstStyle/>
                     <a:p>
-                      <a:pPr indent="0" marL="0">
+                      <a:pPr marL="0" indent="0">
                         <a:buNone/>
                       </a:pPr>
                       <a:r>
@@ -13623,7 +13487,7 @@
                       </a:endParaRPr>
                     </a:p>
                   </a:txBody>
-                  <a:tcPr marL="91440" marR="91440" marT="45720" marB="45720" anchor="ctr">
+                  <a:tcPr anchor="ctr">
                     <a:lnL w="9525" cap="flat" cmpd="sng" algn="ctr">
                       <a:solidFill>
                         <a:srgbClr val="E2DCEC"/>
@@ -13667,7 +13531,7 @@
                     <a:bodyPr/>
                     <a:lstStyle/>
                     <a:p>
-                      <a:pPr indent="0" marL="0">
+                      <a:pPr marL="0" indent="0">
                         <a:buNone/>
                       </a:pPr>
                       <a:r>
@@ -13688,7 +13552,7 @@
                       </a:endParaRPr>
                     </a:p>
                   </a:txBody>
-                  <a:tcPr marL="91440" marR="91440" marT="45720" marB="45720" anchor="ctr">
+                  <a:tcPr anchor="ctr">
                     <a:lnL w="9525" cap="flat" cmpd="sng" algn="ctr">
                       <a:solidFill>
                         <a:srgbClr val="E2DCEC"/>
@@ -13732,7 +13596,7 @@
                     <a:bodyPr/>
                     <a:lstStyle/>
                     <a:p>
-                      <a:pPr indent="0" marL="0">
+                      <a:pPr marL="0" indent="0">
                         <a:buNone/>
                       </a:pPr>
                       <a:r>
@@ -13753,7 +13617,7 @@
                       </a:endParaRPr>
                     </a:p>
                   </a:txBody>
-                  <a:tcPr marL="91440" marR="91440" marT="45720" marB="45720" anchor="ctr">
+                  <a:tcPr anchor="ctr">
                     <a:lnL w="9525" cap="flat" cmpd="sng" algn="ctr">
                       <a:solidFill>
                         <a:srgbClr val="E2DCEC"/>
@@ -13797,7 +13661,7 @@
                     <a:bodyPr/>
                     <a:lstStyle/>
                     <a:p>
-                      <a:pPr indent="0" marL="0">
+                      <a:pPr marL="0" indent="0">
                         <a:buNone/>
                       </a:pPr>
                       <a:r>
@@ -13818,7 +13682,7 @@
                       </a:endParaRPr>
                     </a:p>
                   </a:txBody>
-                  <a:tcPr marL="91440" marR="91440" marT="45720" marB="45720" anchor="ctr">
+                  <a:tcPr anchor="ctr">
                     <a:lnL w="9525" cap="flat" cmpd="sng" algn="ctr">
                       <a:solidFill>
                         <a:srgbClr val="E2DCEC"/>
@@ -13857,6 +13721,11 @@
                     </a:lnB>
                   </a:tcPr>
                 </a:tc>
+                <a:extLst>
+                  <a:ext uri="{0D108BD9-81ED-4DB2-BD59-A6C34878D82A}">
+                    <a16:rowId xmlns:a16="http://schemas.microsoft.com/office/drawing/2014/main" val="10004"/>
+                  </a:ext>
+                </a:extLst>
               </a:tr>
               <a:tr h="402336">
                 <a:tc>
@@ -13864,7 +13733,7 @@
                     <a:bodyPr/>
                     <a:lstStyle/>
                     <a:p>
-                      <a:pPr indent="0" marL="0">
+                      <a:pPr marL="0" indent="0">
                         <a:buNone/>
                       </a:pPr>
                       <a:r>
@@ -13885,7 +13754,7 @@
                       </a:endParaRPr>
                     </a:p>
                   </a:txBody>
-                  <a:tcPr marL="91440" marR="91440" marT="45720" marB="45720" anchor="ctr">
+                  <a:tcPr anchor="ctr">
                     <a:lnL w="9525" cap="flat" cmpd="sng" algn="ctr">
                       <a:solidFill>
                         <a:srgbClr val="E2DCEC"/>
@@ -13929,7 +13798,7 @@
                     <a:bodyPr/>
                     <a:lstStyle/>
                     <a:p>
-                      <a:pPr indent="0" marL="0">
+                      <a:pPr marL="0" indent="0">
                         <a:buNone/>
                       </a:pPr>
                       <a:r>
@@ -13950,7 +13819,7 @@
                       </a:endParaRPr>
                     </a:p>
                   </a:txBody>
-                  <a:tcPr marL="91440" marR="91440" marT="45720" marB="45720" anchor="ctr">
+                  <a:tcPr anchor="ctr">
                     <a:lnL w="9525" cap="flat" cmpd="sng" algn="ctr">
                       <a:solidFill>
                         <a:srgbClr val="E2DCEC"/>
@@ -13994,7 +13863,7 @@
                     <a:bodyPr/>
                     <a:lstStyle/>
                     <a:p>
-                      <a:pPr indent="0" marL="0">
+                      <a:pPr marL="0" indent="0">
                         <a:buNone/>
                       </a:pPr>
                       <a:r>
@@ -14015,7 +13884,7 @@
                       </a:endParaRPr>
                     </a:p>
                   </a:txBody>
-                  <a:tcPr marL="91440" marR="91440" marT="45720" marB="45720" anchor="ctr">
+                  <a:tcPr anchor="ctr">
                     <a:lnL w="9525" cap="flat" cmpd="sng" algn="ctr">
                       <a:solidFill>
                         <a:srgbClr val="E2DCEC"/>
@@ -14059,7 +13928,7 @@
                     <a:bodyPr/>
                     <a:lstStyle/>
                     <a:p>
-                      <a:pPr indent="0" marL="0">
+                      <a:pPr marL="0" indent="0">
                         <a:buNone/>
                       </a:pPr>
                       <a:r>
@@ -14080,7 +13949,7 @@
                       </a:endParaRPr>
                     </a:p>
                   </a:txBody>
-                  <a:tcPr marL="91440" marR="91440" marT="45720" marB="45720" anchor="ctr">
+                  <a:tcPr anchor="ctr">
                     <a:lnL w="9525" cap="flat" cmpd="sng" algn="ctr">
                       <a:solidFill>
                         <a:srgbClr val="E2DCEC"/>
@@ -14119,6 +13988,11 @@
                     </a:lnB>
                   </a:tcPr>
                 </a:tc>
+                <a:extLst>
+                  <a:ext uri="{0D108BD9-81ED-4DB2-BD59-A6C34878D82A}">
+                    <a16:rowId xmlns:a16="http://schemas.microsoft.com/office/drawing/2014/main" val="10005"/>
+                  </a:ext>
+                </a:extLst>
               </a:tr>
               <a:tr h="402336">
                 <a:tc>
@@ -14126,7 +14000,7 @@
                     <a:bodyPr/>
                     <a:lstStyle/>
                     <a:p>
-                      <a:pPr indent="0" marL="0">
+                      <a:pPr marL="0" indent="0">
                         <a:buNone/>
                       </a:pPr>
                       <a:r>
@@ -14147,7 +14021,7 @@
                       </a:endParaRPr>
                     </a:p>
                   </a:txBody>
-                  <a:tcPr marL="91440" marR="91440" marT="45720" marB="45720" anchor="ctr">
+                  <a:tcPr anchor="ctr">
                     <a:lnL w="9525" cap="flat" cmpd="sng" algn="ctr">
                       <a:solidFill>
                         <a:srgbClr val="E2DCEC"/>
@@ -14191,7 +14065,7 @@
                     <a:bodyPr/>
                     <a:lstStyle/>
                     <a:p>
-                      <a:pPr indent="0" marL="0">
+                      <a:pPr marL="0" indent="0">
                         <a:buNone/>
                       </a:pPr>
                       <a:r>
@@ -14212,7 +14086,7 @@
                       </a:endParaRPr>
                     </a:p>
                   </a:txBody>
-                  <a:tcPr marL="91440" marR="91440" marT="45720" marB="45720" anchor="ctr">
+                  <a:tcPr anchor="ctr">
                     <a:lnL w="9525" cap="flat" cmpd="sng" algn="ctr">
                       <a:solidFill>
                         <a:srgbClr val="E2DCEC"/>
@@ -14256,7 +14130,7 @@
                     <a:bodyPr/>
                     <a:lstStyle/>
                     <a:p>
-                      <a:pPr indent="0" marL="0">
+                      <a:pPr marL="0" indent="0">
                         <a:buNone/>
                       </a:pPr>
                       <a:r>
@@ -14277,7 +14151,7 @@
                       </a:endParaRPr>
                     </a:p>
                   </a:txBody>
-                  <a:tcPr marL="91440" marR="91440" marT="45720" marB="45720" anchor="ctr">
+                  <a:tcPr anchor="ctr">
                     <a:lnL w="9525" cap="flat" cmpd="sng" algn="ctr">
                       <a:solidFill>
                         <a:srgbClr val="E2DCEC"/>
@@ -14321,7 +14195,7 @@
                     <a:bodyPr/>
                     <a:lstStyle/>
                     <a:p>
-                      <a:pPr indent="0" marL="0">
+                      <a:pPr marL="0" indent="0">
                         <a:buNone/>
                       </a:pPr>
                       <a:r>
@@ -14342,7 +14216,7 @@
                       </a:endParaRPr>
                     </a:p>
                   </a:txBody>
-                  <a:tcPr marL="91440" marR="91440" marT="45720" marB="45720" anchor="ctr">
+                  <a:tcPr anchor="ctr">
                     <a:lnL w="9525" cap="flat" cmpd="sng" algn="ctr">
                       <a:solidFill>
                         <a:srgbClr val="E2DCEC"/>
@@ -14381,6 +14255,11 @@
                     </a:lnB>
                   </a:tcPr>
                 </a:tc>
+                <a:extLst>
+                  <a:ext uri="{0D108BD9-81ED-4DB2-BD59-A6C34878D82A}">
+                    <a16:rowId xmlns:a16="http://schemas.microsoft.com/office/drawing/2014/main" val="10006"/>
+                  </a:ext>
+                </a:extLst>
               </a:tr>
             </a:tbl>
           </a:graphicData>
@@ -14412,7 +14291,7 @@
             <a:prstDash val="solid"/>
           </a:ln>
           <a:effectLst>
-            <a:outerShdw sx="100000" sy="100000" kx="0" ky="0" algn="bl" rotWithShape="0" blurRad="76200" dist="12700" dir="5400000">
+            <a:outerShdw blurRad="76200" dist="12700" dir="5400000" algn="bl" rotWithShape="0">
               <a:srgbClr val="8C7FB0">
                 <a:alpha val="16000"/>
               </a:srgbClr>
@@ -14422,7 +14301,7 @@
       </p:sp>
       <p:sp>
         <p:nvSpPr>
-          <p:cNvPr id="6" name="Text 3"/>
+          <p:cNvPr id="4" name="Text 3"/>
           <p:cNvSpPr txBox="1"/>
           <p:nvPr/>
         </p:nvSpPr>
@@ -14441,7 +14320,7 @@
           <a:bodyPr wrap="square" lIns="0" tIns="0" rIns="0" bIns="0" rtlCol="0" anchor="ctr"/>
           <a:lstStyle/>
           <a:p>
-            <a:pPr indent="0" marL="0">
+            <a:pPr marL="0" indent="0">
               <a:buNone/>
             </a:pPr>
             <a:r>
@@ -14480,7 +14359,7 @@
           <a:bodyPr wrap="square" lIns="0" tIns="0" rIns="0" bIns="0" rtlCol="0" anchor="ctr"/>
           <a:lstStyle/>
           <a:p>
-            <a:pPr indent="0" marL="0">
+            <a:pPr marL="0" indent="0">
               <a:lnSpc>
                 <a:spcPts val="1500"/>
               </a:lnSpc>
@@ -14527,7 +14406,7 @@
             <a:prstDash val="solid"/>
           </a:ln>
           <a:effectLst>
-            <a:outerShdw sx="100000" sy="100000" kx="0" ky="0" algn="bl" rotWithShape="0" blurRad="76200" dist="12700" dir="5400000">
+            <a:outerShdw blurRad="76200" dist="12700" dir="5400000" algn="bl" rotWithShape="0">
               <a:srgbClr val="8C7FB0">
                 <a:alpha val="16000"/>
               </a:srgbClr>
@@ -14556,7 +14435,7 @@
           <a:bodyPr wrap="square" lIns="0" tIns="0" rIns="0" bIns="0" rtlCol="0" anchor="ctr"/>
           <a:lstStyle/>
           <a:p>
-            <a:pPr indent="0" marL="0">
+            <a:pPr marL="0" indent="0">
               <a:buNone/>
             </a:pPr>
             <a:r>
@@ -14595,7 +14474,7 @@
           <a:bodyPr wrap="square" lIns="0" tIns="0" rIns="0" bIns="0" rtlCol="0" anchor="ctr"/>
           <a:lstStyle/>
           <a:p>
-            <a:pPr indent="0" marL="0">
+            <a:pPr marL="0" indent="0">
               <a:lnSpc>
                 <a:spcPts val="1500"/>
               </a:lnSpc>
@@ -14637,7 +14516,7 @@
           <a:bodyPr wrap="square" lIns="0" tIns="0" rIns="0" bIns="0" rtlCol="0" anchor="ctr"/>
           <a:lstStyle/>
           <a:p>
-            <a:pPr algn="r" indent="0" marL="0">
+            <a:pPr marL="0" indent="0" algn="r">
               <a:buNone/>
             </a:pPr>
             <a:r>
@@ -14671,6 +14550,7 @@
         <a:solidFill>
           <a:srgbClr val="F6F4FA"/>
         </a:solidFill>
+        <a:effectLst/>
       </p:bgPr>
     </p:bg>
     <p:spTree>
@@ -14708,11 +14588,11 @@
           <a:bodyPr wrap="square" lIns="0" tIns="0" rIns="0" bIns="0" rtlCol="0" anchor="ctr"/>
           <a:lstStyle/>
           <a:p>
-            <a:pPr indent="0" marL="0">
-              <a:buNone/>
-            </a:pPr>
-            <a:r>
-              <a:rPr lang="en-US" sz="1150" b="1" spc="160" kern="0" dirty="0">
+            <a:pPr marL="0" indent="0">
+              <a:buNone/>
+            </a:pPr>
+            <a:r>
+              <a:rPr lang="en-US" sz="1150" b="1" kern="0" spc="160" dirty="0">
                 <a:solidFill>
                   <a:srgbClr val="9A81DF"/>
                 </a:solidFill>
@@ -14747,7 +14627,7 @@
           <a:bodyPr wrap="square" lIns="0" tIns="0" rIns="0" bIns="0" rtlCol="0" anchor="ctr"/>
           <a:lstStyle/>
           <a:p>
-            <a:pPr indent="0" marL="0">
+            <a:pPr marL="0" indent="0">
               <a:buNone/>
             </a:pPr>
             <a:r>
@@ -14791,7 +14671,7 @@
             <a:prstDash val="solid"/>
           </a:ln>
           <a:effectLst>
-            <a:outerShdw sx="100000" sy="100000" kx="0" ky="0" algn="bl" rotWithShape="0" blurRad="76200" dist="12700" dir="5400000">
+            <a:outerShdw blurRad="76200" dist="12700" dir="5400000" algn="bl" rotWithShape="0">
               <a:srgbClr val="8C7FB0">
                 <a:alpha val="16000"/>
               </a:srgbClr>
@@ -14820,7 +14700,7 @@
           <a:bodyPr wrap="square" lIns="0" tIns="0" rIns="0" bIns="0" rtlCol="0" anchor="ctr"/>
           <a:lstStyle/>
           <a:p>
-            <a:pPr indent="0" marL="0">
+            <a:pPr marL="0" indent="0">
               <a:buNone/>
             </a:pPr>
             <a:r>
@@ -14859,7 +14739,7 @@
           <a:bodyPr wrap="square" lIns="0" tIns="0" rIns="0" bIns="0" rtlCol="0" anchor="ctr"/>
           <a:lstStyle/>
           <a:p>
-            <a:pPr indent="0" marL="0">
+            <a:pPr marL="0" indent="0">
               <a:buNone/>
             </a:pPr>
             <a:r>
@@ -14898,7 +14778,7 @@
           <a:bodyPr wrap="square" lIns="0" tIns="0" rIns="0" bIns="0" rtlCol="0" anchor="ctr"/>
           <a:lstStyle/>
           <a:p>
-            <a:pPr indent="0" marL="0">
+            <a:pPr marL="0" indent="0">
               <a:buNone/>
             </a:pPr>
             <a:r>
@@ -14942,7 +14822,7 @@
             <a:prstDash val="solid"/>
           </a:ln>
           <a:effectLst>
-            <a:outerShdw sx="100000" sy="100000" kx="0" ky="0" algn="bl" rotWithShape="0" blurRad="76200" dist="12700" dir="5400000">
+            <a:outerShdw blurRad="76200" dist="12700" dir="5400000" algn="bl" rotWithShape="0">
               <a:srgbClr val="8C7FB0">
                 <a:alpha val="16000"/>
               </a:srgbClr>
@@ -14971,7 +14851,7 @@
           <a:bodyPr wrap="square" lIns="0" tIns="0" rIns="0" bIns="0" rtlCol="0" anchor="ctr"/>
           <a:lstStyle/>
           <a:p>
-            <a:pPr indent="0" marL="0">
+            <a:pPr marL="0" indent="0">
               <a:buNone/>
             </a:pPr>
             <a:r>
@@ -15010,7 +14890,7 @@
           <a:bodyPr wrap="square" lIns="0" tIns="0" rIns="0" bIns="0" rtlCol="0" anchor="ctr"/>
           <a:lstStyle/>
           <a:p>
-            <a:pPr indent="0" marL="0">
+            <a:pPr marL="0" indent="0">
               <a:buNone/>
             </a:pPr>
             <a:r>
@@ -15049,7 +14929,7 @@
           <a:bodyPr wrap="square" lIns="0" tIns="0" rIns="0" bIns="0" rtlCol="0" anchor="ctr"/>
           <a:lstStyle/>
           <a:p>
-            <a:pPr indent="0" marL="0">
+            <a:pPr marL="0" indent="0">
               <a:buNone/>
             </a:pPr>
             <a:r>
@@ -15093,7 +14973,7 @@
             <a:prstDash val="solid"/>
           </a:ln>
           <a:effectLst>
-            <a:outerShdw sx="100000" sy="100000" kx="0" ky="0" algn="bl" rotWithShape="0" blurRad="76200" dist="12700" dir="5400000">
+            <a:outerShdw blurRad="76200" dist="12700" dir="5400000" algn="bl" rotWithShape="0">
               <a:srgbClr val="8C7FB0">
                 <a:alpha val="16000"/>
               </a:srgbClr>
@@ -15122,7 +15002,7 @@
           <a:bodyPr wrap="square" lIns="0" tIns="0" rIns="0" bIns="0" rtlCol="0" anchor="ctr"/>
           <a:lstStyle/>
           <a:p>
-            <a:pPr indent="0" marL="0">
+            <a:pPr marL="0" indent="0">
               <a:buNone/>
             </a:pPr>
             <a:r>
@@ -15161,7 +15041,7 @@
           <a:bodyPr wrap="square" lIns="0" tIns="0" rIns="0" bIns="0" rtlCol="0" anchor="ctr"/>
           <a:lstStyle/>
           <a:p>
-            <a:pPr indent="0" marL="0">
+            <a:pPr marL="0" indent="0">
               <a:buNone/>
             </a:pPr>
             <a:r>
@@ -15200,7 +15080,7 @@
           <a:bodyPr wrap="square" lIns="0" tIns="0" rIns="0" bIns="0" rtlCol="0" anchor="ctr"/>
           <a:lstStyle/>
           <a:p>
-            <a:pPr indent="0" marL="0">
+            <a:pPr marL="0" indent="0">
               <a:buNone/>
             </a:pPr>
             <a:r>
@@ -15244,7 +15124,7 @@
             <a:prstDash val="solid"/>
           </a:ln>
           <a:effectLst>
-            <a:outerShdw sx="100000" sy="100000" kx="0" ky="0" algn="bl" rotWithShape="0" blurRad="76200" dist="12700" dir="5400000">
+            <a:outerShdw blurRad="76200" dist="12700" dir="5400000" algn="bl" rotWithShape="0">
               <a:srgbClr val="8C7FB0">
                 <a:alpha val="16000"/>
               </a:srgbClr>
@@ -15273,7 +15153,7 @@
           <a:bodyPr wrap="square" lIns="0" tIns="0" rIns="0" bIns="0" rtlCol="0" anchor="ctr"/>
           <a:lstStyle/>
           <a:p>
-            <a:pPr indent="0" marL="0">
+            <a:pPr marL="0" indent="0">
               <a:buNone/>
             </a:pPr>
             <a:r>
@@ -15312,7 +15192,7 @@
           <a:bodyPr wrap="square" lIns="0" tIns="0" rIns="0" bIns="0" rtlCol="0" anchor="ctr"/>
           <a:lstStyle/>
           <a:p>
-            <a:pPr indent="0" marL="0">
+            <a:pPr marL="0" indent="0">
               <a:buNone/>
             </a:pPr>
             <a:r>
@@ -15351,7 +15231,7 @@
           <a:bodyPr wrap="square" lIns="0" tIns="0" rIns="0" bIns="0" rtlCol="0" anchor="ctr"/>
           <a:lstStyle/>
           <a:p>
-            <a:pPr indent="0" marL="0">
+            <a:pPr marL="0" indent="0">
               <a:buNone/>
             </a:pPr>
             <a:r>
@@ -15371,7 +15251,7 @@
       </p:sp>
       <p:graphicFrame>
         <p:nvGraphicFramePr>
-          <p:cNvPr id="20" name="Chart 0" descr=""/>
+          <p:cNvPr id="20" name="Chart 0"/>
           <p:cNvGraphicFramePr/>
           <p:nvPr/>
         </p:nvGraphicFramePr>
@@ -15379,9 +15259,9 @@
           <a:off x="566928" y="3218688"/>
           <a:ext cx="4846320" cy="2926080"/>
         </p:xfrm>
-        <a:graphic xmlns:a="http://schemas.openxmlformats.org/drawingml/2006/main">
+        <a:graphic>
           <a:graphicData uri="http://schemas.openxmlformats.org/drawingml/2006/chart">
-            <c:chart xmlns:c="http://schemas.openxmlformats.org/drawingml/2006/chart" r:id="rId1"/>
+            <c:chart xmlns:c="http://schemas.openxmlformats.org/drawingml/2006/chart" xmlns:r="http://schemas.openxmlformats.org/officeDocument/2006/relationships" r:id="rId3"/>
           </a:graphicData>
         </a:graphic>
       </p:graphicFrame>
@@ -15411,7 +15291,7 @@
             <a:prstDash val="solid"/>
           </a:ln>
           <a:effectLst>
-            <a:outerShdw sx="100000" sy="100000" kx="0" ky="0" algn="bl" rotWithShape="0" blurRad="76200" dist="12700" dir="5400000">
+            <a:outerShdw blurRad="76200" dist="12700" dir="5400000" algn="bl" rotWithShape="0">
               <a:srgbClr val="8C7FB0">
                 <a:alpha val="16000"/>
               </a:srgbClr>
@@ -15440,7 +15320,7 @@
           <a:bodyPr wrap="square" lIns="0" tIns="0" rIns="0" bIns="0" rtlCol="0" anchor="ctr"/>
           <a:lstStyle/>
           <a:p>
-            <a:pPr indent="0" marL="0">
+            <a:pPr marL="0" indent="0">
               <a:buNone/>
             </a:pPr>
             <a:r>
@@ -15597,7 +15477,7 @@
           <a:bodyPr wrap="square" lIns="0" tIns="0" rIns="0" bIns="0" rtlCol="0" anchor="ctr"/>
           <a:lstStyle/>
           <a:p>
-            <a:pPr algn="r" indent="0" marL="0">
+            <a:pPr marL="0" indent="0" algn="r">
               <a:buNone/>
             </a:pPr>
             <a:r>
@@ -15631,6 +15511,7 @@
         <a:solidFill>
           <a:srgbClr val="F6F4FA"/>
         </a:solidFill>
+        <a:effectLst/>
       </p:bgPr>
     </p:bg>
     <p:spTree>
@@ -15668,11 +15549,11 @@
           <a:bodyPr wrap="square" lIns="0" tIns="0" rIns="0" bIns="0" rtlCol="0" anchor="ctr"/>
           <a:lstStyle/>
           <a:p>
-            <a:pPr indent="0" marL="0">
-              <a:buNone/>
-            </a:pPr>
-            <a:r>
-              <a:rPr lang="en-US" sz="1150" b="1" spc="160" kern="0" dirty="0">
+            <a:pPr marL="0" indent="0">
+              <a:buNone/>
+            </a:pPr>
+            <a:r>
+              <a:rPr lang="en-US" sz="1150" b="1" kern="0" spc="160" dirty="0">
                 <a:solidFill>
                   <a:srgbClr val="9A81DF"/>
                 </a:solidFill>
@@ -15707,7 +15588,7 @@
           <a:bodyPr wrap="square" lIns="0" tIns="0" rIns="0" bIns="0" rtlCol="0" anchor="ctr"/>
           <a:lstStyle/>
           <a:p>
-            <a:pPr indent="0" marL="0">
+            <a:pPr marL="0" indent="0">
               <a:buNone/>
             </a:pPr>
             <a:r>
@@ -15727,7 +15608,7 @@
       </p:sp>
       <p:graphicFrame>
         <p:nvGraphicFramePr>
-          <p:cNvPr id="4" name="Chart 0" descr=""/>
+          <p:cNvPr id="4" name="Chart 0"/>
           <p:cNvGraphicFramePr/>
           <p:nvPr/>
         </p:nvGraphicFramePr>
@@ -15735,9 +15616,9 @@
           <a:off x="566928" y="1572768"/>
           <a:ext cx="6492240" cy="3657600"/>
         </p:xfrm>
-        <a:graphic xmlns:a="http://schemas.openxmlformats.org/drawingml/2006/main">
+        <a:graphic>
           <a:graphicData uri="http://schemas.openxmlformats.org/drawingml/2006/chart">
-            <c:chart xmlns:c="http://schemas.openxmlformats.org/drawingml/2006/chart" r:id="rId1"/>
+            <c:chart xmlns:c="http://schemas.openxmlformats.org/drawingml/2006/chart" xmlns:r="http://schemas.openxmlformats.org/officeDocument/2006/relationships" r:id="rId3"/>
           </a:graphicData>
         </a:graphic>
       </p:graphicFrame>
@@ -15767,7 +15648,7 @@
             <a:prstDash val="solid"/>
           </a:ln>
           <a:effectLst>
-            <a:outerShdw sx="100000" sy="100000" kx="0" ky="0" algn="bl" rotWithShape="0" blurRad="76200" dist="12700" dir="5400000">
+            <a:outerShdw blurRad="76200" dist="12700" dir="5400000" algn="bl" rotWithShape="0">
               <a:srgbClr val="8C7FB0">
                 <a:alpha val="16000"/>
               </a:srgbClr>
@@ -15796,7 +15677,7 @@
           <a:bodyPr wrap="square" lIns="0" tIns="0" rIns="0" bIns="0" rtlCol="0" anchor="ctr"/>
           <a:lstStyle/>
           <a:p>
-            <a:pPr indent="0" marL="0">
+            <a:pPr marL="0" indent="0">
               <a:buNone/>
             </a:pPr>
             <a:r>
@@ -15835,7 +15716,7 @@
           <a:bodyPr wrap="square" lIns="0" tIns="0" rIns="0" bIns="0" rtlCol="0" anchor="ctr"/>
           <a:lstStyle/>
           <a:p>
-            <a:pPr indent="0" marL="0">
+            <a:pPr marL="0" indent="0">
               <a:buNone/>
             </a:pPr>
             <a:r>
@@ -15874,7 +15755,7 @@
           <a:bodyPr wrap="square" lIns="0" tIns="0" rIns="0" bIns="0" rtlCol="0" anchor="ctr"/>
           <a:lstStyle/>
           <a:p>
-            <a:pPr indent="0" marL="0">
+            <a:pPr marL="0" indent="0">
               <a:lnSpc>
                 <a:spcPts val="1400"/>
               </a:lnSpc>
@@ -15921,7 +15802,7 @@
             <a:prstDash val="solid"/>
           </a:ln>
           <a:effectLst>
-            <a:outerShdw sx="100000" sy="100000" kx="0" ky="0" algn="bl" rotWithShape="0" blurRad="76200" dist="12700" dir="5400000">
+            <a:outerShdw blurRad="76200" dist="12700" dir="5400000" algn="bl" rotWithShape="0">
               <a:srgbClr val="8C7FB0">
                 <a:alpha val="16000"/>
               </a:srgbClr>
@@ -15950,7 +15831,7 @@
           <a:bodyPr wrap="square" lIns="0" tIns="0" rIns="0" bIns="0" rtlCol="0" anchor="ctr"/>
           <a:lstStyle/>
           <a:p>
-            <a:pPr indent="0" marL="0">
+            <a:pPr marL="0" indent="0">
               <a:buNone/>
             </a:pPr>
             <a:r>
@@ -16064,7 +15945,7 @@
             <a:prstDash val="solid"/>
           </a:ln>
           <a:effectLst>
-            <a:outerShdw sx="100000" sy="100000" kx="0" ky="0" algn="bl" rotWithShape="0" blurRad="76200" dist="12700" dir="5400000">
+            <a:outerShdw blurRad="76200" dist="12700" dir="5400000" algn="bl" rotWithShape="0">
               <a:srgbClr val="8C7FB0">
                 <a:alpha val="16000"/>
               </a:srgbClr>
@@ -16093,7 +15974,7 @@
           <a:bodyPr wrap="square" lIns="0" tIns="0" rIns="0" bIns="0" rtlCol="0" anchor="ctr"/>
           <a:lstStyle/>
           <a:p>
-            <a:pPr indent="0" marL="0">
+            <a:pPr marL="0" indent="0">
               <a:lnSpc>
                 <a:spcPts val="1600"/>
               </a:lnSpc>
@@ -16110,12 +15991,6 @@
               </a:rPr>
               <a:t>Independently checked.  </a:t>
             </a:r>
-            <a:pPr indent="0" marL="0">
-              <a:lnSpc>
-                <a:spcPts val="1600"/>
-              </a:lnSpc>
-              <a:buNone/>
-            </a:pPr>
             <a:r>
               <a:rPr lang="en-US" sz="1200" dirty="0">
                 <a:solidFill>
@@ -16152,7 +16027,7 @@
           <a:bodyPr wrap="square" lIns="0" tIns="0" rIns="0" bIns="0" rtlCol="0" anchor="ctr"/>
           <a:lstStyle/>
           <a:p>
-            <a:pPr algn="r" indent="0" marL="0">
+            <a:pPr marL="0" indent="0" algn="r">
               <a:buNone/>
             </a:pPr>
             <a:r>
@@ -16186,6 +16061,7 @@
         <a:solidFill>
           <a:srgbClr val="F6F4FA"/>
         </a:solidFill>
+        <a:effectLst/>
       </p:bgPr>
     </p:bg>
     <p:spTree>
@@ -16223,11 +16099,11 @@
           <a:bodyPr wrap="square" lIns="0" tIns="0" rIns="0" bIns="0" rtlCol="0" anchor="ctr"/>
           <a:lstStyle/>
           <a:p>
-            <a:pPr indent="0" marL="0">
-              <a:buNone/>
-            </a:pPr>
-            <a:r>
-              <a:rPr lang="en-US" sz="1150" b="1" spc="160" kern="0" dirty="0">
+            <a:pPr marL="0" indent="0">
+              <a:buNone/>
+            </a:pPr>
+            <a:r>
+              <a:rPr lang="en-US" sz="1150" b="1" kern="0" spc="160" dirty="0">
                 <a:solidFill>
                   <a:srgbClr val="9A81DF"/>
                 </a:solidFill>
@@ -16262,7 +16138,7 @@
           <a:bodyPr wrap="square" lIns="0" tIns="0" rIns="0" bIns="0" rtlCol="0" anchor="ctr"/>
           <a:lstStyle/>
           <a:p>
-            <a:pPr indent="0" marL="0">
+            <a:pPr marL="0" indent="0">
               <a:buNone/>
             </a:pPr>
             <a:r>
@@ -16306,7 +16182,7 @@
             <a:prstDash val="solid"/>
           </a:ln>
           <a:effectLst>
-            <a:outerShdw sx="100000" sy="100000" kx="0" ky="0" algn="bl" rotWithShape="0" blurRad="76200" dist="12700" dir="5400000">
+            <a:outerShdw blurRad="76200" dist="12700" dir="5400000" algn="bl" rotWithShape="0">
               <a:srgbClr val="8C7FB0">
                 <a:alpha val="16000"/>
               </a:srgbClr>
@@ -16360,7 +16236,7 @@
           <a:bodyPr wrap="square" lIns="0" tIns="0" rIns="0" bIns="0" rtlCol="0" anchor="ctr"/>
           <a:lstStyle/>
           <a:p>
-            <a:pPr algn="ctr" indent="0" marL="0">
+            <a:pPr marL="0" indent="0" algn="ctr">
               <a:buNone/>
             </a:pPr>
             <a:r>
@@ -16399,7 +16275,7 @@
           <a:bodyPr wrap="square" lIns="0" tIns="0" rIns="0" bIns="0" rtlCol="0" anchor="ctr"/>
           <a:lstStyle/>
           <a:p>
-            <a:pPr indent="0" marL="0">
+            <a:pPr marL="0" indent="0">
               <a:buNone/>
             </a:pPr>
             <a:r>
@@ -16438,7 +16314,7 @@
           <a:bodyPr wrap="square" lIns="0" tIns="0" rIns="0" bIns="0" rtlCol="0" anchor="ctr"/>
           <a:lstStyle/>
           <a:p>
-            <a:pPr indent="0" marL="0">
+            <a:pPr marL="0" indent="0">
               <a:buNone/>
             </a:pPr>
             <a:r>
@@ -16504,7 +16380,7 @@
           <a:bodyPr wrap="square" lIns="0" tIns="0" rIns="0" bIns="0" rtlCol="0" anchor="ctr"/>
           <a:lstStyle/>
           <a:p>
-            <a:pPr indent="0" marL="0">
+            <a:pPr marL="0" indent="0">
               <a:lnSpc>
                 <a:spcPts val="1500"/>
               </a:lnSpc>
@@ -16524,7 +16400,7 @@
             <a:endParaRPr lang="en-US" sz="1050" dirty="0"/>
           </a:p>
           <a:p>
-            <a:pPr indent="0" marL="0">
+            <a:pPr marL="0" indent="0">
               <a:lnSpc>
                 <a:spcPts val="1500"/>
               </a:lnSpc>
@@ -16566,7 +16442,7 @@
           <a:bodyPr wrap="square" lIns="0" tIns="0" rIns="0" bIns="0" rtlCol="0" anchor="ctr"/>
           <a:lstStyle/>
           <a:p>
-            <a:pPr indent="0" marL="0">
+            <a:pPr marL="0" indent="0">
               <a:buNone/>
             </a:pPr>
             <a:r>
@@ -16610,7 +16486,7 @@
             <a:prstDash val="solid"/>
           </a:ln>
           <a:effectLst>
-            <a:outerShdw sx="100000" sy="100000" kx="0" ky="0" algn="bl" rotWithShape="0" blurRad="76200" dist="12700" dir="5400000">
+            <a:outerShdw blurRad="76200" dist="12700" dir="5400000" algn="bl" rotWithShape="0">
               <a:srgbClr val="8C7FB0">
                 <a:alpha val="16000"/>
               </a:srgbClr>
@@ -16664,7 +16540,7 @@
           <a:bodyPr wrap="square" lIns="0" tIns="0" rIns="0" bIns="0" rtlCol="0" anchor="ctr"/>
           <a:lstStyle/>
           <a:p>
-            <a:pPr algn="ctr" indent="0" marL="0">
+            <a:pPr marL="0" indent="0" algn="ctr">
               <a:buNone/>
             </a:pPr>
             <a:r>
@@ -16703,7 +16579,7 @@
           <a:bodyPr wrap="square" lIns="0" tIns="0" rIns="0" bIns="0" rtlCol="0" anchor="ctr"/>
           <a:lstStyle/>
           <a:p>
-            <a:pPr indent="0" marL="0">
+            <a:pPr marL="0" indent="0">
               <a:buNone/>
             </a:pPr>
             <a:r>
@@ -16723,7 +16599,7 @@
       </p:sp>
       <p:graphicFrame>
         <p:nvGraphicFramePr>
-          <p:cNvPr id="9" name="Table 0"/>
+          <p:cNvPr id="16" name="Table 0"/>
           <p:cNvGraphicFramePr>
             <a:graphicFrameLocks noGrp="1"/>
           </p:cNvGraphicFramePr>
@@ -16737,16 +16613,34 @@
         </p:nvGraphicFramePr>
         <p:xfrm>
           <a:off x="6428232" y="2212848"/>
-          <a:ext cx="4992624" cy="914400"/>
+          <a:ext cx="4992624" cy="987552"/>
         </p:xfrm>
         <a:graphic>
           <a:graphicData uri="http://schemas.openxmlformats.org/drawingml/2006/table">
             <a:tbl>
               <a:tblPr/>
               <a:tblGrid>
-                <a:gridCol w="1883664"/>
-                <a:gridCol w="1188720"/>
-                <a:gridCol w="1920240"/>
+                <a:gridCol w="1883664">
+                  <a:extLst>
+                    <a:ext uri="{9D8B030D-6E8A-4147-A177-3AD203B41FA5}">
+                      <a16:colId xmlns:a16="http://schemas.microsoft.com/office/drawing/2014/main" val="20000"/>
+                    </a:ext>
+                  </a:extLst>
+                </a:gridCol>
+                <a:gridCol w="1188720">
+                  <a:extLst>
+                    <a:ext uri="{9D8B030D-6E8A-4147-A177-3AD203B41FA5}">
+                      <a16:colId xmlns:a16="http://schemas.microsoft.com/office/drawing/2014/main" val="20001"/>
+                    </a:ext>
+                  </a:extLst>
+                </a:gridCol>
+                <a:gridCol w="1920240">
+                  <a:extLst>
+                    <a:ext uri="{9D8B030D-6E8A-4147-A177-3AD203B41FA5}">
+                      <a16:colId xmlns:a16="http://schemas.microsoft.com/office/drawing/2014/main" val="20002"/>
+                    </a:ext>
+                  </a:extLst>
+                </a:gridCol>
               </a:tblGrid>
               <a:tr h="329184">
                 <a:tc>
@@ -16754,7 +16648,7 @@
                     <a:bodyPr/>
                     <a:lstStyle/>
                     <a:p>
-                      <a:pPr indent="0" marL="0">
+                      <a:pPr marL="0" indent="0">
                         <a:buNone/>
                       </a:pPr>
                       <a:r>
@@ -16775,7 +16669,7 @@
                       </a:endParaRPr>
                     </a:p>
                   </a:txBody>
-                  <a:tcPr marL="91440" marR="91440" marT="45720" marB="45720" anchor="ctr">
+                  <a:tcPr anchor="ctr">
                     <a:lnL w="9525" cap="flat" cmpd="sng" algn="ctr">
                       <a:solidFill>
                         <a:srgbClr val="E2DCEC"/>
@@ -16822,7 +16716,7 @@
                     <a:bodyPr/>
                     <a:lstStyle/>
                     <a:p>
-                      <a:pPr indent="0" marL="0">
+                      <a:pPr marL="0" indent="0">
                         <a:buNone/>
                       </a:pPr>
                       <a:r>
@@ -16843,7 +16737,7 @@
                       </a:endParaRPr>
                     </a:p>
                   </a:txBody>
-                  <a:tcPr marL="91440" marR="91440" marT="45720" marB="45720" anchor="ctr">
+                  <a:tcPr anchor="ctr">
                     <a:lnL w="9525" cap="flat" cmpd="sng" algn="ctr">
                       <a:solidFill>
                         <a:srgbClr val="E2DCEC"/>
@@ -16890,7 +16784,7 @@
                     <a:bodyPr/>
                     <a:lstStyle/>
                     <a:p>
-                      <a:pPr indent="0" marL="0">
+                      <a:pPr marL="0" indent="0">
                         <a:buNone/>
                       </a:pPr>
                       <a:r>
@@ -16911,7 +16805,7 @@
                       </a:endParaRPr>
                     </a:p>
                   </a:txBody>
-                  <a:tcPr marL="91440" marR="91440" marT="45720" marB="45720" anchor="ctr">
+                  <a:tcPr anchor="ctr">
                     <a:lnL w="9525" cap="flat" cmpd="sng" algn="ctr">
                       <a:solidFill>
                         <a:srgbClr val="E2DCEC"/>
@@ -16953,6 +16847,11 @@
                     </a:solidFill>
                   </a:tcPr>
                 </a:tc>
+                <a:extLst>
+                  <a:ext uri="{0D108BD9-81ED-4DB2-BD59-A6C34878D82A}">
+                    <a16:rowId xmlns:a16="http://schemas.microsoft.com/office/drawing/2014/main" val="10000"/>
+                  </a:ext>
+                </a:extLst>
               </a:tr>
               <a:tr h="329184">
                 <a:tc>
@@ -16960,7 +16859,7 @@
                     <a:bodyPr/>
                     <a:lstStyle/>
                     <a:p>
-                      <a:pPr indent="0" marL="0">
+                      <a:pPr marL="0" indent="0">
                         <a:buNone/>
                       </a:pPr>
                       <a:r>
@@ -16981,7 +16880,7 @@
                       </a:endParaRPr>
                     </a:p>
                   </a:txBody>
-                  <a:tcPr marL="91440" marR="91440" marT="45720" marB="45720" anchor="ctr">
+                  <a:tcPr anchor="ctr">
                     <a:lnL w="9525" cap="flat" cmpd="sng" algn="ctr">
                       <a:solidFill>
                         <a:srgbClr val="E2DCEC"/>
@@ -17025,7 +16924,7 @@
                     <a:bodyPr/>
                     <a:lstStyle/>
                     <a:p>
-                      <a:pPr indent="0" marL="0">
+                      <a:pPr marL="0" indent="0">
                         <a:buNone/>
                       </a:pPr>
                       <a:r>
@@ -17046,7 +16945,7 @@
                       </a:endParaRPr>
                     </a:p>
                   </a:txBody>
-                  <a:tcPr marL="91440" marR="91440" marT="45720" marB="45720" anchor="ctr">
+                  <a:tcPr anchor="ctr">
                     <a:lnL w="9525" cap="flat" cmpd="sng" algn="ctr">
                       <a:solidFill>
                         <a:srgbClr val="E2DCEC"/>
@@ -17090,7 +16989,7 @@
                     <a:bodyPr/>
                     <a:lstStyle/>
                     <a:p>
-                      <a:pPr indent="0" marL="0">
+                      <a:pPr marL="0" indent="0">
                         <a:buNone/>
                       </a:pPr>
                       <a:r>
@@ -17111,7 +17010,7 @@
                       </a:endParaRPr>
                     </a:p>
                   </a:txBody>
-                  <a:tcPr marL="91440" marR="91440" marT="45720" marB="45720" anchor="ctr">
+                  <a:tcPr anchor="ctr">
                     <a:lnL w="9525" cap="flat" cmpd="sng" algn="ctr">
                       <a:solidFill>
                         <a:srgbClr val="E2DCEC"/>
@@ -17150,6 +17049,11 @@
                     </a:lnB>
                   </a:tcPr>
                 </a:tc>
+                <a:extLst>
+                  <a:ext uri="{0D108BD9-81ED-4DB2-BD59-A6C34878D82A}">
+                    <a16:rowId xmlns:a16="http://schemas.microsoft.com/office/drawing/2014/main" val="10001"/>
+                  </a:ext>
+                </a:extLst>
               </a:tr>
               <a:tr h="329184">
                 <a:tc>
@@ -17157,7 +17061,7 @@
                     <a:bodyPr/>
                     <a:lstStyle/>
                     <a:p>
-                      <a:pPr indent="0" marL="0">
+                      <a:pPr marL="0" indent="0">
                         <a:buNone/>
                       </a:pPr>
                       <a:r>
@@ -17178,7 +17082,7 @@
                       </a:endParaRPr>
                     </a:p>
                   </a:txBody>
-                  <a:tcPr marL="91440" marR="91440" marT="45720" marB="45720" anchor="ctr">
+                  <a:tcPr anchor="ctr">
                     <a:lnL w="9525" cap="flat" cmpd="sng" algn="ctr">
                       <a:solidFill>
                         <a:srgbClr val="E2DCEC"/>
@@ -17222,7 +17126,7 @@
                     <a:bodyPr/>
                     <a:lstStyle/>
                     <a:p>
-                      <a:pPr indent="0" marL="0">
+                      <a:pPr marL="0" indent="0">
                         <a:buNone/>
                       </a:pPr>
                       <a:r>
@@ -17243,7 +17147,7 @@
                       </a:endParaRPr>
                     </a:p>
                   </a:txBody>
-                  <a:tcPr marL="91440" marR="91440" marT="45720" marB="45720" anchor="ctr">
+                  <a:tcPr anchor="ctr">
                     <a:lnL w="9525" cap="flat" cmpd="sng" algn="ctr">
                       <a:solidFill>
                         <a:srgbClr val="E2DCEC"/>
@@ -17287,7 +17191,7 @@
                     <a:bodyPr/>
                     <a:lstStyle/>
                     <a:p>
-                      <a:pPr indent="0" marL="0">
+                      <a:pPr marL="0" indent="0">
                         <a:buNone/>
                       </a:pPr>
                       <a:r>
@@ -17308,7 +17212,7 @@
                       </a:endParaRPr>
                     </a:p>
                   </a:txBody>
-                  <a:tcPr marL="91440" marR="91440" marT="45720" marB="45720" anchor="ctr">
+                  <a:tcPr anchor="ctr">
                     <a:lnL w="9525" cap="flat" cmpd="sng" algn="ctr">
                       <a:solidFill>
                         <a:srgbClr val="E2DCEC"/>
@@ -17347,6 +17251,11 @@
                     </a:lnB>
                   </a:tcPr>
                 </a:tc>
+                <a:extLst>
+                  <a:ext uri="{0D108BD9-81ED-4DB2-BD59-A6C34878D82A}">
+                    <a16:rowId xmlns:a16="http://schemas.microsoft.com/office/drawing/2014/main" val="10002"/>
+                  </a:ext>
+                </a:extLst>
               </a:tr>
             </a:tbl>
           </a:graphicData>
@@ -17373,7 +17282,7 @@
           <a:bodyPr wrap="square" lIns="0" tIns="0" rIns="0" bIns="0" rtlCol="0" anchor="ctr"/>
           <a:lstStyle/>
           <a:p>
-            <a:pPr indent="0" marL="0">
+            <a:pPr marL="0" indent="0">
               <a:lnSpc>
                 <a:spcPts val="1400"/>
               </a:lnSpc>
@@ -17420,7 +17329,7 @@
             <a:prstDash val="solid"/>
           </a:ln>
           <a:effectLst>
-            <a:outerShdw sx="100000" sy="100000" kx="0" ky="0" algn="bl" rotWithShape="0" blurRad="76200" dist="12700" dir="5400000">
+            <a:outerShdw blurRad="76200" dist="12700" dir="5400000" algn="bl" rotWithShape="0">
               <a:srgbClr val="8C7FB0">
                 <a:alpha val="16000"/>
               </a:srgbClr>
@@ -17449,7 +17358,7 @@
           <a:bodyPr wrap="square" lIns="0" tIns="0" rIns="0" bIns="0" rtlCol="0" anchor="ctr"/>
           <a:lstStyle/>
           <a:p>
-            <a:pPr indent="0" marL="0">
+            <a:pPr marL="0" indent="0">
               <a:buNone/>
             </a:pPr>
             <a:r>
@@ -17488,7 +17397,7 @@
           <a:bodyPr wrap="square" lIns="0" tIns="0" rIns="0" bIns="0" rtlCol="0" anchor="ctr"/>
           <a:lstStyle/>
           <a:p>
-            <a:pPr indent="0" marL="0">
+            <a:pPr marL="0" indent="0">
               <a:buNone/>
             </a:pPr>
             <a:r>
@@ -17527,7 +17436,7 @@
           <a:bodyPr wrap="square" lIns="0" tIns="0" rIns="0" bIns="0" rtlCol="0" anchor="ctr"/>
           <a:lstStyle/>
           <a:p>
-            <a:pPr indent="0" marL="0">
+            <a:pPr marL="0" indent="0">
               <a:buNone/>
             </a:pPr>
             <a:r>
@@ -17566,7 +17475,7 @@
           <a:bodyPr wrap="square" lIns="0" tIns="0" rIns="0" bIns="0" rtlCol="0" anchor="ctr"/>
           <a:lstStyle/>
           <a:p>
-            <a:pPr indent="0" marL="0">
+            <a:pPr marL="0" indent="0">
               <a:lnSpc>
                 <a:spcPts val="1300"/>
               </a:lnSpc>
@@ -17608,7 +17517,7 @@
           <a:bodyPr wrap="square" lIns="0" tIns="0" rIns="0" bIns="0" rtlCol="0" anchor="ctr"/>
           <a:lstStyle/>
           <a:p>
-            <a:pPr indent="0" marL="0">
+            <a:pPr marL="0" indent="0">
               <a:buNone/>
             </a:pPr>
             <a:r>
@@ -17647,7 +17556,7 @@
           <a:bodyPr wrap="square" lIns="0" tIns="0" rIns="0" bIns="0" rtlCol="0" anchor="ctr"/>
           <a:lstStyle/>
           <a:p>
-            <a:pPr indent="0" marL="0">
+            <a:pPr marL="0" indent="0">
               <a:lnSpc>
                 <a:spcPts val="1300"/>
               </a:lnSpc>
@@ -17689,7 +17598,7 @@
           <a:bodyPr wrap="square" lIns="0" tIns="0" rIns="0" bIns="0" rtlCol="0" anchor="ctr"/>
           <a:lstStyle/>
           <a:p>
-            <a:pPr indent="0" marL="0">
+            <a:pPr marL="0" indent="0">
               <a:buNone/>
             </a:pPr>
             <a:r>
@@ -17728,7 +17637,7 @@
           <a:bodyPr wrap="square" lIns="0" tIns="0" rIns="0" bIns="0" rtlCol="0" anchor="ctr"/>
           <a:lstStyle/>
           <a:p>
-            <a:pPr indent="0" marL="0">
+            <a:pPr marL="0" indent="0">
               <a:lnSpc>
                 <a:spcPts val="1300"/>
               </a:lnSpc>
@@ -17770,7 +17679,7 @@
           <a:bodyPr wrap="square" lIns="0" tIns="0" rIns="0" bIns="0" rtlCol="0" anchor="ctr"/>
           <a:lstStyle/>
           <a:p>
-            <a:pPr indent="0" marL="0">
+            <a:pPr marL="0" indent="0">
               <a:buNone/>
             </a:pPr>
             <a:r>
@@ -17809,7 +17718,7 @@
           <a:bodyPr wrap="square" lIns="0" tIns="0" rIns="0" bIns="0" rtlCol="0" anchor="ctr"/>
           <a:lstStyle/>
           <a:p>
-            <a:pPr indent="0" marL="0">
+            <a:pPr marL="0" indent="0">
               <a:lnSpc>
                 <a:spcPts val="1300"/>
               </a:lnSpc>
@@ -17851,7 +17760,7 @@
           <a:bodyPr wrap="square" lIns="0" tIns="0" rIns="0" bIns="0" rtlCol="0" anchor="ctr"/>
           <a:lstStyle/>
           <a:p>
-            <a:pPr indent="0" marL="0">
+            <a:pPr marL="0" indent="0">
               <a:buNone/>
             </a:pPr>
             <a:r>
@@ -17890,7 +17799,7 @@
           <a:bodyPr wrap="square" lIns="0" tIns="0" rIns="0" bIns="0" rtlCol="0" anchor="ctr"/>
           <a:lstStyle/>
           <a:p>
-            <a:pPr indent="0" marL="0">
+            <a:pPr marL="0" indent="0">
               <a:lnSpc>
                 <a:spcPts val="1300"/>
               </a:lnSpc>
@@ -17932,7 +17841,7 @@
           <a:bodyPr wrap="square" lIns="0" tIns="0" rIns="0" bIns="0" rtlCol="0" anchor="ctr"/>
           <a:lstStyle/>
           <a:p>
-            <a:pPr indent="0" marL="0">
+            <a:pPr marL="0" indent="0">
               <a:buNone/>
             </a:pPr>
             <a:r>
@@ -17971,7 +17880,7 @@
           <a:bodyPr wrap="square" lIns="0" tIns="0" rIns="0" bIns="0" rtlCol="0" anchor="ctr"/>
           <a:lstStyle/>
           <a:p>
-            <a:pPr indent="0" marL="0">
+            <a:pPr marL="0" indent="0">
               <a:lnSpc>
                 <a:spcPts val="1300"/>
               </a:lnSpc>
@@ -18013,7 +17922,7 @@
           <a:bodyPr wrap="square" lIns="0" tIns="0" rIns="0" bIns="0" rtlCol="0" anchor="ctr"/>
           <a:lstStyle/>
           <a:p>
-            <a:pPr algn="r" indent="0" marL="0">
+            <a:pPr marL="0" indent="0" algn="r">
               <a:buNone/>
             </a:pPr>
             <a:r>
@@ -18047,6 +17956,7 @@
         <a:solidFill>
           <a:srgbClr val="F6F4FA"/>
         </a:solidFill>
+        <a:effectLst/>
       </p:bgPr>
     </p:bg>
     <p:spTree>
@@ -18084,11 +17994,11 @@
           <a:bodyPr wrap="square" lIns="0" tIns="0" rIns="0" bIns="0" rtlCol="0" anchor="ctr"/>
           <a:lstStyle/>
           <a:p>
-            <a:pPr indent="0" marL="0">
-              <a:buNone/>
-            </a:pPr>
-            <a:r>
-              <a:rPr lang="en-US" sz="1150" b="1" spc="160" kern="0" dirty="0">
+            <a:pPr marL="0" indent="0">
+              <a:buNone/>
+            </a:pPr>
+            <a:r>
+              <a:rPr lang="en-US" sz="1150" b="1" kern="0" spc="160" dirty="0">
                 <a:solidFill>
                   <a:srgbClr val="9A81DF"/>
                 </a:solidFill>
@@ -18123,7 +18033,7 @@
           <a:bodyPr wrap="square" lIns="0" tIns="0" rIns="0" bIns="0" rtlCol="0" anchor="ctr"/>
           <a:lstStyle/>
           <a:p>
-            <a:pPr indent="0" marL="0">
+            <a:pPr marL="0" indent="0">
               <a:buNone/>
             </a:pPr>
             <a:r>
@@ -18167,7 +18077,7 @@
             <a:prstDash val="solid"/>
           </a:ln>
           <a:effectLst>
-            <a:outerShdw sx="100000" sy="100000" kx="0" ky="0" algn="bl" rotWithShape="0" blurRad="76200" dist="12700" dir="5400000">
+            <a:outerShdw blurRad="76200" dist="12700" dir="5400000" algn="bl" rotWithShape="0">
               <a:srgbClr val="8C7FB0">
                 <a:alpha val="16000"/>
               </a:srgbClr>
@@ -18221,7 +18131,7 @@
           <a:bodyPr wrap="square" lIns="0" tIns="0" rIns="0" bIns="0" rtlCol="0" anchor="ctr"/>
           <a:lstStyle/>
           <a:p>
-            <a:pPr algn="ctr" indent="0" marL="0">
+            <a:pPr marL="0" indent="0" algn="ctr">
               <a:buNone/>
             </a:pPr>
             <a:r>
@@ -18260,7 +18170,7 @@
           <a:bodyPr wrap="square" lIns="0" tIns="0" rIns="0" bIns="0" rtlCol="0" anchor="ctr"/>
           <a:lstStyle/>
           <a:p>
-            <a:pPr indent="0" marL="0">
+            <a:pPr marL="0" indent="0">
               <a:buNone/>
             </a:pPr>
             <a:r>
@@ -18299,7 +18209,7 @@
           <a:bodyPr wrap="square" lIns="0" tIns="0" rIns="0" bIns="0" rtlCol="0" anchor="ctr"/>
           <a:lstStyle/>
           <a:p>
-            <a:pPr indent="0" marL="0">
+            <a:pPr marL="0" indent="0">
               <a:lnSpc>
                 <a:spcPts val="1500"/>
               </a:lnSpc>
@@ -18346,7 +18256,7 @@
             <a:prstDash val="solid"/>
           </a:ln>
           <a:effectLst>
-            <a:outerShdw sx="100000" sy="100000" kx="0" ky="0" algn="bl" rotWithShape="0" blurRad="76200" dist="12700" dir="5400000">
+            <a:outerShdw blurRad="76200" dist="12700" dir="5400000" algn="bl" rotWithShape="0">
               <a:srgbClr val="8C7FB0">
                 <a:alpha val="16000"/>
               </a:srgbClr>
@@ -18400,7 +18310,7 @@
           <a:bodyPr wrap="square" lIns="0" tIns="0" rIns="0" bIns="0" rtlCol="0" anchor="ctr"/>
           <a:lstStyle/>
           <a:p>
-            <a:pPr algn="ctr" indent="0" marL="0">
+            <a:pPr marL="0" indent="0" algn="ctr">
               <a:buNone/>
             </a:pPr>
             <a:r>
@@ -18439,7 +18349,7 @@
           <a:bodyPr wrap="square" lIns="0" tIns="0" rIns="0" bIns="0" rtlCol="0" anchor="ctr"/>
           <a:lstStyle/>
           <a:p>
-            <a:pPr indent="0" marL="0">
+            <a:pPr marL="0" indent="0">
               <a:buNone/>
             </a:pPr>
             <a:r>
@@ -18478,7 +18388,7 @@
           <a:bodyPr wrap="square" lIns="0" tIns="0" rIns="0" bIns="0" rtlCol="0" anchor="ctr"/>
           <a:lstStyle/>
           <a:p>
-            <a:pPr indent="0" marL="0">
+            <a:pPr marL="0" indent="0">
               <a:lnSpc>
                 <a:spcPts val="1500"/>
               </a:lnSpc>
@@ -18525,7 +18435,7 @@
             <a:prstDash val="solid"/>
           </a:ln>
           <a:effectLst>
-            <a:outerShdw sx="100000" sy="100000" kx="0" ky="0" algn="bl" rotWithShape="0" blurRad="76200" dist="12700" dir="5400000">
+            <a:outerShdw blurRad="76200" dist="12700" dir="5400000" algn="bl" rotWithShape="0">
               <a:srgbClr val="8C7FB0">
                 <a:alpha val="16000"/>
               </a:srgbClr>
@@ -18579,7 +18489,7 @@
           <a:bodyPr wrap="square" lIns="0" tIns="0" rIns="0" bIns="0" rtlCol="0" anchor="ctr"/>
           <a:lstStyle/>
           <a:p>
-            <a:pPr algn="ctr" indent="0" marL="0">
+            <a:pPr marL="0" indent="0" algn="ctr">
               <a:buNone/>
             </a:pPr>
             <a:r>
@@ -18618,7 +18528,7 @@
           <a:bodyPr wrap="square" lIns="0" tIns="0" rIns="0" bIns="0" rtlCol="0" anchor="ctr"/>
           <a:lstStyle/>
           <a:p>
-            <a:pPr indent="0" marL="0">
+            <a:pPr marL="0" indent="0">
               <a:buNone/>
             </a:pPr>
             <a:r>
@@ -18657,7 +18567,7 @@
           <a:bodyPr wrap="square" lIns="0" tIns="0" rIns="0" bIns="0" rtlCol="0" anchor="ctr"/>
           <a:lstStyle/>
           <a:p>
-            <a:pPr indent="0" marL="0">
+            <a:pPr marL="0" indent="0">
               <a:lnSpc>
                 <a:spcPts val="1500"/>
               </a:lnSpc>
@@ -18704,7 +18614,7 @@
             <a:prstDash val="solid"/>
           </a:ln>
           <a:effectLst>
-            <a:outerShdw sx="100000" sy="100000" kx="0" ky="0" algn="bl" rotWithShape="0" blurRad="76200" dist="12700" dir="5400000">
+            <a:outerShdw blurRad="76200" dist="12700" dir="5400000" algn="bl" rotWithShape="0">
               <a:srgbClr val="8C7FB0">
                 <a:alpha val="16000"/>
               </a:srgbClr>
@@ -18758,7 +18668,7 @@
           <a:bodyPr wrap="square" lIns="0" tIns="0" rIns="0" bIns="0" rtlCol="0" anchor="ctr"/>
           <a:lstStyle/>
           <a:p>
-            <a:pPr algn="ctr" indent="0" marL="0">
+            <a:pPr marL="0" indent="0" algn="ctr">
               <a:buNone/>
             </a:pPr>
             <a:r>
@@ -18797,7 +18707,7 @@
           <a:bodyPr wrap="square" lIns="0" tIns="0" rIns="0" bIns="0" rtlCol="0" anchor="ctr"/>
           <a:lstStyle/>
           <a:p>
-            <a:pPr indent="0" marL="0">
+            <a:pPr marL="0" indent="0">
               <a:buNone/>
             </a:pPr>
             <a:r>
@@ -18836,7 +18746,7 @@
           <a:bodyPr wrap="square" lIns="0" tIns="0" rIns="0" bIns="0" rtlCol="0" anchor="ctr"/>
           <a:lstStyle/>
           <a:p>
-            <a:pPr indent="0" marL="0">
+            <a:pPr marL="0" indent="0">
               <a:lnSpc>
                 <a:spcPts val="1500"/>
               </a:lnSpc>
@@ -18905,7 +18815,7 @@
           <a:bodyPr wrap="square" lIns="0" tIns="0" rIns="0" bIns="0" rtlCol="0" anchor="ctr"/>
           <a:lstStyle/>
           <a:p>
-            <a:pPr indent="0" marL="0">
+            <a:pPr marL="0" indent="0">
               <a:buNone/>
             </a:pPr>
             <a:r>
@@ -18944,7 +18854,7 @@
           <a:bodyPr wrap="square" lIns="0" tIns="0" rIns="0" bIns="0" rtlCol="0" anchor="ctr"/>
           <a:lstStyle/>
           <a:p>
-            <a:pPr indent="0" marL="0">
+            <a:pPr marL="0" indent="0">
               <a:lnSpc>
                 <a:spcPts val="1700"/>
               </a:lnSpc>
@@ -18991,7 +18901,7 @@
             <a:prstDash val="solid"/>
           </a:ln>
           <a:effectLst>
-            <a:outerShdw sx="100000" sy="100000" kx="0" ky="0" algn="bl" rotWithShape="0" blurRad="76200" dist="12700" dir="5400000">
+            <a:outerShdw blurRad="76200" dist="12700" dir="5400000" algn="bl" rotWithShape="0">
               <a:srgbClr val="8C7FB0">
                 <a:alpha val="16000"/>
               </a:srgbClr>
@@ -19020,7 +18930,7 @@
           <a:bodyPr wrap="square" lIns="0" tIns="0" rIns="0" bIns="0" rtlCol="0" anchor="ctr"/>
           <a:lstStyle/>
           <a:p>
-            <a:pPr indent="0" marL="0">
+            <a:pPr marL="0" indent="0">
               <a:lnSpc>
                 <a:spcPts val="1600"/>
               </a:lnSpc>
@@ -19037,12 +18947,6 @@
               </a:rPr>
               <a:t>Safe when nobody is watching.  </a:t>
             </a:r>
-            <a:pPr indent="0" marL="0">
-              <a:lnSpc>
-                <a:spcPts val="1600"/>
-              </a:lnSpc>
-              <a:buNone/>
-            </a:pPr>
             <a:r>
               <a:rPr lang="en-US" sz="1200" dirty="0">
                 <a:solidFill>
@@ -19079,7 +18983,7 @@
           <a:bodyPr wrap="square" lIns="0" tIns="0" rIns="0" bIns="0" rtlCol="0" anchor="ctr"/>
           <a:lstStyle/>
           <a:p>
-            <a:pPr algn="r" indent="0" marL="0">
+            <a:pPr marL="0" indent="0" algn="r">
               <a:buNone/>
             </a:pPr>
             <a:r>
@@ -19398,4 +19302,299 @@
     </a:ext>
   </a:extLst>
 </a:theme>
+</file>
+
+<file path=ppt/theme/theme2.xml><?xml version="1.0" encoding="utf-8"?>
+<a:theme xmlns:a="http://schemas.openxmlformats.org/drawingml/2006/main" name="Office Theme">
+  <a:themeElements>
+    <a:clrScheme name="Office">
+      <a:dk1>
+        <a:sysClr val="windowText" lastClr="000000"/>
+      </a:dk1>
+      <a:lt1>
+        <a:sysClr val="window" lastClr="FFFFFF"/>
+      </a:lt1>
+      <a:dk2>
+        <a:srgbClr val="44546A"/>
+      </a:dk2>
+      <a:lt2>
+        <a:srgbClr val="E7E6E6"/>
+      </a:lt2>
+      <a:accent1>
+        <a:srgbClr val="4472C4"/>
+      </a:accent1>
+      <a:accent2>
+        <a:srgbClr val="ED7D31"/>
+      </a:accent2>
+      <a:accent3>
+        <a:srgbClr val="A5A5A5"/>
+      </a:accent3>
+      <a:accent4>
+        <a:srgbClr val="FFC000"/>
+      </a:accent4>
+      <a:accent5>
+        <a:srgbClr val="5B9BD5"/>
+      </a:accent5>
+      <a:accent6>
+        <a:srgbClr val="70AD47"/>
+      </a:accent6>
+      <a:hlink>
+        <a:srgbClr val="0563C1"/>
+      </a:hlink>
+      <a:folHlink>
+        <a:srgbClr val="954F72"/>
+      </a:folHlink>
+    </a:clrScheme>
+    <a:fontScheme name="Office">
+      <a:majorFont>
+        <a:latin typeface="Calibri Light" panose="020F0302020204030204"/>
+        <a:ea typeface=""/>
+        <a:cs typeface=""/>
+        <a:font script="Jpan" typeface="游ゴシック Light"/>
+        <a:font script="Hang" typeface="맑은 고딕"/>
+        <a:font script="Hans" typeface="等线 Light"/>
+        <a:font script="Hant" typeface="新細明體"/>
+        <a:font script="Arab" typeface="Times New Roman"/>
+        <a:font script="Hebr" typeface="Times New Roman"/>
+        <a:font script="Thai" typeface="Angsana New"/>
+        <a:font script="Ethi" typeface="Nyala"/>
+        <a:font script="Beng" typeface="Vrinda"/>
+        <a:font script="Gujr" typeface="Shruti"/>
+        <a:font script="Khmr" typeface="MoolBoran"/>
+        <a:font script="Knda" typeface="Tunga"/>
+        <a:font script="Guru" typeface="Raavi"/>
+        <a:font script="Cans" typeface="Euphemia"/>
+        <a:font script="Cher" typeface="Plantagenet Cherokee"/>
+        <a:font script="Yiii" typeface="Microsoft Yi Baiti"/>
+        <a:font script="Tibt" typeface="Microsoft Himalaya"/>
+        <a:font script="Thaa" typeface="MV Boli"/>
+        <a:font script="Deva" typeface="Mangal"/>
+        <a:font script="Telu" typeface="Gautami"/>
+        <a:font script="Taml" typeface="Latha"/>
+        <a:font script="Syrc" typeface="Estrangelo Edessa"/>
+        <a:font script="Orya" typeface="Kalinga"/>
+        <a:font script="Mlym" typeface="Kartika"/>
+        <a:font script="Laoo" typeface="DokChampa"/>
+        <a:font script="Sinh" typeface="Iskoola Pota"/>
+        <a:font script="Mong" typeface="Mongolian Baiti"/>
+        <a:font script="Viet" typeface="Times New Roman"/>
+        <a:font script="Uigh" typeface="Microsoft Uighur"/>
+        <a:font script="Geor" typeface="Sylfaen"/>
+        <a:font script="Armn" typeface="Arial"/>
+        <a:font script="Bugi" typeface="Leelawadee UI"/>
+        <a:font script="Bopo" typeface="Microsoft JhengHei"/>
+        <a:font script="Java" typeface="Javanese Text"/>
+        <a:font script="Lisu" typeface="Segoe UI"/>
+        <a:font script="Mymr" typeface="Myanmar Text"/>
+        <a:font script="Nkoo" typeface="Ebrima"/>
+        <a:font script="Olck" typeface="Nirmala UI"/>
+        <a:font script="Osma" typeface="Ebrima"/>
+        <a:font script="Phag" typeface="Phagspa"/>
+        <a:font script="Syrn" typeface="Estrangelo Edessa"/>
+        <a:font script="Syrj" typeface="Estrangelo Edessa"/>
+        <a:font script="Syre" typeface="Estrangelo Edessa"/>
+        <a:font script="Sora" typeface="Nirmala UI"/>
+        <a:font script="Tale" typeface="Microsoft Tai Le"/>
+        <a:font script="Talu" typeface="Microsoft New Tai Lue"/>
+        <a:font script="Tfng" typeface="Ebrima"/>
+      </a:majorFont>
+      <a:minorFont>
+        <a:latin typeface="Calibri" panose="020F0502020204030204"/>
+        <a:ea typeface=""/>
+        <a:cs typeface=""/>
+        <a:font script="Jpan" typeface="游ゴシック"/>
+        <a:font script="Hang" typeface="맑은 고딕"/>
+        <a:font script="Hans" typeface="等线"/>
+        <a:font script="Hant" typeface="新細明體"/>
+        <a:font script="Arab" typeface="Arial"/>
+        <a:font script="Hebr" typeface="Arial"/>
+        <a:font script="Thai" typeface="Cordia New"/>
+        <a:font script="Ethi" typeface="Nyala"/>
+        <a:font script="Beng" typeface="Vrinda"/>
+        <a:font script="Gujr" typeface="Shruti"/>
+        <a:font script="Khmr" typeface="DaunPenh"/>
+        <a:font script="Knda" typeface="Tunga"/>
+        <a:font script="Guru" typeface="Raavi"/>
+        <a:font script="Cans" typeface="Euphemia"/>
+        <a:font script="Cher" typeface="Plantagenet Cherokee"/>
+        <a:font script="Yiii" typeface="Microsoft Yi Baiti"/>
+        <a:font script="Tibt" typeface="Microsoft Himalaya"/>
+        <a:font script="Thaa" typeface="MV Boli"/>
+        <a:font script="Deva" typeface="Mangal"/>
+        <a:font script="Telu" typeface="Gautami"/>
+        <a:font script="Taml" typeface="Latha"/>
+        <a:font script="Syrc" typeface="Estrangelo Edessa"/>
+        <a:font script="Orya" typeface="Kalinga"/>
+        <a:font script="Mlym" typeface="Kartika"/>
+        <a:font script="Laoo" typeface="DokChampa"/>
+        <a:font script="Sinh" typeface="Iskoola Pota"/>
+        <a:font script="Mong" typeface="Mongolian Baiti"/>
+        <a:font script="Viet" typeface="Arial"/>
+        <a:font script="Uigh" typeface="Microsoft Uighur"/>
+        <a:font script="Geor" typeface="Sylfaen"/>
+        <a:font script="Armn" typeface="Arial"/>
+        <a:font script="Bugi" typeface="Leelawadee UI"/>
+        <a:font script="Bopo" typeface="Microsoft JhengHei"/>
+        <a:font script="Java" typeface="Javanese Text"/>
+        <a:font script="Lisu" typeface="Segoe UI"/>
+        <a:font script="Mymr" typeface="Myanmar Text"/>
+        <a:font script="Nkoo" typeface="Ebrima"/>
+        <a:font script="Olck" typeface="Nirmala UI"/>
+        <a:font script="Osma" typeface="Ebrima"/>
+        <a:font script="Phag" typeface="Phagspa"/>
+        <a:font script="Syrn" typeface="Estrangelo Edessa"/>
+        <a:font script="Syrj" typeface="Estrangelo Edessa"/>
+        <a:font script="Syre" typeface="Estrangelo Edessa"/>
+        <a:font script="Sora" typeface="Nirmala UI"/>
+        <a:font script="Tale" typeface="Microsoft Tai Le"/>
+        <a:font script="Talu" typeface="Microsoft New Tai Lue"/>
+        <a:font script="Tfng" typeface="Ebrima"/>
+      </a:minorFont>
+    </a:fontScheme>
+    <a:fmtScheme name="Office">
+      <a:fillStyleLst>
+        <a:solidFill>
+          <a:schemeClr val="phClr"/>
+        </a:solidFill>
+        <a:gradFill rotWithShape="1">
+          <a:gsLst>
+            <a:gs pos="0">
+              <a:schemeClr val="phClr">
+                <a:lumMod val="110000"/>
+                <a:satMod val="105000"/>
+                <a:tint val="67000"/>
+              </a:schemeClr>
+            </a:gs>
+            <a:gs pos="50000">
+              <a:schemeClr val="phClr">
+                <a:lumMod val="105000"/>
+                <a:satMod val="103000"/>
+                <a:tint val="73000"/>
+              </a:schemeClr>
+            </a:gs>
+            <a:gs pos="100000">
+              <a:schemeClr val="phClr">
+                <a:lumMod val="105000"/>
+                <a:satMod val="109000"/>
+                <a:tint val="81000"/>
+              </a:schemeClr>
+            </a:gs>
+          </a:gsLst>
+          <a:lin ang="5400000" scaled="0"/>
+        </a:gradFill>
+        <a:gradFill rotWithShape="1">
+          <a:gsLst>
+            <a:gs pos="0">
+              <a:schemeClr val="phClr">
+                <a:satMod val="103000"/>
+                <a:lumMod val="102000"/>
+                <a:tint val="94000"/>
+              </a:schemeClr>
+            </a:gs>
+            <a:gs pos="50000">
+              <a:schemeClr val="phClr">
+                <a:satMod val="110000"/>
+                <a:lumMod val="100000"/>
+                <a:shade val="100000"/>
+              </a:schemeClr>
+            </a:gs>
+            <a:gs pos="100000">
+              <a:schemeClr val="phClr">
+                <a:lumMod val="99000"/>
+                <a:satMod val="120000"/>
+                <a:shade val="78000"/>
+              </a:schemeClr>
+            </a:gs>
+          </a:gsLst>
+          <a:lin ang="5400000" scaled="0"/>
+        </a:gradFill>
+      </a:fillStyleLst>
+      <a:lnStyleLst>
+        <a:ln w="6350" cap="flat" cmpd="sng" algn="ctr">
+          <a:solidFill>
+            <a:schemeClr val="phClr"/>
+          </a:solidFill>
+          <a:prstDash val="solid"/>
+          <a:miter lim="800000"/>
+        </a:ln>
+        <a:ln w="12700" cap="flat" cmpd="sng" algn="ctr">
+          <a:solidFill>
+            <a:schemeClr val="phClr"/>
+          </a:solidFill>
+          <a:prstDash val="solid"/>
+          <a:miter lim="800000"/>
+        </a:ln>
+        <a:ln w="19050" cap="flat" cmpd="sng" algn="ctr">
+          <a:solidFill>
+            <a:schemeClr val="phClr"/>
+          </a:solidFill>
+          <a:prstDash val="solid"/>
+          <a:miter lim="800000"/>
+        </a:ln>
+      </a:lnStyleLst>
+      <a:effectStyleLst>
+        <a:effectStyle>
+          <a:effectLst/>
+        </a:effectStyle>
+        <a:effectStyle>
+          <a:effectLst/>
+        </a:effectStyle>
+        <a:effectStyle>
+          <a:effectLst>
+            <a:outerShdw blurRad="57150" dist="19050" dir="5400000" algn="ctr" rotWithShape="0">
+              <a:srgbClr val="000000">
+                <a:alpha val="63000"/>
+              </a:srgbClr>
+            </a:outerShdw>
+          </a:effectLst>
+        </a:effectStyle>
+      </a:effectStyleLst>
+      <a:bgFillStyleLst>
+        <a:solidFill>
+          <a:schemeClr val="phClr"/>
+        </a:solidFill>
+        <a:solidFill>
+          <a:schemeClr val="phClr">
+            <a:tint val="95000"/>
+            <a:satMod val="170000"/>
+          </a:schemeClr>
+        </a:solidFill>
+        <a:gradFill rotWithShape="1">
+          <a:gsLst>
+            <a:gs pos="0">
+              <a:schemeClr val="phClr">
+                <a:tint val="93000"/>
+                <a:satMod val="150000"/>
+                <a:shade val="98000"/>
+                <a:lumMod val="102000"/>
+              </a:schemeClr>
+            </a:gs>
+            <a:gs pos="50000">
+              <a:schemeClr val="phClr">
+                <a:tint val="98000"/>
+                <a:satMod val="130000"/>
+                <a:shade val="90000"/>
+                <a:lumMod val="103000"/>
+              </a:schemeClr>
+            </a:gs>
+            <a:gs pos="100000">
+              <a:schemeClr val="phClr">
+                <a:shade val="63000"/>
+                <a:satMod val="120000"/>
+              </a:schemeClr>
+            </a:gs>
+          </a:gsLst>
+          <a:lin ang="5400000" scaled="0"/>
+        </a:gradFill>
+      </a:bgFillStyleLst>
+    </a:fmtScheme>
+  </a:themeElements>
+  <a:objectDefaults/>
+  <a:extraClrSchemeLst/>
+  <a:extLst>
+    <a:ext uri="{05A4C25C-085E-4340-85A3-A5531E510DB2}">
+      <thm15:themeFamily xmlns:thm15="http://schemas.microsoft.com/office/thememl/2012/main" name="Office Theme" id="{62F939B6-93AF-4DB8-9C6B-D6C7DFDC589F}" vid="{4A3C46E8-61CC-4603-A589-7422A47A8E4A}"/>
+    </a:ext>
+  </a:extLst>
+</a:theme>
 </file>